--- a/decks/mlops-platform/mlops-platform.pptx
+++ b/decks/mlops-platform/mlops-platform.pptx
@@ -1388,6 +1388,13 @@
 <file path=ppt/slides/slide1.xml><?xml version="1.0" encoding="utf-8"?>
 <p:sld xmlns:a="http://schemas.openxmlformats.org/drawingml/2006/main" xmlns:r="http://schemas.openxmlformats.org/officeDocument/2006/relationships" xmlns:p="http://schemas.openxmlformats.org/presentationml/2006/main">
   <p:cSld name="Slide 1">
+    <p:bg>
+      <p:bgPr>
+        <a:solidFill>
+          <a:srgbClr val="FFFFFF"/>
+        </a:solidFill>
+      </p:bgPr>
+    </p:bg>
     <p:spTree>
       <p:nvGrpSpPr>
         <p:cNvPr id="1" name=""/>
@@ -1402,30 +1409,541 @@
           <a:chExt cx="0" cy="0"/>
         </a:xfrm>
       </p:grpSpPr>
-      <p:pic>
-        <p:nvPicPr>
-          <p:cNvPr id="2" name="Image 0" descr="/tmp/slide-1787840565355-26v05j2rwue.png">    </p:cNvPr>
-          <p:cNvPicPr>
-            <a:picLocks noChangeAspect="1"/>
-          </p:cNvPicPr>
-          <p:nvPr/>
-        </p:nvPicPr>
-        <p:blipFill>
-          <a:blip r:embed="rId1"/>
-          <a:stretch>
-            <a:fillRect/>
-          </a:stretch>
-        </p:blipFill>
-        <p:spPr>
-          <a:xfrm>
-            <a:off x="0" y="0"/>
-            <a:ext cx="12188952" cy="6858000"/>
-          </a:xfrm>
-          <a:prstGeom prst="rect">
-            <a:avLst/>
-          </a:prstGeom>
-        </p:spPr>
-      </p:pic>
+      <p:sp>
+        <p:nvSpPr>
+          <p:cNvPr id="2" name="Text 0"/>
+          <p:cNvSpPr/>
+          <p:nvPr/>
+        </p:nvSpPr>
+        <p:spPr>
+          <a:xfrm>
+            <a:off x="541599" y="484386"/>
+            <a:ext cx="11327869" cy="260747"/>
+          </a:xfrm>
+          <a:prstGeom prst="rect">
+            <a:avLst/>
+          </a:prstGeom>
+          <a:noFill/>
+          <a:ln/>
+        </p:spPr>
+        <p:txBody>
+          <a:bodyPr wrap="square" lIns="0" tIns="0" rIns="0" bIns="0" rtlCol="0" anchor="t"/>
+          <a:lstStyle/>
+          <a:p>
+            <a:pPr algn="l" indent="0" marL="0">
+              <a:lnSpc>
+                <a:spcPts val="2053"/>
+              </a:lnSpc>
+              <a:spcAft>
+                <a:spcPts val="933"/>
+              </a:spcAft>
+              <a:buNone/>
+            </a:pPr>
+            <a:r>
+              <a:rPr lang="en-US" sz="1466" b="1" dirty="0">
+                <a:solidFill>
+                  <a:srgbClr val="6B7280"/>
+                </a:solidFill>
+                <a:latin typeface="Arimo" pitchFamily="34" charset="0"/>
+                <a:ea typeface="Arimo" pitchFamily="34" charset="-122"/>
+                <a:cs typeface="Arimo" pitchFamily="34" charset="-120"/>
+              </a:rPr>
+              <a:t>PLATFORM ENGINEERING / 2026</a:t>
+            </a:r>
+            <a:endParaRPr lang="en-US" sz="1466" dirty="0"/>
+          </a:p>
+        </p:txBody>
+      </p:sp>
+      <p:sp>
+        <p:nvSpPr>
+          <p:cNvPr id="3" name="Text 1"/>
+          <p:cNvSpPr/>
+          <p:nvPr/>
+        </p:nvSpPr>
+        <p:spPr>
+          <a:xfrm>
+            <a:off x="541599" y="863600"/>
+            <a:ext cx="11327869" cy="423267"/>
+          </a:xfrm>
+          <a:prstGeom prst="rect">
+            <a:avLst/>
+          </a:prstGeom>
+          <a:noFill/>
+          <a:ln/>
+        </p:spPr>
+        <p:txBody>
+          <a:bodyPr wrap="square" lIns="0" tIns="0" rIns="0" bIns="0" rtlCol="0" anchor="t"/>
+          <a:lstStyle/>
+          <a:p>
+            <a:pPr algn="l" indent="0" marL="0">
+              <a:lnSpc>
+                <a:spcPts val="3333"/>
+              </a:lnSpc>
+              <a:buNone/>
+            </a:pPr>
+            <a:r>
+              <a:rPr lang="en-US" sz="2666" b="1" dirty="0">
+                <a:solidFill>
+                  <a:srgbClr val="1A1A1A"/>
+                </a:solidFill>
+                <a:latin typeface="Arimo" pitchFamily="34" charset="0"/>
+                <a:ea typeface="Arimo" pitchFamily="34" charset="-122"/>
+                <a:cs typeface="Arimo" pitchFamily="34" charset="-120"/>
+              </a:rPr>
+              <a:t>MLOps Platform Roadmap</a:t>
+            </a:r>
+            <a:endParaRPr lang="en-US" sz="2666" dirty="0"/>
+          </a:p>
+        </p:txBody>
+      </p:sp>
+      <p:sp>
+        <p:nvSpPr>
+          <p:cNvPr id="4" name="Text 2"/>
+          <p:cNvSpPr/>
+          <p:nvPr/>
+        </p:nvSpPr>
+        <p:spPr>
+          <a:xfrm>
+            <a:off x="541599" y="1286867"/>
+            <a:ext cx="11105754" cy="12700"/>
+          </a:xfrm>
+          <a:prstGeom prst="rect">
+            <a:avLst/>
+          </a:prstGeom>
+          <a:solidFill>
+            <a:srgbClr val="D1D5DB"/>
+          </a:solidFill>
+          <a:ln/>
+        </p:spPr>
+        <p:txBody>
+          <a:bodyPr wrap="square" rtlCol="0" anchor="ctr"/>
+          <a:lstStyle/>
+          <a:p>
+            <a:pPr indent="0" marL="0">
+              <a:buNone/>
+            </a:pPr>
+            <a:endParaRPr lang="en-US" dirty="0"/>
+          </a:p>
+        </p:txBody>
+      </p:sp>
+      <p:sp>
+        <p:nvSpPr>
+          <p:cNvPr id="5" name="Text 3"/>
+          <p:cNvSpPr/>
+          <p:nvPr/>
+        </p:nvSpPr>
+        <p:spPr>
+          <a:xfrm>
+            <a:off x="541599" y="2647752"/>
+            <a:ext cx="2031492" cy="50800"/>
+          </a:xfrm>
+          <a:prstGeom prst="rect">
+            <a:avLst/>
+          </a:prstGeom>
+          <a:solidFill>
+            <a:srgbClr val="0B5FFF"/>
+          </a:solidFill>
+          <a:ln/>
+        </p:spPr>
+        <p:txBody>
+          <a:bodyPr wrap="square" rtlCol="0" anchor="ctr"/>
+          <a:lstStyle/>
+          <a:p>
+            <a:pPr indent="0" marL="0">
+              <a:buNone/>
+            </a:pPr>
+            <a:endParaRPr lang="en-US" dirty="0"/>
+          </a:p>
+        </p:txBody>
+      </p:sp>
+      <p:sp>
+        <p:nvSpPr>
+          <p:cNvPr id="6" name="Text 4"/>
+          <p:cNvSpPr/>
+          <p:nvPr/>
+        </p:nvSpPr>
+        <p:spPr>
+          <a:xfrm>
+            <a:off x="541599" y="3071019"/>
+            <a:ext cx="8115676" cy="834628"/>
+          </a:xfrm>
+          <a:prstGeom prst="rect">
+            <a:avLst/>
+          </a:prstGeom>
+          <a:noFill/>
+          <a:ln/>
+        </p:spPr>
+        <p:txBody>
+          <a:bodyPr wrap="square" lIns="0" tIns="0" rIns="0" bIns="0" rtlCol="0" anchor="t"/>
+          <a:lstStyle/>
+          <a:p>
+            <a:pPr algn="l" indent="0" marL="0">
+              <a:lnSpc>
+                <a:spcPts val="3286"/>
+              </a:lnSpc>
+              <a:buNone/>
+            </a:pPr>
+            <a:r>
+              <a:rPr lang="en-US" sz="2266" dirty="0">
+                <a:solidFill>
+                  <a:srgbClr val="1A1A1A"/>
+                </a:solidFill>
+                <a:latin typeface="Arimo" pitchFamily="34" charset="0"/>
+                <a:ea typeface="Arimo" pitchFamily="34" charset="-122"/>
+                <a:cs typeface="Arimo" pitchFamily="34" charset="-120"/>
+              </a:rPr>
+              <a:t>What to build first, what to buy,</a:t>
+            </a:r>
+            <a:endParaRPr lang="en-US" sz="2266" dirty="0"/>
+          </a:p>
+          <a:p>
+            <a:pPr algn="l" indent="0" marL="0">
+              <a:lnSpc>
+                <a:spcPts val="3286"/>
+              </a:lnSpc>
+              <a:buNone/>
+            </a:pPr>
+            <a:r>
+              <a:rPr lang="en-US" sz="2266" dirty="0">
+                <a:solidFill>
+                  <a:srgbClr val="1A1A1A"/>
+                </a:solidFill>
+                <a:latin typeface="Arimo" pitchFamily="34" charset="0"/>
+                <a:ea typeface="Arimo" pitchFamily="34" charset="-122"/>
+                <a:cs typeface="Arimo" pitchFamily="34" charset="-120"/>
+              </a:rPr>
+              <a:t>and what to stop each phase on.</a:t>
+            </a:r>
+            <a:endParaRPr lang="en-US" sz="2266" dirty="0"/>
+          </a:p>
+        </p:txBody>
+      </p:sp>
+      <p:sp>
+        <p:nvSpPr>
+          <p:cNvPr id="7" name="Shape 5"/>
+          <p:cNvSpPr/>
+          <p:nvPr/>
+        </p:nvSpPr>
+        <p:spPr>
+          <a:xfrm>
+            <a:off x="541599" y="4989314"/>
+            <a:ext cx="11105754" cy="0"/>
+          </a:xfrm>
+          <a:prstGeom prst="line">
+            <a:avLst/>
+          </a:prstGeom>
+          <a:noFill/>
+          <a:ln w="12698">
+            <a:solidFill>
+              <a:srgbClr val="D1D5DB"/>
+            </a:solidFill>
+            <a:prstDash val="solid"/>
+          </a:ln>
+        </p:spPr>
+      </p:sp>
+      <p:sp>
+        <p:nvSpPr>
+          <p:cNvPr id="8" name="Text 6"/>
+          <p:cNvSpPr/>
+          <p:nvPr/>
+        </p:nvSpPr>
+        <p:spPr>
+          <a:xfrm>
+            <a:off x="541599" y="5232598"/>
+            <a:ext cx="2292285" cy="260747"/>
+          </a:xfrm>
+          <a:prstGeom prst="rect">
+            <a:avLst/>
+          </a:prstGeom>
+          <a:noFill/>
+          <a:ln/>
+        </p:spPr>
+        <p:txBody>
+          <a:bodyPr wrap="square" lIns="0" tIns="0" rIns="0" bIns="0" rtlCol="0" anchor="t"/>
+          <a:lstStyle/>
+          <a:p>
+            <a:pPr algn="l" indent="0" marL="0">
+              <a:lnSpc>
+                <a:spcPts val="2053"/>
+              </a:lnSpc>
+              <a:spcAft>
+                <a:spcPts val="667"/>
+              </a:spcAft>
+              <a:buNone/>
+            </a:pPr>
+            <a:r>
+              <a:rPr lang="en-US" sz="1466" b="1" dirty="0">
+                <a:solidFill>
+                  <a:srgbClr val="6B7280"/>
+                </a:solidFill>
+                <a:latin typeface="Arimo" pitchFamily="34" charset="0"/>
+                <a:ea typeface="Arimo" pitchFamily="34" charset="-122"/>
+                <a:cs typeface="Arimo" pitchFamily="34" charset="-120"/>
+              </a:rPr>
+              <a:t>PREPARED BY</a:t>
+            </a:r>
+            <a:endParaRPr lang="en-US" sz="1466" dirty="0"/>
+          </a:p>
+        </p:txBody>
+      </p:sp>
+      <p:sp>
+        <p:nvSpPr>
+          <p:cNvPr id="9" name="Text 7"/>
+          <p:cNvSpPr/>
+          <p:nvPr/>
+        </p:nvSpPr>
+        <p:spPr>
+          <a:xfrm>
+            <a:off x="541599" y="5577880"/>
+            <a:ext cx="2292285" cy="331986"/>
+          </a:xfrm>
+          <a:prstGeom prst="rect">
+            <a:avLst/>
+          </a:prstGeom>
+          <a:noFill/>
+          <a:ln/>
+        </p:spPr>
+        <p:txBody>
+          <a:bodyPr wrap="square" lIns="0" tIns="0" rIns="0" bIns="0" rtlCol="0" anchor="t"/>
+          <a:lstStyle/>
+          <a:p>
+            <a:pPr algn="l" indent="0" marL="0">
+              <a:lnSpc>
+                <a:spcPts val="2613"/>
+              </a:lnSpc>
+              <a:buNone/>
+            </a:pPr>
+            <a:r>
+              <a:rPr lang="en-US" sz="1866" dirty="0">
+                <a:solidFill>
+                  <a:srgbClr val="1A1A1A"/>
+                </a:solidFill>
+                <a:latin typeface="Arimo" pitchFamily="34" charset="0"/>
+                <a:ea typeface="Arimo" pitchFamily="34" charset="-122"/>
+                <a:cs typeface="Arimo" pitchFamily="34" charset="-120"/>
+              </a:rPr>
+              <a:t>PRESENTER · TEAM</a:t>
+            </a:r>
+            <a:endParaRPr lang="en-US" sz="1866" dirty="0"/>
+          </a:p>
+        </p:txBody>
+      </p:sp>
+      <p:sp>
+        <p:nvSpPr>
+          <p:cNvPr id="10" name="Text 8"/>
+          <p:cNvSpPr/>
+          <p:nvPr/>
+        </p:nvSpPr>
+        <p:spPr>
+          <a:xfrm>
+            <a:off x="3669184" y="5232598"/>
+            <a:ext cx="841799" cy="260747"/>
+          </a:xfrm>
+          <a:prstGeom prst="rect">
+            <a:avLst/>
+          </a:prstGeom>
+          <a:noFill/>
+          <a:ln/>
+        </p:spPr>
+        <p:txBody>
+          <a:bodyPr wrap="square" lIns="0" tIns="0" rIns="0" bIns="0" rtlCol="0" anchor="t"/>
+          <a:lstStyle/>
+          <a:p>
+            <a:pPr algn="l" indent="0" marL="0">
+              <a:lnSpc>
+                <a:spcPts val="2053"/>
+              </a:lnSpc>
+              <a:spcAft>
+                <a:spcPts val="667"/>
+              </a:spcAft>
+              <a:buNone/>
+            </a:pPr>
+            <a:r>
+              <a:rPr lang="en-US" sz="1466" b="1" dirty="0">
+                <a:solidFill>
+                  <a:srgbClr val="6B7280"/>
+                </a:solidFill>
+                <a:latin typeface="Arimo" pitchFamily="34" charset="0"/>
+                <a:ea typeface="Arimo" pitchFamily="34" charset="-122"/>
+                <a:cs typeface="Arimo" pitchFamily="34" charset="-120"/>
+              </a:rPr>
+              <a:t>DATE</a:t>
+            </a:r>
+            <a:endParaRPr lang="en-US" sz="1466" dirty="0"/>
+          </a:p>
+        </p:txBody>
+      </p:sp>
+      <p:sp>
+        <p:nvSpPr>
+          <p:cNvPr id="11" name="Text 9"/>
+          <p:cNvSpPr/>
+          <p:nvPr/>
+        </p:nvSpPr>
+        <p:spPr>
+          <a:xfrm>
+            <a:off x="3669184" y="5577880"/>
+            <a:ext cx="841799" cy="331986"/>
+          </a:xfrm>
+          <a:prstGeom prst="rect">
+            <a:avLst/>
+          </a:prstGeom>
+          <a:noFill/>
+          <a:ln/>
+        </p:spPr>
+        <p:txBody>
+          <a:bodyPr wrap="square" lIns="0" tIns="0" rIns="0" bIns="0" rtlCol="0" anchor="t"/>
+          <a:lstStyle/>
+          <a:p>
+            <a:pPr algn="l" indent="0" marL="0">
+              <a:lnSpc>
+                <a:spcPts val="2613"/>
+              </a:lnSpc>
+              <a:buNone/>
+            </a:pPr>
+            <a:r>
+              <a:rPr lang="en-US" sz="1866" dirty="0">
+                <a:solidFill>
+                  <a:srgbClr val="1A1A1A"/>
+                </a:solidFill>
+                <a:latin typeface="Arimo" pitchFamily="34" charset="0"/>
+                <a:ea typeface="Arimo" pitchFamily="34" charset="-122"/>
+                <a:cs typeface="Arimo" pitchFamily="34" charset="-120"/>
+              </a:rPr>
+              <a:t>2026.08</a:t>
+            </a:r>
+            <a:endParaRPr lang="en-US" sz="1866" dirty="0"/>
+          </a:p>
+        </p:txBody>
+      </p:sp>
+      <p:sp>
+        <p:nvSpPr>
+          <p:cNvPr id="12" name="Text 10"/>
+          <p:cNvSpPr/>
+          <p:nvPr/>
+        </p:nvSpPr>
+        <p:spPr>
+          <a:xfrm>
+            <a:off x="5374725" y="5232598"/>
+            <a:ext cx="2719660" cy="260747"/>
+          </a:xfrm>
+          <a:prstGeom prst="rect">
+            <a:avLst/>
+          </a:prstGeom>
+          <a:noFill/>
+          <a:ln/>
+        </p:spPr>
+        <p:txBody>
+          <a:bodyPr wrap="square" lIns="0" tIns="0" rIns="0" bIns="0" rtlCol="0" anchor="t"/>
+          <a:lstStyle/>
+          <a:p>
+            <a:pPr algn="l" indent="0" marL="0">
+              <a:lnSpc>
+                <a:spcPts val="2053"/>
+              </a:lnSpc>
+              <a:spcAft>
+                <a:spcPts val="667"/>
+              </a:spcAft>
+              <a:buNone/>
+            </a:pPr>
+            <a:r>
+              <a:rPr lang="en-US" sz="1466" b="1" dirty="0">
+                <a:solidFill>
+                  <a:srgbClr val="6B7280"/>
+                </a:solidFill>
+                <a:latin typeface="Arimo" pitchFamily="34" charset="0"/>
+                <a:ea typeface="Arimo" pitchFamily="34" charset="-122"/>
+                <a:cs typeface="Arimo" pitchFamily="34" charset="-120"/>
+              </a:rPr>
+              <a:t>AUDIENCE</a:t>
+            </a:r>
+            <a:endParaRPr lang="en-US" sz="1466" dirty="0"/>
+          </a:p>
+        </p:txBody>
+      </p:sp>
+      <p:sp>
+        <p:nvSpPr>
+          <p:cNvPr id="13" name="Text 11"/>
+          <p:cNvSpPr/>
+          <p:nvPr/>
+        </p:nvSpPr>
+        <p:spPr>
+          <a:xfrm>
+            <a:off x="5374725" y="5577880"/>
+            <a:ext cx="2719660" cy="331986"/>
+          </a:xfrm>
+          <a:prstGeom prst="rect">
+            <a:avLst/>
+          </a:prstGeom>
+          <a:noFill/>
+          <a:ln/>
+        </p:spPr>
+        <p:txBody>
+          <a:bodyPr wrap="square" lIns="0" tIns="0" rIns="0" bIns="0" rtlCol="0" anchor="t"/>
+          <a:lstStyle/>
+          <a:p>
+            <a:pPr algn="l" indent="0" marL="0">
+              <a:lnSpc>
+                <a:spcPts val="2613"/>
+              </a:lnSpc>
+              <a:buNone/>
+            </a:pPr>
+            <a:r>
+              <a:rPr lang="en-US" sz="1866" dirty="0">
+                <a:solidFill>
+                  <a:srgbClr val="1A1A1A"/>
+                </a:solidFill>
+                <a:latin typeface="Arimo" pitchFamily="34" charset="0"/>
+                <a:ea typeface="Arimo" pitchFamily="34" charset="-122"/>
+                <a:cs typeface="Arimo" pitchFamily="34" charset="-120"/>
+              </a:rPr>
+              <a:t>PLATFORM &amp; ML LEADS</a:t>
+            </a:r>
+            <a:endParaRPr lang="en-US" sz="1866" dirty="0"/>
+          </a:p>
+        </p:txBody>
+      </p:sp>
+      <p:sp>
+        <p:nvSpPr>
+          <p:cNvPr id="14" name="Text 12"/>
+          <p:cNvSpPr/>
+          <p:nvPr/>
+        </p:nvSpPr>
+        <p:spPr>
+          <a:xfrm>
+            <a:off x="319484" y="6113066"/>
+            <a:ext cx="11327869" cy="236934"/>
+          </a:xfrm>
+          <a:prstGeom prst="rect">
+            <a:avLst/>
+          </a:prstGeom>
+          <a:noFill/>
+          <a:ln/>
+        </p:spPr>
+        <p:txBody>
+          <a:bodyPr wrap="square" lIns="0" tIns="0" rIns="0" bIns="0" rtlCol="0" anchor="t"/>
+          <a:lstStyle/>
+          <a:p>
+            <a:pPr algn="r" indent="0" marL="0">
+              <a:lnSpc>
+                <a:spcPts val="1866"/>
+              </a:lnSpc>
+              <a:buNone/>
+            </a:pPr>
+            <a:r>
+              <a:rPr lang="en-US" sz="1333" dirty="0">
+                <a:solidFill>
+                  <a:srgbClr val="6B7280"/>
+                </a:solidFill>
+                <a:latin typeface="Arimo" pitchFamily="34" charset="0"/>
+                <a:ea typeface="Arimo" pitchFamily="34" charset="-122"/>
+                <a:cs typeface="Arimo" pitchFamily="34" charset="-120"/>
+              </a:rPr>
+              <a:t>MLOPS PLATFORM ROADMAP · SHEET 01/07 · NO EXTERNAL DATA CITED</a:t>
+            </a:r>
+            <a:endParaRPr lang="en-US" sz="1333" dirty="0"/>
+          </a:p>
+        </p:txBody>
+      </p:sp>
     </p:spTree>
   </p:cSld>
   <p:clrMapOvr>
@@ -1437,6 +1955,13 @@
 <file path=ppt/slides/slide2.xml><?xml version="1.0" encoding="utf-8"?>
 <p:sld xmlns:a="http://schemas.openxmlformats.org/drawingml/2006/main" xmlns:r="http://schemas.openxmlformats.org/officeDocument/2006/relationships" xmlns:p="http://schemas.openxmlformats.org/presentationml/2006/main">
   <p:cSld name="Slide 2">
+    <p:bg>
+      <p:bgPr>
+        <a:solidFill>
+          <a:srgbClr val="FFFFFF"/>
+        </a:solidFill>
+      </p:bgPr>
+    </p:bg>
     <p:spTree>
       <p:nvGrpSpPr>
         <p:cNvPr id="1" name=""/>
@@ -1451,30 +1976,866 @@
           <a:chExt cx="0" cy="0"/>
         </a:xfrm>
       </p:grpSpPr>
-      <p:pic>
-        <p:nvPicPr>
-          <p:cNvPr id="2" name="Image 0" descr="/tmp/slide-1787840565638-tby30v33s6b.png">    </p:cNvPr>
-          <p:cNvPicPr>
-            <a:picLocks noChangeAspect="1"/>
-          </p:cNvPicPr>
-          <p:nvPr/>
-        </p:nvPicPr>
-        <p:blipFill>
-          <a:blip r:embed="rId1"/>
-          <a:stretch>
-            <a:fillRect/>
-          </a:stretch>
-        </p:blipFill>
-        <p:spPr>
-          <a:xfrm>
-            <a:off x="0" y="0"/>
-            <a:ext cx="12188952" cy="6858000"/>
-          </a:xfrm>
-          <a:prstGeom prst="rect">
-            <a:avLst/>
-          </a:prstGeom>
-        </p:spPr>
-      </p:pic>
+      <p:sp>
+        <p:nvSpPr>
+          <p:cNvPr id="2" name="Text 0"/>
+          <p:cNvSpPr/>
+          <p:nvPr/>
+        </p:nvSpPr>
+        <p:spPr>
+          <a:xfrm>
+            <a:off x="541599" y="484386"/>
+            <a:ext cx="11327869" cy="260747"/>
+          </a:xfrm>
+          <a:prstGeom prst="rect">
+            <a:avLst/>
+          </a:prstGeom>
+          <a:noFill/>
+          <a:ln/>
+        </p:spPr>
+        <p:txBody>
+          <a:bodyPr wrap="square" lIns="0" tIns="0" rIns="0" bIns="0" rtlCol="0" anchor="t"/>
+          <a:lstStyle/>
+          <a:p>
+            <a:pPr algn="l" indent="0" marL="0">
+              <a:lnSpc>
+                <a:spcPts val="2053"/>
+              </a:lnSpc>
+              <a:spcAft>
+                <a:spcPts val="933"/>
+              </a:spcAft>
+              <a:buNone/>
+            </a:pPr>
+            <a:r>
+              <a:rPr lang="en-US" sz="1466" b="1" dirty="0">
+                <a:solidFill>
+                  <a:srgbClr val="6B7280"/>
+                </a:solidFill>
+                <a:latin typeface="Arimo" pitchFamily="34" charset="0"/>
+                <a:ea typeface="Arimo" pitchFamily="34" charset="-122"/>
+                <a:cs typeface="Arimo" pitchFamily="34" charset="-120"/>
+              </a:rPr>
+              <a:t>DIAGNOSIS</a:t>
+            </a:r>
+            <a:endParaRPr lang="en-US" sz="1466" dirty="0"/>
+          </a:p>
+        </p:txBody>
+      </p:sp>
+      <p:sp>
+        <p:nvSpPr>
+          <p:cNvPr id="3" name="Text 1"/>
+          <p:cNvSpPr/>
+          <p:nvPr/>
+        </p:nvSpPr>
+        <p:spPr>
+          <a:xfrm>
+            <a:off x="541599" y="863600"/>
+            <a:ext cx="11327869" cy="423267"/>
+          </a:xfrm>
+          <a:prstGeom prst="rect">
+            <a:avLst/>
+          </a:prstGeom>
+          <a:noFill/>
+          <a:ln/>
+        </p:spPr>
+        <p:txBody>
+          <a:bodyPr wrap="square" lIns="0" tIns="0" rIns="0" bIns="0" rtlCol="0" anchor="t"/>
+          <a:lstStyle/>
+          <a:p>
+            <a:pPr algn="l" indent="0" marL="0">
+              <a:lnSpc>
+                <a:spcPts val="3333"/>
+              </a:lnSpc>
+              <a:buNone/>
+            </a:pPr>
+            <a:r>
+              <a:rPr lang="en-US" sz="2666" b="1" dirty="0">
+                <a:solidFill>
+                  <a:srgbClr val="1A1A1A"/>
+                </a:solidFill>
+                <a:latin typeface="Arimo" pitchFamily="34" charset="0"/>
+                <a:ea typeface="Arimo" pitchFamily="34" charset="-122"/>
+                <a:cs typeface="Arimo" pitchFamily="34" charset="-120"/>
+              </a:rPr>
+              <a:t>The problem is usually not MLOps — it is repeatability</a:t>
+            </a:r>
+            <a:endParaRPr lang="en-US" sz="2666" dirty="0"/>
+          </a:p>
+        </p:txBody>
+      </p:sp>
+      <p:sp>
+        <p:nvSpPr>
+          <p:cNvPr id="4" name="Text 2"/>
+          <p:cNvSpPr/>
+          <p:nvPr/>
+        </p:nvSpPr>
+        <p:spPr>
+          <a:xfrm>
+            <a:off x="541599" y="1286867"/>
+            <a:ext cx="11105754" cy="12700"/>
+          </a:xfrm>
+          <a:prstGeom prst="rect">
+            <a:avLst/>
+          </a:prstGeom>
+          <a:solidFill>
+            <a:srgbClr val="D1D5DB"/>
+          </a:solidFill>
+          <a:ln/>
+        </p:spPr>
+        <p:txBody>
+          <a:bodyPr wrap="square" rtlCol="0" anchor="ctr"/>
+          <a:lstStyle/>
+          <a:p>
+            <a:pPr indent="0" marL="0">
+              <a:buNone/>
+            </a:pPr>
+            <a:endParaRPr lang="en-US" dirty="0"/>
+          </a:p>
+        </p:txBody>
+      </p:sp>
+      <p:sp>
+        <p:nvSpPr>
+          <p:cNvPr id="5" name="Text 3"/>
+          <p:cNvSpPr/>
+          <p:nvPr/>
+        </p:nvSpPr>
+        <p:spPr>
+          <a:xfrm>
+            <a:off x="541599" y="1570434"/>
+            <a:ext cx="2624077" cy="3770511"/>
+          </a:xfrm>
+          <a:prstGeom prst="rect">
+            <a:avLst/>
+          </a:prstGeom>
+          <a:noFill/>
+          <a:ln w="12698">
+            <a:solidFill>
+              <a:srgbClr val="D1D5DB"/>
+            </a:solidFill>
+          </a:ln>
+        </p:spPr>
+        <p:txBody>
+          <a:bodyPr wrap="square" rtlCol="0" anchor="ctr"/>
+          <a:lstStyle/>
+          <a:p>
+            <a:pPr indent="0" marL="0">
+              <a:buNone/>
+            </a:pPr>
+            <a:endParaRPr lang="en-US" dirty="0"/>
+          </a:p>
+        </p:txBody>
+      </p:sp>
+      <p:sp>
+        <p:nvSpPr>
+          <p:cNvPr id="6" name="Text 4"/>
+          <p:cNvSpPr/>
+          <p:nvPr/>
+        </p:nvSpPr>
+        <p:spPr>
+          <a:xfrm>
+            <a:off x="808232" y="1820069"/>
+            <a:ext cx="2132626" cy="331986"/>
+          </a:xfrm>
+          <a:prstGeom prst="rect">
+            <a:avLst/>
+          </a:prstGeom>
+          <a:noFill/>
+          <a:ln/>
+        </p:spPr>
+        <p:txBody>
+          <a:bodyPr wrap="square" lIns="0" tIns="0" rIns="0" bIns="0" rtlCol="0" anchor="t"/>
+          <a:lstStyle/>
+          <a:p>
+            <a:pPr algn="l" indent="0" marL="0">
+              <a:lnSpc>
+                <a:spcPts val="2613"/>
+              </a:lnSpc>
+              <a:spcAft>
+                <a:spcPts val="1200"/>
+              </a:spcAft>
+              <a:buNone/>
+            </a:pPr>
+            <a:r>
+              <a:rPr lang="en-US" sz="1866" b="1" dirty="0">
+                <a:solidFill>
+                  <a:srgbClr val="6B7280"/>
+                </a:solidFill>
+                <a:latin typeface="Arimo" pitchFamily="34" charset="0"/>
+                <a:ea typeface="Arimo" pitchFamily="34" charset="-122"/>
+                <a:cs typeface="Arimo" pitchFamily="34" charset="-120"/>
+              </a:rPr>
+              <a:t>01</a:t>
+            </a:r>
+            <a:endParaRPr lang="en-US" sz="1866" dirty="0"/>
+          </a:p>
+        </p:txBody>
+      </p:sp>
+      <p:sp>
+        <p:nvSpPr>
+          <p:cNvPr id="7" name="Text 5"/>
+          <p:cNvSpPr/>
+          <p:nvPr/>
+        </p:nvSpPr>
+        <p:spPr>
+          <a:xfrm>
+            <a:off x="808232" y="2304455"/>
+            <a:ext cx="2132626" cy="660400"/>
+          </a:xfrm>
+          <a:prstGeom prst="rect">
+            <a:avLst/>
+          </a:prstGeom>
+          <a:noFill/>
+          <a:ln/>
+        </p:spPr>
+        <p:txBody>
+          <a:bodyPr wrap="square" lIns="0" tIns="0" rIns="0" bIns="0" rtlCol="0" anchor="t"/>
+          <a:lstStyle/>
+          <a:p>
+            <a:pPr algn="l" indent="0" marL="0">
+              <a:lnSpc>
+                <a:spcPts val="2600"/>
+              </a:lnSpc>
+              <a:spcAft>
+                <a:spcPts val="933"/>
+              </a:spcAft>
+              <a:buNone/>
+            </a:pPr>
+            <a:r>
+              <a:rPr lang="en-US" sz="2000" b="1" dirty="0">
+                <a:solidFill>
+                  <a:srgbClr val="1A1A1A"/>
+                </a:solidFill>
+                <a:latin typeface="Arimo" pitchFamily="34" charset="0"/>
+                <a:ea typeface="Arimo" pitchFamily="34" charset="-122"/>
+                <a:cs typeface="Arimo" pitchFamily="34" charset="-120"/>
+              </a:rPr>
+              <a:t>Training lives in notebooks</a:t>
+            </a:r>
+            <a:endParaRPr lang="en-US" sz="2000" dirty="0"/>
+          </a:p>
+        </p:txBody>
+      </p:sp>
+      <p:sp>
+        <p:nvSpPr>
+          <p:cNvPr id="8" name="Text 6"/>
+          <p:cNvSpPr/>
+          <p:nvPr/>
+        </p:nvSpPr>
+        <p:spPr>
+          <a:xfrm>
+            <a:off x="808232" y="3083322"/>
+            <a:ext cx="2132626" cy="1327944"/>
+          </a:xfrm>
+          <a:prstGeom prst="rect">
+            <a:avLst/>
+          </a:prstGeom>
+          <a:noFill/>
+          <a:ln/>
+        </p:spPr>
+        <p:txBody>
+          <a:bodyPr wrap="square" lIns="0" tIns="0" rIns="0" bIns="0" rtlCol="0" anchor="t"/>
+          <a:lstStyle/>
+          <a:p>
+            <a:pPr algn="l" indent="0" marL="0">
+              <a:lnSpc>
+                <a:spcPts val="2613"/>
+              </a:lnSpc>
+              <a:buNone/>
+            </a:pPr>
+            <a:r>
+              <a:rPr lang="en-US" sz="1866" dirty="0">
+                <a:solidFill>
+                  <a:srgbClr val="6B7280"/>
+                </a:solidFill>
+                <a:latin typeface="Arimo" pitchFamily="34" charset="0"/>
+                <a:ea typeface="Arimo" pitchFamily="34" charset="-122"/>
+                <a:cs typeface="Arimo" pitchFamily="34" charset="-120"/>
+              </a:rPr>
+              <a:t>The run that produced the model in production cannot be reproduced.</a:t>
+            </a:r>
+            <a:endParaRPr lang="en-US" sz="1866" dirty="0"/>
+          </a:p>
+        </p:txBody>
+      </p:sp>
+      <p:sp>
+        <p:nvSpPr>
+          <p:cNvPr id="9" name="Text 7"/>
+          <p:cNvSpPr/>
+          <p:nvPr/>
+        </p:nvSpPr>
+        <p:spPr>
+          <a:xfrm>
+            <a:off x="3368825" y="1570434"/>
+            <a:ext cx="2624077" cy="3770511"/>
+          </a:xfrm>
+          <a:prstGeom prst="rect">
+            <a:avLst/>
+          </a:prstGeom>
+          <a:noFill/>
+          <a:ln w="12698">
+            <a:solidFill>
+              <a:srgbClr val="D1D5DB"/>
+            </a:solidFill>
+          </a:ln>
+        </p:spPr>
+        <p:txBody>
+          <a:bodyPr wrap="square" rtlCol="0" anchor="ctr"/>
+          <a:lstStyle/>
+          <a:p>
+            <a:pPr indent="0" marL="0">
+              <a:buNone/>
+            </a:pPr>
+            <a:endParaRPr lang="en-US" dirty="0"/>
+          </a:p>
+        </p:txBody>
+      </p:sp>
+      <p:sp>
+        <p:nvSpPr>
+          <p:cNvPr id="10" name="Text 8"/>
+          <p:cNvSpPr/>
+          <p:nvPr/>
+        </p:nvSpPr>
+        <p:spPr>
+          <a:xfrm>
+            <a:off x="3635458" y="1820069"/>
+            <a:ext cx="2132626" cy="331986"/>
+          </a:xfrm>
+          <a:prstGeom prst="rect">
+            <a:avLst/>
+          </a:prstGeom>
+          <a:noFill/>
+          <a:ln/>
+        </p:spPr>
+        <p:txBody>
+          <a:bodyPr wrap="square" lIns="0" tIns="0" rIns="0" bIns="0" rtlCol="0" anchor="t"/>
+          <a:lstStyle/>
+          <a:p>
+            <a:pPr algn="l" indent="0" marL="0">
+              <a:lnSpc>
+                <a:spcPts val="2613"/>
+              </a:lnSpc>
+              <a:spcAft>
+                <a:spcPts val="1200"/>
+              </a:spcAft>
+              <a:buNone/>
+            </a:pPr>
+            <a:r>
+              <a:rPr lang="en-US" sz="1866" b="1" dirty="0">
+                <a:solidFill>
+                  <a:srgbClr val="6B7280"/>
+                </a:solidFill>
+                <a:latin typeface="Arimo" pitchFamily="34" charset="0"/>
+                <a:ea typeface="Arimo" pitchFamily="34" charset="-122"/>
+                <a:cs typeface="Arimo" pitchFamily="34" charset="-120"/>
+              </a:rPr>
+              <a:t>02</a:t>
+            </a:r>
+            <a:endParaRPr lang="en-US" sz="1866" dirty="0"/>
+          </a:p>
+        </p:txBody>
+      </p:sp>
+      <p:sp>
+        <p:nvSpPr>
+          <p:cNvPr id="11" name="Text 9"/>
+          <p:cNvSpPr/>
+          <p:nvPr/>
+        </p:nvSpPr>
+        <p:spPr>
+          <a:xfrm>
+            <a:off x="3635458" y="2304455"/>
+            <a:ext cx="2132626" cy="660400"/>
+          </a:xfrm>
+          <a:prstGeom prst="rect">
+            <a:avLst/>
+          </a:prstGeom>
+          <a:noFill/>
+          <a:ln/>
+        </p:spPr>
+        <p:txBody>
+          <a:bodyPr wrap="square" lIns="0" tIns="0" rIns="0" bIns="0" rtlCol="0" anchor="t"/>
+          <a:lstStyle/>
+          <a:p>
+            <a:pPr algn="l" indent="0" marL="0">
+              <a:lnSpc>
+                <a:spcPts val="2600"/>
+              </a:lnSpc>
+              <a:spcAft>
+                <a:spcPts val="933"/>
+              </a:spcAft>
+              <a:buNone/>
+            </a:pPr>
+            <a:r>
+              <a:rPr lang="en-US" sz="2000" b="1" dirty="0">
+                <a:solidFill>
+                  <a:srgbClr val="1A1A1A"/>
+                </a:solidFill>
+                <a:latin typeface="Arimo" pitchFamily="34" charset="0"/>
+                <a:ea typeface="Arimo" pitchFamily="34" charset="-122"/>
+                <a:cs typeface="Arimo" pitchFamily="34" charset="-120"/>
+              </a:rPr>
+              <a:t>Deployment is a person</a:t>
+            </a:r>
+            <a:endParaRPr lang="en-US" sz="2000" dirty="0"/>
+          </a:p>
+        </p:txBody>
+      </p:sp>
+      <p:sp>
+        <p:nvSpPr>
+          <p:cNvPr id="12" name="Text 10"/>
+          <p:cNvSpPr/>
+          <p:nvPr/>
+        </p:nvSpPr>
+        <p:spPr>
+          <a:xfrm>
+            <a:off x="3635458" y="3083322"/>
+            <a:ext cx="2132626" cy="1327944"/>
+          </a:xfrm>
+          <a:prstGeom prst="rect">
+            <a:avLst/>
+          </a:prstGeom>
+          <a:noFill/>
+          <a:ln/>
+        </p:spPr>
+        <p:txBody>
+          <a:bodyPr wrap="square" lIns="0" tIns="0" rIns="0" bIns="0" rtlCol="0" anchor="t"/>
+          <a:lstStyle/>
+          <a:p>
+            <a:pPr algn="l" indent="0" marL="0">
+              <a:lnSpc>
+                <a:spcPts val="2613"/>
+              </a:lnSpc>
+              <a:buNone/>
+            </a:pPr>
+            <a:r>
+              <a:rPr lang="en-US" sz="1866" dirty="0">
+                <a:solidFill>
+                  <a:srgbClr val="6B7280"/>
+                </a:solidFill>
+                <a:latin typeface="Arimo" pitchFamily="34" charset="0"/>
+                <a:ea typeface="Arimo" pitchFamily="34" charset="-122"/>
+                <a:cs typeface="Arimo" pitchFamily="34" charset="-120"/>
+              </a:rPr>
+              <a:t>One engineer ships every model, and the steps live in their head.</a:t>
+            </a:r>
+            <a:endParaRPr lang="en-US" sz="1866" dirty="0"/>
+          </a:p>
+        </p:txBody>
+      </p:sp>
+      <p:sp>
+        <p:nvSpPr>
+          <p:cNvPr id="13" name="Text 11"/>
+          <p:cNvSpPr/>
+          <p:nvPr/>
+        </p:nvSpPr>
+        <p:spPr>
+          <a:xfrm>
+            <a:off x="6196051" y="1570434"/>
+            <a:ext cx="2624077" cy="3770511"/>
+          </a:xfrm>
+          <a:prstGeom prst="rect">
+            <a:avLst/>
+          </a:prstGeom>
+          <a:noFill/>
+          <a:ln w="12698">
+            <a:solidFill>
+              <a:srgbClr val="D1D5DB"/>
+            </a:solidFill>
+          </a:ln>
+        </p:spPr>
+        <p:txBody>
+          <a:bodyPr wrap="square" rtlCol="0" anchor="ctr"/>
+          <a:lstStyle/>
+          <a:p>
+            <a:pPr indent="0" marL="0">
+              <a:buNone/>
+            </a:pPr>
+            <a:endParaRPr lang="en-US" dirty="0"/>
+          </a:p>
+        </p:txBody>
+      </p:sp>
+      <p:sp>
+        <p:nvSpPr>
+          <p:cNvPr id="14" name="Text 12"/>
+          <p:cNvSpPr/>
+          <p:nvPr/>
+        </p:nvSpPr>
+        <p:spPr>
+          <a:xfrm>
+            <a:off x="6462684" y="1820069"/>
+            <a:ext cx="2132626" cy="331986"/>
+          </a:xfrm>
+          <a:prstGeom prst="rect">
+            <a:avLst/>
+          </a:prstGeom>
+          <a:noFill/>
+          <a:ln/>
+        </p:spPr>
+        <p:txBody>
+          <a:bodyPr wrap="square" lIns="0" tIns="0" rIns="0" bIns="0" rtlCol="0" anchor="t"/>
+          <a:lstStyle/>
+          <a:p>
+            <a:pPr algn="l" indent="0" marL="0">
+              <a:lnSpc>
+                <a:spcPts val="2613"/>
+              </a:lnSpc>
+              <a:spcAft>
+                <a:spcPts val="1200"/>
+              </a:spcAft>
+              <a:buNone/>
+            </a:pPr>
+            <a:r>
+              <a:rPr lang="en-US" sz="1866" b="1" dirty="0">
+                <a:solidFill>
+                  <a:srgbClr val="6B7280"/>
+                </a:solidFill>
+                <a:latin typeface="Arimo" pitchFamily="34" charset="0"/>
+                <a:ea typeface="Arimo" pitchFamily="34" charset="-122"/>
+                <a:cs typeface="Arimo" pitchFamily="34" charset="-120"/>
+              </a:rPr>
+              <a:t>03</a:t>
+            </a:r>
+            <a:endParaRPr lang="en-US" sz="1866" dirty="0"/>
+          </a:p>
+        </p:txBody>
+      </p:sp>
+      <p:sp>
+        <p:nvSpPr>
+          <p:cNvPr id="15" name="Text 13"/>
+          <p:cNvSpPr/>
+          <p:nvPr/>
+        </p:nvSpPr>
+        <p:spPr>
+          <a:xfrm>
+            <a:off x="6462684" y="2304455"/>
+            <a:ext cx="2132626" cy="660400"/>
+          </a:xfrm>
+          <a:prstGeom prst="rect">
+            <a:avLst/>
+          </a:prstGeom>
+          <a:noFill/>
+          <a:ln/>
+        </p:spPr>
+        <p:txBody>
+          <a:bodyPr wrap="square" lIns="0" tIns="0" rIns="0" bIns="0" rtlCol="0" anchor="t"/>
+          <a:lstStyle/>
+          <a:p>
+            <a:pPr algn="l" indent="0" marL="0">
+              <a:lnSpc>
+                <a:spcPts val="2600"/>
+              </a:lnSpc>
+              <a:spcAft>
+                <a:spcPts val="933"/>
+              </a:spcAft>
+              <a:buNone/>
+            </a:pPr>
+            <a:r>
+              <a:rPr lang="en-US" sz="2000" b="1" dirty="0">
+                <a:solidFill>
+                  <a:srgbClr val="1A1A1A"/>
+                </a:solidFill>
+                <a:latin typeface="Arimo" pitchFamily="34" charset="0"/>
+                <a:ea typeface="Arimo" pitchFamily="34" charset="-122"/>
+                <a:cs typeface="Arimo" pitchFamily="34" charset="-120"/>
+              </a:rPr>
+              <a:t>Retraining is a memory</a:t>
+            </a:r>
+            <a:endParaRPr lang="en-US" sz="2000" dirty="0"/>
+          </a:p>
+        </p:txBody>
+      </p:sp>
+      <p:sp>
+        <p:nvSpPr>
+          <p:cNvPr id="16" name="Text 14"/>
+          <p:cNvSpPr/>
+          <p:nvPr/>
+        </p:nvSpPr>
+        <p:spPr>
+          <a:xfrm>
+            <a:off x="6462684" y="3083322"/>
+            <a:ext cx="2132626" cy="1327944"/>
+          </a:xfrm>
+          <a:prstGeom prst="rect">
+            <a:avLst/>
+          </a:prstGeom>
+          <a:noFill/>
+          <a:ln/>
+        </p:spPr>
+        <p:txBody>
+          <a:bodyPr wrap="square" lIns="0" tIns="0" rIns="0" bIns="0" rtlCol="0" anchor="t"/>
+          <a:lstStyle/>
+          <a:p>
+            <a:pPr algn="l" indent="0" marL="0">
+              <a:lnSpc>
+                <a:spcPts val="2613"/>
+              </a:lnSpc>
+              <a:buNone/>
+            </a:pPr>
+            <a:r>
+              <a:rPr lang="en-US" sz="1866" dirty="0">
+                <a:solidFill>
+                  <a:srgbClr val="6B7280"/>
+                </a:solidFill>
+                <a:latin typeface="Arimo" pitchFamily="34" charset="0"/>
+                <a:ea typeface="Arimo" pitchFamily="34" charset="-122"/>
+                <a:cs typeface="Arimo" pitchFamily="34" charset="-120"/>
+              </a:rPr>
+              <a:t>Nobody can say when a model was last refreshed, or on what data.</a:t>
+            </a:r>
+            <a:endParaRPr lang="en-US" sz="1866" dirty="0"/>
+          </a:p>
+        </p:txBody>
+      </p:sp>
+      <p:sp>
+        <p:nvSpPr>
+          <p:cNvPr id="17" name="Text 15"/>
+          <p:cNvSpPr/>
+          <p:nvPr/>
+        </p:nvSpPr>
+        <p:spPr>
+          <a:xfrm>
+            <a:off x="9023276" y="1570434"/>
+            <a:ext cx="2624077" cy="3770511"/>
+          </a:xfrm>
+          <a:prstGeom prst="rect">
+            <a:avLst/>
+          </a:prstGeom>
+          <a:noFill/>
+          <a:ln w="12698">
+            <a:solidFill>
+              <a:srgbClr val="D1D5DB"/>
+            </a:solidFill>
+          </a:ln>
+        </p:spPr>
+        <p:txBody>
+          <a:bodyPr wrap="square" rtlCol="0" anchor="ctr"/>
+          <a:lstStyle/>
+          <a:p>
+            <a:pPr indent="0" marL="0">
+              <a:buNone/>
+            </a:pPr>
+            <a:endParaRPr lang="en-US" dirty="0"/>
+          </a:p>
+        </p:txBody>
+      </p:sp>
+      <p:sp>
+        <p:nvSpPr>
+          <p:cNvPr id="18" name="Text 16"/>
+          <p:cNvSpPr/>
+          <p:nvPr/>
+        </p:nvSpPr>
+        <p:spPr>
+          <a:xfrm>
+            <a:off x="9289910" y="1820069"/>
+            <a:ext cx="2132626" cy="331986"/>
+          </a:xfrm>
+          <a:prstGeom prst="rect">
+            <a:avLst/>
+          </a:prstGeom>
+          <a:noFill/>
+          <a:ln/>
+        </p:spPr>
+        <p:txBody>
+          <a:bodyPr wrap="square" lIns="0" tIns="0" rIns="0" bIns="0" rtlCol="0" anchor="t"/>
+          <a:lstStyle/>
+          <a:p>
+            <a:pPr algn="l" indent="0" marL="0">
+              <a:lnSpc>
+                <a:spcPts val="2613"/>
+              </a:lnSpc>
+              <a:spcAft>
+                <a:spcPts val="1200"/>
+              </a:spcAft>
+              <a:buNone/>
+            </a:pPr>
+            <a:r>
+              <a:rPr lang="en-US" sz="1866" b="1" dirty="0">
+                <a:solidFill>
+                  <a:srgbClr val="6B7280"/>
+                </a:solidFill>
+                <a:latin typeface="Arimo" pitchFamily="34" charset="0"/>
+                <a:ea typeface="Arimo" pitchFamily="34" charset="-122"/>
+                <a:cs typeface="Arimo" pitchFamily="34" charset="-120"/>
+              </a:rPr>
+              <a:t>04</a:t>
+            </a:r>
+            <a:endParaRPr lang="en-US" sz="1866" dirty="0"/>
+          </a:p>
+        </p:txBody>
+      </p:sp>
+      <p:sp>
+        <p:nvSpPr>
+          <p:cNvPr id="19" name="Text 17"/>
+          <p:cNvSpPr/>
+          <p:nvPr/>
+        </p:nvSpPr>
+        <p:spPr>
+          <a:xfrm>
+            <a:off x="9289910" y="2304455"/>
+            <a:ext cx="2132626" cy="660400"/>
+          </a:xfrm>
+          <a:prstGeom prst="rect">
+            <a:avLst/>
+          </a:prstGeom>
+          <a:noFill/>
+          <a:ln/>
+        </p:spPr>
+        <p:txBody>
+          <a:bodyPr wrap="square" lIns="0" tIns="0" rIns="0" bIns="0" rtlCol="0" anchor="t"/>
+          <a:lstStyle/>
+          <a:p>
+            <a:pPr algn="l" indent="0" marL="0">
+              <a:lnSpc>
+                <a:spcPts val="2600"/>
+              </a:lnSpc>
+              <a:spcAft>
+                <a:spcPts val="933"/>
+              </a:spcAft>
+              <a:buNone/>
+            </a:pPr>
+            <a:r>
+              <a:rPr lang="en-US" sz="2000" b="1" dirty="0">
+                <a:solidFill>
+                  <a:srgbClr val="1A1A1A"/>
+                </a:solidFill>
+                <a:latin typeface="Arimo" pitchFamily="34" charset="0"/>
+                <a:ea typeface="Arimo" pitchFamily="34" charset="-122"/>
+                <a:cs typeface="Arimo" pitchFamily="34" charset="-120"/>
+              </a:rPr>
+              <a:t>Nobody owns the boundary</a:t>
+            </a:r>
+            <a:endParaRPr lang="en-US" sz="2000" dirty="0"/>
+          </a:p>
+        </p:txBody>
+      </p:sp>
+      <p:sp>
+        <p:nvSpPr>
+          <p:cNvPr id="20" name="Text 18"/>
+          <p:cNvSpPr/>
+          <p:nvPr/>
+        </p:nvSpPr>
+        <p:spPr>
+          <a:xfrm>
+            <a:off x="9289910" y="3083322"/>
+            <a:ext cx="2132626" cy="1327944"/>
+          </a:xfrm>
+          <a:prstGeom prst="rect">
+            <a:avLst/>
+          </a:prstGeom>
+          <a:noFill/>
+          <a:ln/>
+        </p:spPr>
+        <p:txBody>
+          <a:bodyPr wrap="square" lIns="0" tIns="0" rIns="0" bIns="0" rtlCol="0" anchor="t"/>
+          <a:lstStyle/>
+          <a:p>
+            <a:pPr algn="l" indent="0" marL="0">
+              <a:lnSpc>
+                <a:spcPts val="2613"/>
+              </a:lnSpc>
+              <a:buNone/>
+            </a:pPr>
+            <a:r>
+              <a:rPr lang="en-US" sz="1866" dirty="0">
+                <a:solidFill>
+                  <a:srgbClr val="6B7280"/>
+                </a:solidFill>
+                <a:latin typeface="Arimo" pitchFamily="34" charset="0"/>
+                <a:ea typeface="Arimo" pitchFamily="34" charset="-122"/>
+                <a:cs typeface="Arimo" pitchFamily="34" charset="-120"/>
+              </a:rPr>
+              <a:t>Data platform and ML team each assume the other handles features.</a:t>
+            </a:r>
+            <a:endParaRPr lang="en-US" sz="1866" dirty="0"/>
+          </a:p>
+        </p:txBody>
+      </p:sp>
+      <p:sp>
+        <p:nvSpPr>
+          <p:cNvPr id="21" name="Text 19"/>
+          <p:cNvSpPr/>
+          <p:nvPr/>
+        </p:nvSpPr>
+        <p:spPr>
+          <a:xfrm>
+            <a:off x="541599" y="5577880"/>
+            <a:ext cx="11327869" cy="331986"/>
+          </a:xfrm>
+          <a:prstGeom prst="rect">
+            <a:avLst/>
+          </a:prstGeom>
+          <a:noFill/>
+          <a:ln/>
+        </p:spPr>
+        <p:txBody>
+          <a:bodyPr wrap="square" lIns="0" tIns="0" rIns="0" bIns="0" rtlCol="0" anchor="t"/>
+          <a:lstStyle/>
+          <a:p>
+            <a:pPr algn="l" indent="0" marL="0">
+              <a:lnSpc>
+                <a:spcPts val="2613"/>
+              </a:lnSpc>
+              <a:spcBef>
+                <a:spcPts val="1866"/>
+              </a:spcBef>
+              <a:buNone/>
+            </a:pPr>
+            <a:r>
+              <a:rPr lang="en-US" sz="1866" dirty="0">
+                <a:solidFill>
+                  <a:srgbClr val="6B7280"/>
+                </a:solidFill>
+                <a:latin typeface="Arimo" pitchFamily="34" charset="0"/>
+                <a:ea typeface="Arimo" pitchFamily="34" charset="-122"/>
+                <a:cs typeface="Arimo" pitchFamily="34" charset="-120"/>
+              </a:rPr>
+              <a:t>None of these is fixed by a tool. They are fixed by making one path the only path.</a:t>
+            </a:r>
+            <a:endParaRPr lang="en-US" sz="1866" dirty="0"/>
+          </a:p>
+        </p:txBody>
+      </p:sp>
+      <p:sp>
+        <p:nvSpPr>
+          <p:cNvPr id="22" name="Text 20"/>
+          <p:cNvSpPr/>
+          <p:nvPr/>
+        </p:nvSpPr>
+        <p:spPr>
+          <a:xfrm>
+            <a:off x="319484" y="6113066"/>
+            <a:ext cx="11327869" cy="236934"/>
+          </a:xfrm>
+          <a:prstGeom prst="rect">
+            <a:avLst/>
+          </a:prstGeom>
+          <a:noFill/>
+          <a:ln/>
+        </p:spPr>
+        <p:txBody>
+          <a:bodyPr wrap="square" lIns="0" tIns="0" rIns="0" bIns="0" rtlCol="0" anchor="t"/>
+          <a:lstStyle/>
+          <a:p>
+            <a:pPr algn="r" indent="0" marL="0">
+              <a:lnSpc>
+                <a:spcPts val="1866"/>
+              </a:lnSpc>
+              <a:buNone/>
+            </a:pPr>
+            <a:r>
+              <a:rPr lang="en-US" sz="1333" dirty="0">
+                <a:solidFill>
+                  <a:srgbClr val="6B7280"/>
+                </a:solidFill>
+                <a:latin typeface="Arimo" pitchFamily="34" charset="0"/>
+                <a:ea typeface="Arimo" pitchFamily="34" charset="-122"/>
+                <a:cs typeface="Arimo" pitchFamily="34" charset="-120"/>
+              </a:rPr>
+              <a:t>MLOPS PLATFORM ROADMAP · SHEET 02/07 · NO EXTERNAL DATA CITED</a:t>
+            </a:r>
+            <a:endParaRPr lang="en-US" sz="1333" dirty="0"/>
+          </a:p>
+        </p:txBody>
+      </p:sp>
     </p:spTree>
   </p:cSld>
   <p:clrMapOvr>
@@ -1486,6 +2847,13 @@
 <file path=ppt/slides/slide3.xml><?xml version="1.0" encoding="utf-8"?>
 <p:sld xmlns:a="http://schemas.openxmlformats.org/drawingml/2006/main" xmlns:r="http://schemas.openxmlformats.org/officeDocument/2006/relationships" xmlns:p="http://schemas.openxmlformats.org/presentationml/2006/main">
   <p:cSld name="Slide 3">
+    <p:bg>
+      <p:bgPr>
+        <a:solidFill>
+          <a:srgbClr val="FFFFFF"/>
+        </a:solidFill>
+      </p:bgPr>
+    </p:bg>
     <p:spTree>
       <p:nvGrpSpPr>
         <p:cNvPr id="1" name=""/>
@@ -1500,30 +2868,1149 @@
           <a:chExt cx="0" cy="0"/>
         </a:xfrm>
       </p:grpSpPr>
-      <p:pic>
-        <p:nvPicPr>
-          <p:cNvPr id="2" name="Image 0" descr="/tmp/slide-1787840565912-5xpc62e9113.png">    </p:cNvPr>
-          <p:cNvPicPr>
-            <a:picLocks noChangeAspect="1"/>
-          </p:cNvPicPr>
-          <p:nvPr/>
-        </p:nvPicPr>
-        <p:blipFill>
-          <a:blip r:embed="rId1"/>
-          <a:stretch>
-            <a:fillRect/>
-          </a:stretch>
-        </p:blipFill>
-        <p:spPr>
-          <a:xfrm>
-            <a:off x="0" y="0"/>
-            <a:ext cx="12188952" cy="6858000"/>
-          </a:xfrm>
-          <a:prstGeom prst="rect">
-            <a:avLst/>
-          </a:prstGeom>
-        </p:spPr>
-      </p:pic>
+      <p:sp>
+        <p:nvSpPr>
+          <p:cNvPr id="2" name="Text 0"/>
+          <p:cNvSpPr/>
+          <p:nvPr/>
+        </p:nvSpPr>
+        <p:spPr>
+          <a:xfrm>
+            <a:off x="541599" y="484386"/>
+            <a:ext cx="11327869" cy="260747"/>
+          </a:xfrm>
+          <a:prstGeom prst="rect">
+            <a:avLst/>
+          </a:prstGeom>
+          <a:noFill/>
+          <a:ln/>
+        </p:spPr>
+        <p:txBody>
+          <a:bodyPr wrap="square" lIns="0" tIns="0" rIns="0" bIns="0" rtlCol="0" anchor="t"/>
+          <a:lstStyle/>
+          <a:p>
+            <a:pPr algn="l" indent="0" marL="0">
+              <a:lnSpc>
+                <a:spcPts val="2053"/>
+              </a:lnSpc>
+              <a:spcAft>
+                <a:spcPts val="933"/>
+              </a:spcAft>
+              <a:buNone/>
+            </a:pPr>
+            <a:r>
+              <a:rPr lang="en-US" sz="1466" b="1" dirty="0">
+                <a:solidFill>
+                  <a:srgbClr val="6B7280"/>
+                </a:solidFill>
+                <a:latin typeface="Arimo" pitchFamily="34" charset="0"/>
+                <a:ea typeface="Arimo" pitchFamily="34" charset="-122"/>
+                <a:cs typeface="Arimo" pitchFamily="34" charset="-120"/>
+              </a:rPr>
+              <a:t>SCOPE</a:t>
+            </a:r>
+            <a:endParaRPr lang="en-US" sz="1466" dirty="0"/>
+          </a:p>
+        </p:txBody>
+      </p:sp>
+      <p:sp>
+        <p:nvSpPr>
+          <p:cNvPr id="3" name="Text 1"/>
+          <p:cNvSpPr/>
+          <p:nvPr/>
+        </p:nvSpPr>
+        <p:spPr>
+          <a:xfrm>
+            <a:off x="541599" y="863600"/>
+            <a:ext cx="11327869" cy="423267"/>
+          </a:xfrm>
+          <a:prstGeom prst="rect">
+            <a:avLst/>
+          </a:prstGeom>
+          <a:noFill/>
+          <a:ln/>
+        </p:spPr>
+        <p:txBody>
+          <a:bodyPr wrap="square" lIns="0" tIns="0" rIns="0" bIns="0" rtlCol="0" anchor="t"/>
+          <a:lstStyle/>
+          <a:p>
+            <a:pPr algn="l" indent="0" marL="0">
+              <a:lnSpc>
+                <a:spcPts val="3333"/>
+              </a:lnSpc>
+              <a:buNone/>
+            </a:pPr>
+            <a:r>
+              <a:rPr lang="en-US" sz="2666" b="1" dirty="0">
+                <a:solidFill>
+                  <a:srgbClr val="1A1A1A"/>
+                </a:solidFill>
+                <a:latin typeface="Arimo" pitchFamily="34" charset="0"/>
+                <a:ea typeface="Arimo" pitchFamily="34" charset="-122"/>
+                <a:cs typeface="Arimo" pitchFamily="34" charset="-120"/>
+              </a:rPr>
+              <a:t>A platform owns six capabilities; a project owns none of them</a:t>
+            </a:r>
+            <a:endParaRPr lang="en-US" sz="2666" dirty="0"/>
+          </a:p>
+        </p:txBody>
+      </p:sp>
+      <p:sp>
+        <p:nvSpPr>
+          <p:cNvPr id="4" name="Text 2"/>
+          <p:cNvSpPr/>
+          <p:nvPr/>
+        </p:nvSpPr>
+        <p:spPr>
+          <a:xfrm>
+            <a:off x="541599" y="1286867"/>
+            <a:ext cx="11105754" cy="12700"/>
+          </a:xfrm>
+          <a:prstGeom prst="rect">
+            <a:avLst/>
+          </a:prstGeom>
+          <a:solidFill>
+            <a:srgbClr val="D1D5DB"/>
+          </a:solidFill>
+          <a:ln/>
+        </p:spPr>
+        <p:txBody>
+          <a:bodyPr wrap="square" rtlCol="0" anchor="ctr"/>
+          <a:lstStyle/>
+          <a:p>
+            <a:pPr indent="0" marL="0">
+              <a:buNone/>
+            </a:pPr>
+            <a:endParaRPr lang="en-US" dirty="0"/>
+          </a:p>
+        </p:txBody>
+      </p:sp>
+      <p:sp>
+        <p:nvSpPr>
+          <p:cNvPr id="5" name="Text 3"/>
+          <p:cNvSpPr/>
+          <p:nvPr/>
+        </p:nvSpPr>
+        <p:spPr>
+          <a:xfrm>
+            <a:off x="541599" y="1570434"/>
+            <a:ext cx="3566419" cy="2096294"/>
+          </a:xfrm>
+          <a:prstGeom prst="rect">
+            <a:avLst/>
+          </a:prstGeom>
+          <a:noFill/>
+          <a:ln w="12698">
+            <a:solidFill>
+              <a:srgbClr val="D1D5DB"/>
+            </a:solidFill>
+          </a:ln>
+        </p:spPr>
+        <p:txBody>
+          <a:bodyPr wrap="square" rtlCol="0" anchor="ctr"/>
+          <a:lstStyle/>
+          <a:p>
+            <a:pPr indent="0" marL="0">
+              <a:buNone/>
+            </a:pPr>
+            <a:endParaRPr lang="en-US" dirty="0"/>
+          </a:p>
+        </p:txBody>
+      </p:sp>
+      <p:sp>
+        <p:nvSpPr>
+          <p:cNvPr id="6" name="Text 4"/>
+          <p:cNvSpPr/>
+          <p:nvPr/>
+        </p:nvSpPr>
+        <p:spPr>
+          <a:xfrm>
+            <a:off x="808232" y="1820069"/>
+            <a:ext cx="3093816" cy="331986"/>
+          </a:xfrm>
+          <a:prstGeom prst="rect">
+            <a:avLst/>
+          </a:prstGeom>
+          <a:noFill/>
+          <a:ln/>
+        </p:spPr>
+        <p:txBody>
+          <a:bodyPr wrap="square" lIns="0" tIns="0" rIns="0" bIns="0" rtlCol="0" anchor="t"/>
+          <a:lstStyle/>
+          <a:p>
+            <a:pPr algn="l" indent="0" marL="0">
+              <a:lnSpc>
+                <a:spcPts val="2613"/>
+              </a:lnSpc>
+              <a:spcAft>
+                <a:spcPts val="1200"/>
+              </a:spcAft>
+              <a:buNone/>
+            </a:pPr>
+            <a:r>
+              <a:rPr lang="en-US" sz="1866" b="1" dirty="0">
+                <a:solidFill>
+                  <a:srgbClr val="6B7280"/>
+                </a:solidFill>
+                <a:latin typeface="Arimo" pitchFamily="34" charset="0"/>
+                <a:ea typeface="Arimo" pitchFamily="34" charset="-122"/>
+                <a:cs typeface="Arimo" pitchFamily="34" charset="-120"/>
+              </a:rPr>
+              <a:t>01</a:t>
+            </a:r>
+            <a:endParaRPr lang="en-US" sz="1866" dirty="0"/>
+          </a:p>
+        </p:txBody>
+      </p:sp>
+      <p:sp>
+        <p:nvSpPr>
+          <p:cNvPr id="7" name="Text 5"/>
+          <p:cNvSpPr/>
+          <p:nvPr/>
+        </p:nvSpPr>
+        <p:spPr>
+          <a:xfrm>
+            <a:off x="808232" y="2304455"/>
+            <a:ext cx="3093816" cy="330200"/>
+          </a:xfrm>
+          <a:prstGeom prst="rect">
+            <a:avLst/>
+          </a:prstGeom>
+          <a:noFill/>
+          <a:ln/>
+        </p:spPr>
+        <p:txBody>
+          <a:bodyPr wrap="square" lIns="0" tIns="0" rIns="0" bIns="0" rtlCol="0" anchor="t"/>
+          <a:lstStyle/>
+          <a:p>
+            <a:pPr algn="l" indent="0" marL="0">
+              <a:lnSpc>
+                <a:spcPts val="2600"/>
+              </a:lnSpc>
+              <a:spcAft>
+                <a:spcPts val="933"/>
+              </a:spcAft>
+              <a:buNone/>
+            </a:pPr>
+            <a:r>
+              <a:rPr lang="en-US" sz="2000" b="1" dirty="0">
+                <a:solidFill>
+                  <a:srgbClr val="1A1A1A"/>
+                </a:solidFill>
+                <a:latin typeface="Arimo" pitchFamily="34" charset="0"/>
+                <a:ea typeface="Arimo" pitchFamily="34" charset="-122"/>
+                <a:cs typeface="Arimo" pitchFamily="34" charset="-120"/>
+              </a:rPr>
+              <a:t>Data &amp; features</a:t>
+            </a:r>
+            <a:endParaRPr lang="en-US" sz="2000" dirty="0"/>
+          </a:p>
+        </p:txBody>
+      </p:sp>
+      <p:sp>
+        <p:nvSpPr>
+          <p:cNvPr id="8" name="Text 6"/>
+          <p:cNvSpPr/>
+          <p:nvPr/>
+        </p:nvSpPr>
+        <p:spPr>
+          <a:xfrm>
+            <a:off x="808232" y="2753122"/>
+            <a:ext cx="3093816" cy="663972"/>
+          </a:xfrm>
+          <a:prstGeom prst="rect">
+            <a:avLst/>
+          </a:prstGeom>
+          <a:noFill/>
+          <a:ln/>
+        </p:spPr>
+        <p:txBody>
+          <a:bodyPr wrap="square" lIns="0" tIns="0" rIns="0" bIns="0" rtlCol="0" anchor="t"/>
+          <a:lstStyle/>
+          <a:p>
+            <a:pPr algn="l" indent="0" marL="0">
+              <a:lnSpc>
+                <a:spcPts val="2613"/>
+              </a:lnSpc>
+              <a:buNone/>
+            </a:pPr>
+            <a:r>
+              <a:rPr lang="en-US" sz="1866" dirty="0">
+                <a:solidFill>
+                  <a:srgbClr val="6B7280"/>
+                </a:solidFill>
+                <a:latin typeface="Arimo" pitchFamily="34" charset="0"/>
+                <a:ea typeface="Arimo" pitchFamily="34" charset="-122"/>
+                <a:cs typeface="Arimo" pitchFamily="34" charset="-120"/>
+              </a:rPr>
+              <a:t>One definition, same in training and serving.</a:t>
+            </a:r>
+            <a:endParaRPr lang="en-US" sz="1866" dirty="0"/>
+          </a:p>
+        </p:txBody>
+      </p:sp>
+      <p:sp>
+        <p:nvSpPr>
+          <p:cNvPr id="9" name="Text 7"/>
+          <p:cNvSpPr/>
+          <p:nvPr/>
+        </p:nvSpPr>
+        <p:spPr>
+          <a:xfrm>
+            <a:off x="4311167" y="1570434"/>
+            <a:ext cx="3566419" cy="2096294"/>
+          </a:xfrm>
+          <a:prstGeom prst="rect">
+            <a:avLst/>
+          </a:prstGeom>
+          <a:noFill/>
+          <a:ln w="12698">
+            <a:solidFill>
+              <a:srgbClr val="D1D5DB"/>
+            </a:solidFill>
+          </a:ln>
+        </p:spPr>
+        <p:txBody>
+          <a:bodyPr wrap="square" rtlCol="0" anchor="ctr"/>
+          <a:lstStyle/>
+          <a:p>
+            <a:pPr indent="0" marL="0">
+              <a:buNone/>
+            </a:pPr>
+            <a:endParaRPr lang="en-US" dirty="0"/>
+          </a:p>
+        </p:txBody>
+      </p:sp>
+      <p:sp>
+        <p:nvSpPr>
+          <p:cNvPr id="10" name="Text 8"/>
+          <p:cNvSpPr/>
+          <p:nvPr/>
+        </p:nvSpPr>
+        <p:spPr>
+          <a:xfrm>
+            <a:off x="4577801" y="1820069"/>
+            <a:ext cx="3093816" cy="331986"/>
+          </a:xfrm>
+          <a:prstGeom prst="rect">
+            <a:avLst/>
+          </a:prstGeom>
+          <a:noFill/>
+          <a:ln/>
+        </p:spPr>
+        <p:txBody>
+          <a:bodyPr wrap="square" lIns="0" tIns="0" rIns="0" bIns="0" rtlCol="0" anchor="t"/>
+          <a:lstStyle/>
+          <a:p>
+            <a:pPr algn="l" indent="0" marL="0">
+              <a:lnSpc>
+                <a:spcPts val="2613"/>
+              </a:lnSpc>
+              <a:spcAft>
+                <a:spcPts val="1200"/>
+              </a:spcAft>
+              <a:buNone/>
+            </a:pPr>
+            <a:r>
+              <a:rPr lang="en-US" sz="1866" b="1" dirty="0">
+                <a:solidFill>
+                  <a:srgbClr val="6B7280"/>
+                </a:solidFill>
+                <a:latin typeface="Arimo" pitchFamily="34" charset="0"/>
+                <a:ea typeface="Arimo" pitchFamily="34" charset="-122"/>
+                <a:cs typeface="Arimo" pitchFamily="34" charset="-120"/>
+              </a:rPr>
+              <a:t>02</a:t>
+            </a:r>
+            <a:endParaRPr lang="en-US" sz="1866" dirty="0"/>
+          </a:p>
+        </p:txBody>
+      </p:sp>
+      <p:sp>
+        <p:nvSpPr>
+          <p:cNvPr id="11" name="Text 9"/>
+          <p:cNvSpPr/>
+          <p:nvPr/>
+        </p:nvSpPr>
+        <p:spPr>
+          <a:xfrm>
+            <a:off x="4577801" y="2304455"/>
+            <a:ext cx="3093816" cy="330200"/>
+          </a:xfrm>
+          <a:prstGeom prst="rect">
+            <a:avLst/>
+          </a:prstGeom>
+          <a:noFill/>
+          <a:ln/>
+        </p:spPr>
+        <p:txBody>
+          <a:bodyPr wrap="square" lIns="0" tIns="0" rIns="0" bIns="0" rtlCol="0" anchor="t"/>
+          <a:lstStyle/>
+          <a:p>
+            <a:pPr algn="l" indent="0" marL="0">
+              <a:lnSpc>
+                <a:spcPts val="2600"/>
+              </a:lnSpc>
+              <a:spcAft>
+                <a:spcPts val="933"/>
+              </a:spcAft>
+              <a:buNone/>
+            </a:pPr>
+            <a:r>
+              <a:rPr lang="en-US" sz="2000" b="1" dirty="0">
+                <a:solidFill>
+                  <a:srgbClr val="1A1A1A"/>
+                </a:solidFill>
+                <a:latin typeface="Arimo" pitchFamily="34" charset="0"/>
+                <a:ea typeface="Arimo" pitchFamily="34" charset="-122"/>
+                <a:cs typeface="Arimo" pitchFamily="34" charset="-120"/>
+              </a:rPr>
+              <a:t>Training</a:t>
+            </a:r>
+            <a:endParaRPr lang="en-US" sz="2000" dirty="0"/>
+          </a:p>
+        </p:txBody>
+      </p:sp>
+      <p:sp>
+        <p:nvSpPr>
+          <p:cNvPr id="12" name="Text 10"/>
+          <p:cNvSpPr/>
+          <p:nvPr/>
+        </p:nvSpPr>
+        <p:spPr>
+          <a:xfrm>
+            <a:off x="4577801" y="2753122"/>
+            <a:ext cx="3093816" cy="663972"/>
+          </a:xfrm>
+          <a:prstGeom prst="rect">
+            <a:avLst/>
+          </a:prstGeom>
+          <a:noFill/>
+          <a:ln/>
+        </p:spPr>
+        <p:txBody>
+          <a:bodyPr wrap="square" lIns="0" tIns="0" rIns="0" bIns="0" rtlCol="0" anchor="t"/>
+          <a:lstStyle/>
+          <a:p>
+            <a:pPr algn="l" indent="0" marL="0">
+              <a:lnSpc>
+                <a:spcPts val="2613"/>
+              </a:lnSpc>
+              <a:buNone/>
+            </a:pPr>
+            <a:r>
+              <a:rPr lang="en-US" sz="1866" dirty="0">
+                <a:solidFill>
+                  <a:srgbClr val="6B7280"/>
+                </a:solidFill>
+                <a:latin typeface="Arimo" pitchFamily="34" charset="0"/>
+                <a:ea typeface="Arimo" pitchFamily="34" charset="-122"/>
+                <a:cs typeface="Arimo" pitchFamily="34" charset="-120"/>
+              </a:rPr>
+              <a:t>Every model comes from a pipeline that can re-run.</a:t>
+            </a:r>
+            <a:endParaRPr lang="en-US" sz="1866" dirty="0"/>
+          </a:p>
+        </p:txBody>
+      </p:sp>
+      <p:sp>
+        <p:nvSpPr>
+          <p:cNvPr id="13" name="Text 11"/>
+          <p:cNvSpPr/>
+          <p:nvPr/>
+        </p:nvSpPr>
+        <p:spPr>
+          <a:xfrm>
+            <a:off x="8080736" y="1570434"/>
+            <a:ext cx="3566617" cy="2096294"/>
+          </a:xfrm>
+          <a:prstGeom prst="rect">
+            <a:avLst/>
+          </a:prstGeom>
+          <a:noFill/>
+          <a:ln w="12698">
+            <a:solidFill>
+              <a:srgbClr val="D1D5DB"/>
+            </a:solidFill>
+          </a:ln>
+        </p:spPr>
+        <p:txBody>
+          <a:bodyPr wrap="square" rtlCol="0" anchor="ctr"/>
+          <a:lstStyle/>
+          <a:p>
+            <a:pPr indent="0" marL="0">
+              <a:buNone/>
+            </a:pPr>
+            <a:endParaRPr lang="en-US" dirty="0"/>
+          </a:p>
+        </p:txBody>
+      </p:sp>
+      <p:sp>
+        <p:nvSpPr>
+          <p:cNvPr id="14" name="Text 12"/>
+          <p:cNvSpPr/>
+          <p:nvPr/>
+        </p:nvSpPr>
+        <p:spPr>
+          <a:xfrm>
+            <a:off x="8347369" y="1820069"/>
+            <a:ext cx="3094018" cy="331986"/>
+          </a:xfrm>
+          <a:prstGeom prst="rect">
+            <a:avLst/>
+          </a:prstGeom>
+          <a:noFill/>
+          <a:ln/>
+        </p:spPr>
+        <p:txBody>
+          <a:bodyPr wrap="square" lIns="0" tIns="0" rIns="0" bIns="0" rtlCol="0" anchor="t"/>
+          <a:lstStyle/>
+          <a:p>
+            <a:pPr algn="l" indent="0" marL="0">
+              <a:lnSpc>
+                <a:spcPts val="2613"/>
+              </a:lnSpc>
+              <a:spcAft>
+                <a:spcPts val="1200"/>
+              </a:spcAft>
+              <a:buNone/>
+            </a:pPr>
+            <a:r>
+              <a:rPr lang="en-US" sz="1866" b="1" dirty="0">
+                <a:solidFill>
+                  <a:srgbClr val="6B7280"/>
+                </a:solidFill>
+                <a:latin typeface="Arimo" pitchFamily="34" charset="0"/>
+                <a:ea typeface="Arimo" pitchFamily="34" charset="-122"/>
+                <a:cs typeface="Arimo" pitchFamily="34" charset="-120"/>
+              </a:rPr>
+              <a:t>03</a:t>
+            </a:r>
+            <a:endParaRPr lang="en-US" sz="1866" dirty="0"/>
+          </a:p>
+        </p:txBody>
+      </p:sp>
+      <p:sp>
+        <p:nvSpPr>
+          <p:cNvPr id="15" name="Text 13"/>
+          <p:cNvSpPr/>
+          <p:nvPr/>
+        </p:nvSpPr>
+        <p:spPr>
+          <a:xfrm>
+            <a:off x="8347369" y="2304455"/>
+            <a:ext cx="3094018" cy="330200"/>
+          </a:xfrm>
+          <a:prstGeom prst="rect">
+            <a:avLst/>
+          </a:prstGeom>
+          <a:noFill/>
+          <a:ln/>
+        </p:spPr>
+        <p:txBody>
+          <a:bodyPr wrap="square" lIns="0" tIns="0" rIns="0" bIns="0" rtlCol="0" anchor="t"/>
+          <a:lstStyle/>
+          <a:p>
+            <a:pPr algn="l" indent="0" marL="0">
+              <a:lnSpc>
+                <a:spcPts val="2600"/>
+              </a:lnSpc>
+              <a:spcAft>
+                <a:spcPts val="933"/>
+              </a:spcAft>
+              <a:buNone/>
+            </a:pPr>
+            <a:r>
+              <a:rPr lang="en-US" sz="2000" b="1" dirty="0">
+                <a:solidFill>
+                  <a:srgbClr val="1A1A1A"/>
+                </a:solidFill>
+                <a:latin typeface="Arimo" pitchFamily="34" charset="0"/>
+                <a:ea typeface="Arimo" pitchFamily="34" charset="-122"/>
+                <a:cs typeface="Arimo" pitchFamily="34" charset="-120"/>
+              </a:rPr>
+              <a:t>Registry</a:t>
+            </a:r>
+            <a:endParaRPr lang="en-US" sz="2000" dirty="0"/>
+          </a:p>
+        </p:txBody>
+      </p:sp>
+      <p:sp>
+        <p:nvSpPr>
+          <p:cNvPr id="16" name="Text 14"/>
+          <p:cNvSpPr/>
+          <p:nvPr/>
+        </p:nvSpPr>
+        <p:spPr>
+          <a:xfrm>
+            <a:off x="8347369" y="2753122"/>
+            <a:ext cx="3094018" cy="663972"/>
+          </a:xfrm>
+          <a:prstGeom prst="rect">
+            <a:avLst/>
+          </a:prstGeom>
+          <a:noFill/>
+          <a:ln/>
+        </p:spPr>
+        <p:txBody>
+          <a:bodyPr wrap="square" lIns="0" tIns="0" rIns="0" bIns="0" rtlCol="0" anchor="t"/>
+          <a:lstStyle/>
+          <a:p>
+            <a:pPr algn="l" indent="0" marL="0">
+              <a:lnSpc>
+                <a:spcPts val="2613"/>
+              </a:lnSpc>
+              <a:buNone/>
+            </a:pPr>
+            <a:r>
+              <a:rPr lang="en-US" sz="1866" dirty="0">
+                <a:solidFill>
+                  <a:srgbClr val="6B7280"/>
+                </a:solidFill>
+                <a:latin typeface="Arimo" pitchFamily="34" charset="0"/>
+                <a:ea typeface="Arimo" pitchFamily="34" charset="-122"/>
+                <a:cs typeface="Arimo" pitchFamily="34" charset="-120"/>
+              </a:rPr>
+              <a:t>A model has a version, a lineage and an owner.</a:t>
+            </a:r>
+            <a:endParaRPr lang="en-US" sz="1866" dirty="0"/>
+          </a:p>
+        </p:txBody>
+      </p:sp>
+      <p:sp>
+        <p:nvSpPr>
+          <p:cNvPr id="17" name="Text 15"/>
+          <p:cNvSpPr/>
+          <p:nvPr/>
+        </p:nvSpPr>
+        <p:spPr>
+          <a:xfrm>
+            <a:off x="541599" y="3869928"/>
+            <a:ext cx="3566419" cy="2096294"/>
+          </a:xfrm>
+          <a:prstGeom prst="rect">
+            <a:avLst/>
+          </a:prstGeom>
+          <a:noFill/>
+          <a:ln w="12698">
+            <a:solidFill>
+              <a:srgbClr val="D1D5DB"/>
+            </a:solidFill>
+          </a:ln>
+        </p:spPr>
+        <p:txBody>
+          <a:bodyPr wrap="square" rtlCol="0" anchor="ctr"/>
+          <a:lstStyle/>
+          <a:p>
+            <a:pPr indent="0" marL="0">
+              <a:buNone/>
+            </a:pPr>
+            <a:endParaRPr lang="en-US" dirty="0"/>
+          </a:p>
+        </p:txBody>
+      </p:sp>
+      <p:sp>
+        <p:nvSpPr>
+          <p:cNvPr id="18" name="Text 16"/>
+          <p:cNvSpPr/>
+          <p:nvPr/>
+        </p:nvSpPr>
+        <p:spPr>
+          <a:xfrm>
+            <a:off x="808232" y="4119562"/>
+            <a:ext cx="3093816" cy="331986"/>
+          </a:xfrm>
+          <a:prstGeom prst="rect">
+            <a:avLst/>
+          </a:prstGeom>
+          <a:noFill/>
+          <a:ln/>
+        </p:spPr>
+        <p:txBody>
+          <a:bodyPr wrap="square" lIns="0" tIns="0" rIns="0" bIns="0" rtlCol="0" anchor="t"/>
+          <a:lstStyle/>
+          <a:p>
+            <a:pPr algn="l" indent="0" marL="0">
+              <a:lnSpc>
+                <a:spcPts val="2613"/>
+              </a:lnSpc>
+              <a:spcAft>
+                <a:spcPts val="1200"/>
+              </a:spcAft>
+              <a:buNone/>
+            </a:pPr>
+            <a:r>
+              <a:rPr lang="en-US" sz="1866" b="1" dirty="0">
+                <a:solidFill>
+                  <a:srgbClr val="6B7280"/>
+                </a:solidFill>
+                <a:latin typeface="Arimo" pitchFamily="34" charset="0"/>
+                <a:ea typeface="Arimo" pitchFamily="34" charset="-122"/>
+                <a:cs typeface="Arimo" pitchFamily="34" charset="-120"/>
+              </a:rPr>
+              <a:t>04</a:t>
+            </a:r>
+            <a:endParaRPr lang="en-US" sz="1866" dirty="0"/>
+          </a:p>
+        </p:txBody>
+      </p:sp>
+      <p:sp>
+        <p:nvSpPr>
+          <p:cNvPr id="19" name="Text 17"/>
+          <p:cNvSpPr/>
+          <p:nvPr/>
+        </p:nvSpPr>
+        <p:spPr>
+          <a:xfrm>
+            <a:off x="808232" y="4603948"/>
+            <a:ext cx="3093816" cy="330200"/>
+          </a:xfrm>
+          <a:prstGeom prst="rect">
+            <a:avLst/>
+          </a:prstGeom>
+          <a:noFill/>
+          <a:ln/>
+        </p:spPr>
+        <p:txBody>
+          <a:bodyPr wrap="square" lIns="0" tIns="0" rIns="0" bIns="0" rtlCol="0" anchor="t"/>
+          <a:lstStyle/>
+          <a:p>
+            <a:pPr algn="l" indent="0" marL="0">
+              <a:lnSpc>
+                <a:spcPts val="2600"/>
+              </a:lnSpc>
+              <a:spcAft>
+                <a:spcPts val="933"/>
+              </a:spcAft>
+              <a:buNone/>
+            </a:pPr>
+            <a:r>
+              <a:rPr lang="en-US" sz="2000" b="1" dirty="0">
+                <a:solidFill>
+                  <a:srgbClr val="1A1A1A"/>
+                </a:solidFill>
+                <a:latin typeface="Arimo" pitchFamily="34" charset="0"/>
+                <a:ea typeface="Arimo" pitchFamily="34" charset="-122"/>
+                <a:cs typeface="Arimo" pitchFamily="34" charset="-120"/>
+              </a:rPr>
+              <a:t>Serving</a:t>
+            </a:r>
+            <a:endParaRPr lang="en-US" sz="2000" dirty="0"/>
+          </a:p>
+        </p:txBody>
+      </p:sp>
+      <p:sp>
+        <p:nvSpPr>
+          <p:cNvPr id="20" name="Text 18"/>
+          <p:cNvSpPr/>
+          <p:nvPr/>
+        </p:nvSpPr>
+        <p:spPr>
+          <a:xfrm>
+            <a:off x="808232" y="5052616"/>
+            <a:ext cx="3093816" cy="663972"/>
+          </a:xfrm>
+          <a:prstGeom prst="rect">
+            <a:avLst/>
+          </a:prstGeom>
+          <a:noFill/>
+          <a:ln/>
+        </p:spPr>
+        <p:txBody>
+          <a:bodyPr wrap="square" lIns="0" tIns="0" rIns="0" bIns="0" rtlCol="0" anchor="t"/>
+          <a:lstStyle/>
+          <a:p>
+            <a:pPr algn="l" indent="0" marL="0">
+              <a:lnSpc>
+                <a:spcPts val="2613"/>
+              </a:lnSpc>
+              <a:buNone/>
+            </a:pPr>
+            <a:r>
+              <a:rPr lang="en-US" sz="1866" dirty="0">
+                <a:solidFill>
+                  <a:srgbClr val="6B7280"/>
+                </a:solidFill>
+                <a:latin typeface="Arimo" pitchFamily="34" charset="0"/>
+                <a:ea typeface="Arimo" pitchFamily="34" charset="-122"/>
+                <a:cs typeface="Arimo" pitchFamily="34" charset="-120"/>
+              </a:rPr>
+              <a:t>Shipping a model is a config change, not a project.</a:t>
+            </a:r>
+            <a:endParaRPr lang="en-US" sz="1866" dirty="0"/>
+          </a:p>
+        </p:txBody>
+      </p:sp>
+      <p:sp>
+        <p:nvSpPr>
+          <p:cNvPr id="21" name="Text 19"/>
+          <p:cNvSpPr/>
+          <p:nvPr/>
+        </p:nvSpPr>
+        <p:spPr>
+          <a:xfrm>
+            <a:off x="4311167" y="3869928"/>
+            <a:ext cx="3566419" cy="2096294"/>
+          </a:xfrm>
+          <a:prstGeom prst="rect">
+            <a:avLst/>
+          </a:prstGeom>
+          <a:noFill/>
+          <a:ln w="12698">
+            <a:solidFill>
+              <a:srgbClr val="D1D5DB"/>
+            </a:solidFill>
+          </a:ln>
+        </p:spPr>
+        <p:txBody>
+          <a:bodyPr wrap="square" rtlCol="0" anchor="ctr"/>
+          <a:lstStyle/>
+          <a:p>
+            <a:pPr indent="0" marL="0">
+              <a:buNone/>
+            </a:pPr>
+            <a:endParaRPr lang="en-US" dirty="0"/>
+          </a:p>
+        </p:txBody>
+      </p:sp>
+      <p:sp>
+        <p:nvSpPr>
+          <p:cNvPr id="22" name="Text 20"/>
+          <p:cNvSpPr/>
+          <p:nvPr/>
+        </p:nvSpPr>
+        <p:spPr>
+          <a:xfrm>
+            <a:off x="4577801" y="4119562"/>
+            <a:ext cx="3093816" cy="331986"/>
+          </a:xfrm>
+          <a:prstGeom prst="rect">
+            <a:avLst/>
+          </a:prstGeom>
+          <a:noFill/>
+          <a:ln/>
+        </p:spPr>
+        <p:txBody>
+          <a:bodyPr wrap="square" lIns="0" tIns="0" rIns="0" bIns="0" rtlCol="0" anchor="t"/>
+          <a:lstStyle/>
+          <a:p>
+            <a:pPr algn="l" indent="0" marL="0">
+              <a:lnSpc>
+                <a:spcPts val="2613"/>
+              </a:lnSpc>
+              <a:spcAft>
+                <a:spcPts val="1200"/>
+              </a:spcAft>
+              <a:buNone/>
+            </a:pPr>
+            <a:r>
+              <a:rPr lang="en-US" sz="1866" b="1" dirty="0">
+                <a:solidFill>
+                  <a:srgbClr val="6B7280"/>
+                </a:solidFill>
+                <a:latin typeface="Arimo" pitchFamily="34" charset="0"/>
+                <a:ea typeface="Arimo" pitchFamily="34" charset="-122"/>
+                <a:cs typeface="Arimo" pitchFamily="34" charset="-120"/>
+              </a:rPr>
+              <a:t>05</a:t>
+            </a:r>
+            <a:endParaRPr lang="en-US" sz="1866" dirty="0"/>
+          </a:p>
+        </p:txBody>
+      </p:sp>
+      <p:sp>
+        <p:nvSpPr>
+          <p:cNvPr id="23" name="Text 21"/>
+          <p:cNvSpPr/>
+          <p:nvPr/>
+        </p:nvSpPr>
+        <p:spPr>
+          <a:xfrm>
+            <a:off x="4577801" y="4603948"/>
+            <a:ext cx="3093816" cy="330200"/>
+          </a:xfrm>
+          <a:prstGeom prst="rect">
+            <a:avLst/>
+          </a:prstGeom>
+          <a:noFill/>
+          <a:ln/>
+        </p:spPr>
+        <p:txBody>
+          <a:bodyPr wrap="square" lIns="0" tIns="0" rIns="0" bIns="0" rtlCol="0" anchor="t"/>
+          <a:lstStyle/>
+          <a:p>
+            <a:pPr algn="l" indent="0" marL="0">
+              <a:lnSpc>
+                <a:spcPts val="2600"/>
+              </a:lnSpc>
+              <a:spcAft>
+                <a:spcPts val="933"/>
+              </a:spcAft>
+              <a:buNone/>
+            </a:pPr>
+            <a:r>
+              <a:rPr lang="en-US" sz="2000" b="1" dirty="0">
+                <a:solidFill>
+                  <a:srgbClr val="1A1A1A"/>
+                </a:solidFill>
+                <a:latin typeface="Arimo" pitchFamily="34" charset="0"/>
+                <a:ea typeface="Arimo" pitchFamily="34" charset="-122"/>
+                <a:cs typeface="Arimo" pitchFamily="34" charset="-120"/>
+              </a:rPr>
+              <a:t>Monitoring</a:t>
+            </a:r>
+            <a:endParaRPr lang="en-US" sz="2000" dirty="0"/>
+          </a:p>
+        </p:txBody>
+      </p:sp>
+      <p:sp>
+        <p:nvSpPr>
+          <p:cNvPr id="24" name="Text 22"/>
+          <p:cNvSpPr/>
+          <p:nvPr/>
+        </p:nvSpPr>
+        <p:spPr>
+          <a:xfrm>
+            <a:off x="4577801" y="5052616"/>
+            <a:ext cx="3093816" cy="663972"/>
+          </a:xfrm>
+          <a:prstGeom prst="rect">
+            <a:avLst/>
+          </a:prstGeom>
+          <a:noFill/>
+          <a:ln/>
+        </p:spPr>
+        <p:txBody>
+          <a:bodyPr wrap="square" lIns="0" tIns="0" rIns="0" bIns="0" rtlCol="0" anchor="t"/>
+          <a:lstStyle/>
+          <a:p>
+            <a:pPr algn="l" indent="0" marL="0">
+              <a:lnSpc>
+                <a:spcPts val="2613"/>
+              </a:lnSpc>
+              <a:buNone/>
+            </a:pPr>
+            <a:r>
+              <a:rPr lang="en-US" sz="1866" dirty="0">
+                <a:solidFill>
+                  <a:srgbClr val="6B7280"/>
+                </a:solidFill>
+                <a:latin typeface="Arimo" pitchFamily="34" charset="0"/>
+                <a:ea typeface="Arimo" pitchFamily="34" charset="-122"/>
+                <a:cs typeface="Arimo" pitchFamily="34" charset="-120"/>
+              </a:rPr>
+              <a:t>Inputs, outputs and drift are visible on demand.</a:t>
+            </a:r>
+            <a:endParaRPr lang="en-US" sz="1866" dirty="0"/>
+          </a:p>
+        </p:txBody>
+      </p:sp>
+      <p:sp>
+        <p:nvSpPr>
+          <p:cNvPr id="25" name="Text 23"/>
+          <p:cNvSpPr/>
+          <p:nvPr/>
+        </p:nvSpPr>
+        <p:spPr>
+          <a:xfrm>
+            <a:off x="8080736" y="3869928"/>
+            <a:ext cx="3566617" cy="2096294"/>
+          </a:xfrm>
+          <a:prstGeom prst="rect">
+            <a:avLst/>
+          </a:prstGeom>
+          <a:noFill/>
+          <a:ln w="12698">
+            <a:solidFill>
+              <a:srgbClr val="D1D5DB"/>
+            </a:solidFill>
+          </a:ln>
+        </p:spPr>
+        <p:txBody>
+          <a:bodyPr wrap="square" rtlCol="0" anchor="ctr"/>
+          <a:lstStyle/>
+          <a:p>
+            <a:pPr indent="0" marL="0">
+              <a:buNone/>
+            </a:pPr>
+            <a:endParaRPr lang="en-US" dirty="0"/>
+          </a:p>
+        </p:txBody>
+      </p:sp>
+      <p:sp>
+        <p:nvSpPr>
+          <p:cNvPr id="26" name="Text 24"/>
+          <p:cNvSpPr/>
+          <p:nvPr/>
+        </p:nvSpPr>
+        <p:spPr>
+          <a:xfrm>
+            <a:off x="8347369" y="4119562"/>
+            <a:ext cx="3094018" cy="331986"/>
+          </a:xfrm>
+          <a:prstGeom prst="rect">
+            <a:avLst/>
+          </a:prstGeom>
+          <a:noFill/>
+          <a:ln/>
+        </p:spPr>
+        <p:txBody>
+          <a:bodyPr wrap="square" lIns="0" tIns="0" rIns="0" bIns="0" rtlCol="0" anchor="t"/>
+          <a:lstStyle/>
+          <a:p>
+            <a:pPr algn="l" indent="0" marL="0">
+              <a:lnSpc>
+                <a:spcPts val="2613"/>
+              </a:lnSpc>
+              <a:spcAft>
+                <a:spcPts val="1200"/>
+              </a:spcAft>
+              <a:buNone/>
+            </a:pPr>
+            <a:r>
+              <a:rPr lang="en-US" sz="1866" b="1" dirty="0">
+                <a:solidFill>
+                  <a:srgbClr val="6B7280"/>
+                </a:solidFill>
+                <a:latin typeface="Arimo" pitchFamily="34" charset="0"/>
+                <a:ea typeface="Arimo" pitchFamily="34" charset="-122"/>
+                <a:cs typeface="Arimo" pitchFamily="34" charset="-120"/>
+              </a:rPr>
+              <a:t>06</a:t>
+            </a:r>
+            <a:endParaRPr lang="en-US" sz="1866" dirty="0"/>
+          </a:p>
+        </p:txBody>
+      </p:sp>
+      <p:sp>
+        <p:nvSpPr>
+          <p:cNvPr id="27" name="Text 25"/>
+          <p:cNvSpPr/>
+          <p:nvPr/>
+        </p:nvSpPr>
+        <p:spPr>
+          <a:xfrm>
+            <a:off x="8347369" y="4603948"/>
+            <a:ext cx="3094018" cy="330200"/>
+          </a:xfrm>
+          <a:prstGeom prst="rect">
+            <a:avLst/>
+          </a:prstGeom>
+          <a:noFill/>
+          <a:ln/>
+        </p:spPr>
+        <p:txBody>
+          <a:bodyPr wrap="square" lIns="0" tIns="0" rIns="0" bIns="0" rtlCol="0" anchor="t"/>
+          <a:lstStyle/>
+          <a:p>
+            <a:pPr algn="l" indent="0" marL="0">
+              <a:lnSpc>
+                <a:spcPts val="2600"/>
+              </a:lnSpc>
+              <a:spcAft>
+                <a:spcPts val="933"/>
+              </a:spcAft>
+              <a:buNone/>
+            </a:pPr>
+            <a:r>
+              <a:rPr lang="en-US" sz="2000" b="1" dirty="0">
+                <a:solidFill>
+                  <a:srgbClr val="1A1A1A"/>
+                </a:solidFill>
+                <a:latin typeface="Arimo" pitchFamily="34" charset="0"/>
+                <a:ea typeface="Arimo" pitchFamily="34" charset="-122"/>
+                <a:cs typeface="Arimo" pitchFamily="34" charset="-120"/>
+              </a:rPr>
+              <a:t>Governance</a:t>
+            </a:r>
+            <a:endParaRPr lang="en-US" sz="2000" dirty="0"/>
+          </a:p>
+        </p:txBody>
+      </p:sp>
+      <p:sp>
+        <p:nvSpPr>
+          <p:cNvPr id="28" name="Text 26"/>
+          <p:cNvSpPr/>
+          <p:nvPr/>
+        </p:nvSpPr>
+        <p:spPr>
+          <a:xfrm>
+            <a:off x="8347369" y="5052616"/>
+            <a:ext cx="3094018" cy="663972"/>
+          </a:xfrm>
+          <a:prstGeom prst="rect">
+            <a:avLst/>
+          </a:prstGeom>
+          <a:noFill/>
+          <a:ln/>
+        </p:spPr>
+        <p:txBody>
+          <a:bodyPr wrap="square" lIns="0" tIns="0" rIns="0" bIns="0" rtlCol="0" anchor="t"/>
+          <a:lstStyle/>
+          <a:p>
+            <a:pPr algn="l" indent="0" marL="0">
+              <a:lnSpc>
+                <a:spcPts val="2613"/>
+              </a:lnSpc>
+              <a:buNone/>
+            </a:pPr>
+            <a:r>
+              <a:rPr lang="en-US" sz="1866" dirty="0">
+                <a:solidFill>
+                  <a:srgbClr val="6B7280"/>
+                </a:solidFill>
+                <a:latin typeface="Arimo" pitchFamily="34" charset="0"/>
+                <a:ea typeface="Arimo" pitchFamily="34" charset="-122"/>
+                <a:cs typeface="Arimo" pitchFamily="34" charset="-120"/>
+              </a:rPr>
+              <a:t>What a model trained on is answerable months later.</a:t>
+            </a:r>
+            <a:endParaRPr lang="en-US" sz="1866" dirty="0"/>
+          </a:p>
+        </p:txBody>
+      </p:sp>
+      <p:sp>
+        <p:nvSpPr>
+          <p:cNvPr id="29" name="Text 27"/>
+          <p:cNvSpPr/>
+          <p:nvPr/>
+        </p:nvSpPr>
+        <p:spPr>
+          <a:xfrm>
+            <a:off x="319484" y="6113066"/>
+            <a:ext cx="11327869" cy="236934"/>
+          </a:xfrm>
+          <a:prstGeom prst="rect">
+            <a:avLst/>
+          </a:prstGeom>
+          <a:noFill/>
+          <a:ln/>
+        </p:spPr>
+        <p:txBody>
+          <a:bodyPr wrap="square" lIns="0" tIns="0" rIns="0" bIns="0" rtlCol="0" anchor="t"/>
+          <a:lstStyle/>
+          <a:p>
+            <a:pPr algn="r" indent="0" marL="0">
+              <a:lnSpc>
+                <a:spcPts val="1866"/>
+              </a:lnSpc>
+              <a:buNone/>
+            </a:pPr>
+            <a:r>
+              <a:rPr lang="en-US" sz="1333" dirty="0">
+                <a:solidFill>
+                  <a:srgbClr val="6B7280"/>
+                </a:solidFill>
+                <a:latin typeface="Arimo" pitchFamily="34" charset="0"/>
+                <a:ea typeface="Arimo" pitchFamily="34" charset="-122"/>
+                <a:cs typeface="Arimo" pitchFamily="34" charset="-120"/>
+              </a:rPr>
+              <a:t>MLOPS PLATFORM ROADMAP · SHEET 03/07 · NO EXTERNAL DATA CITED</a:t>
+            </a:r>
+            <a:endParaRPr lang="en-US" sz="1333" dirty="0"/>
+          </a:p>
+        </p:txBody>
+      </p:sp>
     </p:spTree>
   </p:cSld>
   <p:clrMapOvr>
@@ -1535,6 +4022,13 @@
 <file path=ppt/slides/slide4.xml><?xml version="1.0" encoding="utf-8"?>
 <p:sld xmlns:a="http://schemas.openxmlformats.org/drawingml/2006/main" xmlns:r="http://schemas.openxmlformats.org/officeDocument/2006/relationships" xmlns:p="http://schemas.openxmlformats.org/presentationml/2006/main">
   <p:cSld name="Slide 4">
+    <p:bg>
+      <p:bgPr>
+        <a:solidFill>
+          <a:srgbClr val="FFFFFF"/>
+        </a:solidFill>
+      </p:bgPr>
+    </p:bg>
     <p:spTree>
       <p:nvGrpSpPr>
         <p:cNvPr id="1" name=""/>
@@ -1549,30 +4043,1191 @@
           <a:chExt cx="0" cy="0"/>
         </a:xfrm>
       </p:grpSpPr>
+      <p:sp>
+        <p:nvSpPr>
+          <p:cNvPr id="2" name="Text 0"/>
+          <p:cNvSpPr/>
+          <p:nvPr/>
+        </p:nvSpPr>
+        <p:spPr>
+          <a:xfrm>
+            <a:off x="541599" y="484386"/>
+            <a:ext cx="11327869" cy="260747"/>
+          </a:xfrm>
+          <a:prstGeom prst="rect">
+            <a:avLst/>
+          </a:prstGeom>
+          <a:noFill/>
+          <a:ln/>
+        </p:spPr>
+        <p:txBody>
+          <a:bodyPr wrap="square" lIns="0" tIns="0" rIns="0" bIns="0" rtlCol="0" anchor="t"/>
+          <a:lstStyle/>
+          <a:p>
+            <a:pPr algn="l" indent="0" marL="0">
+              <a:lnSpc>
+                <a:spcPts val="2053"/>
+              </a:lnSpc>
+              <a:spcAft>
+                <a:spcPts val="933"/>
+              </a:spcAft>
+              <a:buNone/>
+            </a:pPr>
+            <a:r>
+              <a:rPr lang="en-US" sz="1466" b="1" dirty="0">
+                <a:solidFill>
+                  <a:srgbClr val="6B7280"/>
+                </a:solidFill>
+                <a:latin typeface="Arimo" pitchFamily="34" charset="0"/>
+                <a:ea typeface="Arimo" pitchFamily="34" charset="-122"/>
+                <a:cs typeface="Arimo" pitchFamily="34" charset="-120"/>
+              </a:rPr>
+              <a:t>SEQUENCE</a:t>
+            </a:r>
+            <a:endParaRPr lang="en-US" sz="1466" dirty="0"/>
+          </a:p>
+        </p:txBody>
+      </p:sp>
+      <p:sp>
+        <p:nvSpPr>
+          <p:cNvPr id="3" name="Text 1"/>
+          <p:cNvSpPr/>
+          <p:nvPr/>
+        </p:nvSpPr>
+        <p:spPr>
+          <a:xfrm>
+            <a:off x="541599" y="863600"/>
+            <a:ext cx="11327869" cy="423267"/>
+          </a:xfrm>
+          <a:prstGeom prst="rect">
+            <a:avLst/>
+          </a:prstGeom>
+          <a:noFill/>
+          <a:ln/>
+        </p:spPr>
+        <p:txBody>
+          <a:bodyPr wrap="square" lIns="0" tIns="0" rIns="0" bIns="0" rtlCol="0" anchor="t"/>
+          <a:lstStyle/>
+          <a:p>
+            <a:pPr algn="l" indent="0" marL="0">
+              <a:lnSpc>
+                <a:spcPts val="3333"/>
+              </a:lnSpc>
+              <a:buNone/>
+            </a:pPr>
+            <a:r>
+              <a:rPr lang="en-US" sz="2666" b="1" dirty="0">
+                <a:solidFill>
+                  <a:srgbClr val="1A1A1A"/>
+                </a:solidFill>
+                <a:latin typeface="Arimo" pitchFamily="34" charset="0"/>
+                <a:ea typeface="Arimo" pitchFamily="34" charset="-122"/>
+                <a:cs typeface="Arimo" pitchFamily="34" charset="-120"/>
+              </a:rPr>
+              <a:t>Three phases, each stopped by a criterion, not a date</a:t>
+            </a:r>
+            <a:endParaRPr lang="en-US" sz="2666" dirty="0"/>
+          </a:p>
+        </p:txBody>
+      </p:sp>
+      <p:sp>
+        <p:nvSpPr>
+          <p:cNvPr id="4" name="Text 2"/>
+          <p:cNvSpPr/>
+          <p:nvPr/>
+        </p:nvSpPr>
+        <p:spPr>
+          <a:xfrm>
+            <a:off x="541599" y="1286867"/>
+            <a:ext cx="11105754" cy="12700"/>
+          </a:xfrm>
+          <a:prstGeom prst="rect">
+            <a:avLst/>
+          </a:prstGeom>
+          <a:solidFill>
+            <a:srgbClr val="D1D5DB"/>
+          </a:solidFill>
+          <a:ln/>
+        </p:spPr>
+        <p:txBody>
+          <a:bodyPr wrap="square" rtlCol="0" anchor="ctr"/>
+          <a:lstStyle/>
+          <a:p>
+            <a:pPr indent="0" marL="0">
+              <a:buNone/>
+            </a:pPr>
+            <a:endParaRPr lang="en-US" dirty="0"/>
+          </a:p>
+        </p:txBody>
+      </p:sp>
+      <p:sp>
+        <p:nvSpPr>
+          <p:cNvPr id="5" name="Text 3"/>
+          <p:cNvSpPr/>
+          <p:nvPr/>
+        </p:nvSpPr>
+        <p:spPr>
+          <a:xfrm>
+            <a:off x="541599" y="1570434"/>
+            <a:ext cx="3441038" cy="3804245"/>
+          </a:xfrm>
+          <a:prstGeom prst="rect">
+            <a:avLst/>
+          </a:prstGeom>
+          <a:noFill/>
+          <a:ln w="12698">
+            <a:solidFill>
+              <a:srgbClr val="D1D5DB"/>
+            </a:solidFill>
+          </a:ln>
+        </p:spPr>
+        <p:txBody>
+          <a:bodyPr wrap="square" rtlCol="0" anchor="ctr"/>
+          <a:lstStyle/>
+          <a:p>
+            <a:pPr indent="0" marL="0">
+              <a:buNone/>
+            </a:pPr>
+            <a:endParaRPr lang="en-US" dirty="0"/>
+          </a:p>
+        </p:txBody>
+      </p:sp>
+      <p:sp>
+        <p:nvSpPr>
+          <p:cNvPr id="6" name="Text 4"/>
+          <p:cNvSpPr/>
+          <p:nvPr/>
+        </p:nvSpPr>
+        <p:spPr>
+          <a:xfrm>
+            <a:off x="808232" y="1820069"/>
+            <a:ext cx="2965927" cy="331986"/>
+          </a:xfrm>
+          <a:prstGeom prst="rect">
+            <a:avLst/>
+          </a:prstGeom>
+          <a:noFill/>
+          <a:ln/>
+        </p:spPr>
+        <p:txBody>
+          <a:bodyPr wrap="square" lIns="0" tIns="0" rIns="0" bIns="0" rtlCol="0" anchor="t"/>
+          <a:lstStyle/>
+          <a:p>
+            <a:pPr algn="l" indent="0" marL="0">
+              <a:lnSpc>
+                <a:spcPts val="2613"/>
+              </a:lnSpc>
+              <a:spcAft>
+                <a:spcPts val="1200"/>
+              </a:spcAft>
+              <a:buNone/>
+            </a:pPr>
+            <a:r>
+              <a:rPr lang="en-US" sz="1866" b="1" dirty="0">
+                <a:solidFill>
+                  <a:srgbClr val="6B7280"/>
+                </a:solidFill>
+                <a:latin typeface="Arimo" pitchFamily="34" charset="0"/>
+                <a:ea typeface="Arimo" pitchFamily="34" charset="-122"/>
+                <a:cs typeface="Arimo" pitchFamily="34" charset="-120"/>
+              </a:rPr>
+              <a:t>PHASE 01</a:t>
+            </a:r>
+            <a:endParaRPr lang="en-US" sz="1866" dirty="0"/>
+          </a:p>
+        </p:txBody>
+      </p:sp>
+      <p:sp>
+        <p:nvSpPr>
+          <p:cNvPr id="7" name="Text 5"/>
+          <p:cNvSpPr/>
+          <p:nvPr/>
+        </p:nvSpPr>
+        <p:spPr>
+          <a:xfrm>
+            <a:off x="808232" y="2304455"/>
+            <a:ext cx="2965927" cy="330200"/>
+          </a:xfrm>
+          <a:prstGeom prst="rect">
+            <a:avLst/>
+          </a:prstGeom>
+          <a:noFill/>
+          <a:ln/>
+        </p:spPr>
+        <p:txBody>
+          <a:bodyPr wrap="square" lIns="0" tIns="0" rIns="0" bIns="0" rtlCol="0" anchor="t"/>
+          <a:lstStyle/>
+          <a:p>
+            <a:pPr algn="l" indent="0" marL="0">
+              <a:lnSpc>
+                <a:spcPts val="2600"/>
+              </a:lnSpc>
+              <a:spcAft>
+                <a:spcPts val="1067"/>
+              </a:spcAft>
+              <a:buNone/>
+            </a:pPr>
+            <a:r>
+              <a:rPr lang="en-US" sz="2000" b="1" dirty="0">
+                <a:solidFill>
+                  <a:srgbClr val="1A1A1A"/>
+                </a:solidFill>
+                <a:latin typeface="Arimo" pitchFamily="34" charset="0"/>
+                <a:ea typeface="Arimo" pitchFamily="34" charset="-122"/>
+                <a:cs typeface="Arimo" pitchFamily="34" charset="-120"/>
+              </a:rPr>
+              <a:t>REPEATABLE</a:t>
+            </a:r>
+            <a:endParaRPr lang="en-US" sz="2000" dirty="0"/>
+          </a:p>
+        </p:txBody>
+      </p:sp>
+      <p:sp>
+        <p:nvSpPr>
+          <p:cNvPr id="8" name="Text 6"/>
+          <p:cNvSpPr/>
+          <p:nvPr/>
+        </p:nvSpPr>
+        <p:spPr>
+          <a:xfrm>
+            <a:off x="808232" y="2769989"/>
+            <a:ext cx="2965927" cy="663972"/>
+          </a:xfrm>
+          <a:prstGeom prst="rect">
+            <a:avLst/>
+          </a:prstGeom>
+          <a:noFill/>
+          <a:ln/>
+        </p:spPr>
+        <p:txBody>
+          <a:bodyPr wrap="square" lIns="0" tIns="0" rIns="0" bIns="0" rtlCol="0" anchor="t"/>
+          <a:lstStyle/>
+          <a:p>
+            <a:pPr algn="l" indent="0" marL="0">
+              <a:lnSpc>
+                <a:spcPts val="2613"/>
+              </a:lnSpc>
+              <a:spcAft>
+                <a:spcPts val="1600"/>
+              </a:spcAft>
+              <a:buNone/>
+            </a:pPr>
+            <a:r>
+              <a:rPr lang="en-US" sz="1866" dirty="0">
+                <a:solidFill>
+                  <a:srgbClr val="6B7280"/>
+                </a:solidFill>
+                <a:latin typeface="Arimo" pitchFamily="34" charset="0"/>
+                <a:ea typeface="Arimo" pitchFamily="34" charset="-122"/>
+                <a:cs typeface="Arimo" pitchFamily="34" charset="-120"/>
+              </a:rPr>
+              <a:t>Every model is produced by a pipeline, not a laptop.</a:t>
+            </a:r>
+            <a:endParaRPr lang="en-US" sz="1866" dirty="0"/>
+          </a:p>
+        </p:txBody>
+      </p:sp>
+      <p:sp>
+        <p:nvSpPr>
+          <p:cNvPr id="9" name="Shape 7"/>
+          <p:cNvSpPr/>
+          <p:nvPr/>
+        </p:nvSpPr>
+        <p:spPr>
+          <a:xfrm>
+            <a:off x="808232" y="3963988"/>
+            <a:ext cx="2907771" cy="0"/>
+          </a:xfrm>
+          <a:prstGeom prst="line">
+            <a:avLst/>
+          </a:prstGeom>
+          <a:noFill/>
+          <a:ln w="12698">
+            <a:solidFill>
+              <a:srgbClr val="D1D5DB"/>
+            </a:solidFill>
+            <a:prstDash val="solid"/>
+          </a:ln>
+        </p:spPr>
+      </p:sp>
+      <p:sp>
+        <p:nvSpPr>
+          <p:cNvPr id="10" name="Text 8"/>
+          <p:cNvSpPr/>
+          <p:nvPr/>
+        </p:nvSpPr>
+        <p:spPr>
+          <a:xfrm>
+            <a:off x="808232" y="4139605"/>
+            <a:ext cx="2965927" cy="260747"/>
+          </a:xfrm>
+          <a:prstGeom prst="rect">
+            <a:avLst/>
+          </a:prstGeom>
+          <a:noFill/>
+          <a:ln/>
+        </p:spPr>
+        <p:txBody>
+          <a:bodyPr wrap="square" lIns="0" tIns="0" rIns="0" bIns="0" rtlCol="0" anchor="t"/>
+          <a:lstStyle/>
+          <a:p>
+            <a:pPr algn="l" indent="0" marL="0">
+              <a:lnSpc>
+                <a:spcPts val="2053"/>
+              </a:lnSpc>
+              <a:spcAft>
+                <a:spcPts val="667"/>
+              </a:spcAft>
+              <a:buNone/>
+            </a:pPr>
+            <a:r>
+              <a:rPr lang="en-US" sz="1466" b="1" dirty="0">
+                <a:solidFill>
+                  <a:srgbClr val="6B7280"/>
+                </a:solidFill>
+                <a:latin typeface="Arimo" pitchFamily="34" charset="0"/>
+                <a:ea typeface="Arimo" pitchFamily="34" charset="-122"/>
+                <a:cs typeface="Arimo" pitchFamily="34" charset="-120"/>
+              </a:rPr>
+              <a:t>EXIT</a:t>
+            </a:r>
+            <a:endParaRPr lang="en-US" sz="1466" dirty="0"/>
+          </a:p>
+        </p:txBody>
+      </p:sp>
+      <p:sp>
+        <p:nvSpPr>
+          <p:cNvPr id="11" name="Text 9"/>
+          <p:cNvSpPr/>
+          <p:nvPr/>
+        </p:nvSpPr>
+        <p:spPr>
+          <a:xfrm>
+            <a:off x="808232" y="4484886"/>
+            <a:ext cx="2965927" cy="640159"/>
+          </a:xfrm>
+          <a:prstGeom prst="rect">
+            <a:avLst/>
+          </a:prstGeom>
+          <a:noFill/>
+          <a:ln/>
+        </p:spPr>
+        <p:txBody>
+          <a:bodyPr wrap="square" lIns="0" tIns="0" rIns="0" bIns="0" rtlCol="0" anchor="t"/>
+          <a:lstStyle/>
+          <a:p>
+            <a:pPr algn="l" indent="0" marL="0">
+              <a:lnSpc>
+                <a:spcPts val="2520"/>
+              </a:lnSpc>
+              <a:buNone/>
+            </a:pPr>
+            <a:r>
+              <a:rPr lang="en-US" sz="1866" dirty="0">
+                <a:solidFill>
+                  <a:srgbClr val="1A1A1A"/>
+                </a:solidFill>
+                <a:latin typeface="Arimo" pitchFamily="34" charset="0"/>
+                <a:ea typeface="Arimo" pitchFamily="34" charset="-122"/>
+                <a:cs typeface="Arimo" pitchFamily="34" charset="-120"/>
+              </a:rPr>
+              <a:t>Any model in production can be rebuilt from its commit.</a:t>
+            </a:r>
+            <a:endParaRPr lang="en-US" sz="1866" dirty="0"/>
+          </a:p>
+        </p:txBody>
+      </p:sp>
       <p:pic>
         <p:nvPicPr>
-          <p:cNvPr id="2" name="Image 0" descr="/tmp/slide-1787840566167-v4ctacazxwa.png">    </p:cNvPr>
+          <p:cNvPr id="12" name="Image 0" descr="preencoded.png">    </p:cNvPr>
           <p:cNvPicPr>
             <a:picLocks noChangeAspect="1"/>
           </p:cNvPicPr>
           <p:nvPr/>
         </p:nvPicPr>
         <p:blipFill>
-          <a:blip r:embed="rId1"/>
+          <a:blip r:embed="rId1">
+            <a:extLst>
+              <a:ext uri="{96DAC541-7B7A-43D3-8B79-37D633B846F1}">
+                <asvg:svgBlip xmlns:asvg="http://schemas.microsoft.com/office/drawing/2016/SVG/main" r:embed="rId2"/>
+              </a:ext>
+            </a:extLst>
+          </a:blip>
           <a:stretch>
             <a:fillRect/>
           </a:stretch>
         </p:blipFill>
         <p:spPr>
           <a:xfrm>
-            <a:off x="0" y="0"/>
-            <a:ext cx="12188952" cy="6858000"/>
+            <a:off x="3982637" y="3387923"/>
+            <a:ext cx="372374" cy="169267"/>
           </a:xfrm>
           <a:prstGeom prst="rect">
             <a:avLst/>
           </a:prstGeom>
         </p:spPr>
       </p:pic>
+      <p:sp>
+        <p:nvSpPr>
+          <p:cNvPr id="13" name="Text 10"/>
+          <p:cNvSpPr/>
+          <p:nvPr/>
+        </p:nvSpPr>
+        <p:spPr>
+          <a:xfrm>
+            <a:off x="4355011" y="1570434"/>
+            <a:ext cx="3479128" cy="3804245"/>
+          </a:xfrm>
+          <a:prstGeom prst="rect">
+            <a:avLst/>
+          </a:prstGeom>
+          <a:solidFill>
+            <a:srgbClr val="F4F5F7"/>
+          </a:solidFill>
+          <a:ln/>
+        </p:spPr>
+        <p:txBody>
+          <a:bodyPr wrap="square" rtlCol="0" anchor="ctr"/>
+          <a:lstStyle/>
+          <a:p>
+            <a:pPr indent="0" marL="0">
+              <a:buNone/>
+            </a:pPr>
+            <a:endParaRPr lang="en-US" dirty="0"/>
+          </a:p>
+        </p:txBody>
+      </p:sp>
+      <p:sp>
+        <p:nvSpPr>
+          <p:cNvPr id="14" name="Shape 11"/>
+          <p:cNvSpPr/>
+          <p:nvPr/>
+        </p:nvSpPr>
+        <p:spPr>
+          <a:xfrm>
+            <a:off x="4355011" y="1576784"/>
+            <a:ext cx="3479128" cy="0"/>
+          </a:xfrm>
+          <a:prstGeom prst="line">
+            <a:avLst/>
+          </a:prstGeom>
+          <a:noFill/>
+          <a:ln w="12698">
+            <a:solidFill>
+              <a:srgbClr val="D1D5DB"/>
+            </a:solidFill>
+            <a:prstDash val="solid"/>
+          </a:ln>
+        </p:spPr>
+      </p:sp>
+      <p:sp>
+        <p:nvSpPr>
+          <p:cNvPr id="15" name="Shape 12"/>
+          <p:cNvSpPr/>
+          <p:nvPr/>
+        </p:nvSpPr>
+        <p:spPr>
+          <a:xfrm>
+            <a:off x="7827791" y="1570434"/>
+            <a:ext cx="0" cy="3804245"/>
+          </a:xfrm>
+          <a:prstGeom prst="line">
+            <a:avLst/>
+          </a:prstGeom>
+          <a:noFill/>
+          <a:ln w="12698">
+            <a:solidFill>
+              <a:srgbClr val="D1D5DB"/>
+            </a:solidFill>
+            <a:prstDash val="solid"/>
+          </a:ln>
+        </p:spPr>
+      </p:sp>
+      <p:sp>
+        <p:nvSpPr>
+          <p:cNvPr id="16" name="Shape 13"/>
+          <p:cNvSpPr/>
+          <p:nvPr/>
+        </p:nvSpPr>
+        <p:spPr>
+          <a:xfrm>
+            <a:off x="4355011" y="5368330"/>
+            <a:ext cx="3479128" cy="0"/>
+          </a:xfrm>
+          <a:prstGeom prst="line">
+            <a:avLst/>
+          </a:prstGeom>
+          <a:noFill/>
+          <a:ln w="12698">
+            <a:solidFill>
+              <a:srgbClr val="D1D5DB"/>
+            </a:solidFill>
+            <a:prstDash val="solid"/>
+          </a:ln>
+        </p:spPr>
+      </p:sp>
+      <p:sp>
+        <p:nvSpPr>
+          <p:cNvPr id="17" name="Shape 14"/>
+          <p:cNvSpPr/>
+          <p:nvPr/>
+        </p:nvSpPr>
+        <p:spPr>
+          <a:xfrm>
+            <a:off x="4380405" y="1570434"/>
+            <a:ext cx="0" cy="3804245"/>
+          </a:xfrm>
+          <a:prstGeom prst="line">
+            <a:avLst/>
+          </a:prstGeom>
+          <a:noFill/>
+          <a:ln w="50794">
+            <a:solidFill>
+              <a:srgbClr val="0B5FFF"/>
+            </a:solidFill>
+            <a:prstDash val="solid"/>
+          </a:ln>
+        </p:spPr>
+      </p:sp>
+      <p:sp>
+        <p:nvSpPr>
+          <p:cNvPr id="18" name="Text 15"/>
+          <p:cNvSpPr/>
+          <p:nvPr/>
+        </p:nvSpPr>
+        <p:spPr>
+          <a:xfrm>
+            <a:off x="4659735" y="1820069"/>
+            <a:ext cx="2965927" cy="331986"/>
+          </a:xfrm>
+          <a:prstGeom prst="rect">
+            <a:avLst/>
+          </a:prstGeom>
+          <a:noFill/>
+          <a:ln/>
+        </p:spPr>
+        <p:txBody>
+          <a:bodyPr wrap="square" lIns="0" tIns="0" rIns="0" bIns="0" rtlCol="0" anchor="t"/>
+          <a:lstStyle/>
+          <a:p>
+            <a:pPr algn="l" indent="0" marL="0">
+              <a:lnSpc>
+                <a:spcPts val="2613"/>
+              </a:lnSpc>
+              <a:spcAft>
+                <a:spcPts val="1200"/>
+              </a:spcAft>
+              <a:buNone/>
+            </a:pPr>
+            <a:r>
+              <a:rPr lang="en-US" sz="1866" b="1" dirty="0">
+                <a:solidFill>
+                  <a:srgbClr val="6B7280"/>
+                </a:solidFill>
+                <a:latin typeface="Arimo" pitchFamily="34" charset="0"/>
+                <a:ea typeface="Arimo" pitchFamily="34" charset="-122"/>
+                <a:cs typeface="Arimo" pitchFamily="34" charset="-120"/>
+              </a:rPr>
+              <a:t>PHASE 02</a:t>
+            </a:r>
+            <a:endParaRPr lang="en-US" sz="1866" dirty="0"/>
+          </a:p>
+        </p:txBody>
+      </p:sp>
+      <p:sp>
+        <p:nvSpPr>
+          <p:cNvPr id="19" name="Text 16"/>
+          <p:cNvSpPr/>
+          <p:nvPr/>
+        </p:nvSpPr>
+        <p:spPr>
+          <a:xfrm>
+            <a:off x="4659735" y="2304455"/>
+            <a:ext cx="2965927" cy="330200"/>
+          </a:xfrm>
+          <a:prstGeom prst="rect">
+            <a:avLst/>
+          </a:prstGeom>
+          <a:noFill/>
+          <a:ln/>
+        </p:spPr>
+        <p:txBody>
+          <a:bodyPr wrap="square" lIns="0" tIns="0" rIns="0" bIns="0" rtlCol="0" anchor="t"/>
+          <a:lstStyle/>
+          <a:p>
+            <a:pPr algn="l" indent="0" marL="0">
+              <a:lnSpc>
+                <a:spcPts val="2600"/>
+              </a:lnSpc>
+              <a:spcAft>
+                <a:spcPts val="1067"/>
+              </a:spcAft>
+              <a:buNone/>
+            </a:pPr>
+            <a:r>
+              <a:rPr lang="en-US" sz="2000" b="1" dirty="0">
+                <a:solidFill>
+                  <a:srgbClr val="1A1A1A"/>
+                </a:solidFill>
+                <a:latin typeface="Arimo" pitchFamily="34" charset="0"/>
+                <a:ea typeface="Arimo" pitchFamily="34" charset="-122"/>
+                <a:cs typeface="Arimo" pitchFamily="34" charset="-120"/>
+              </a:rPr>
+              <a:t>OBSERVABLE</a:t>
+            </a:r>
+            <a:endParaRPr lang="en-US" sz="2000" dirty="0"/>
+          </a:p>
+        </p:txBody>
+      </p:sp>
+      <p:sp>
+        <p:nvSpPr>
+          <p:cNvPr id="20" name="Text 17"/>
+          <p:cNvSpPr/>
+          <p:nvPr/>
+        </p:nvSpPr>
+        <p:spPr>
+          <a:xfrm>
+            <a:off x="4659735" y="2769989"/>
+            <a:ext cx="2965927" cy="663972"/>
+          </a:xfrm>
+          <a:prstGeom prst="rect">
+            <a:avLst/>
+          </a:prstGeom>
+          <a:noFill/>
+          <a:ln/>
+        </p:spPr>
+        <p:txBody>
+          <a:bodyPr wrap="square" lIns="0" tIns="0" rIns="0" bIns="0" rtlCol="0" anchor="t"/>
+          <a:lstStyle/>
+          <a:p>
+            <a:pPr algn="l" indent="0" marL="0">
+              <a:lnSpc>
+                <a:spcPts val="2613"/>
+              </a:lnSpc>
+              <a:spcAft>
+                <a:spcPts val="1600"/>
+              </a:spcAft>
+              <a:buNone/>
+            </a:pPr>
+            <a:r>
+              <a:rPr lang="en-US" sz="1866" dirty="0">
+                <a:solidFill>
+                  <a:srgbClr val="6B7280"/>
+                </a:solidFill>
+                <a:latin typeface="Arimo" pitchFamily="34" charset="0"/>
+                <a:ea typeface="Arimo" pitchFamily="34" charset="-122"/>
+                <a:cs typeface="Arimo" pitchFamily="34" charset="-120"/>
+              </a:rPr>
+              <a:t>Inputs, outputs and drift are visible without a request.</a:t>
+            </a:r>
+            <a:endParaRPr lang="en-US" sz="1866" dirty="0"/>
+          </a:p>
+        </p:txBody>
+      </p:sp>
+      <p:sp>
+        <p:nvSpPr>
+          <p:cNvPr id="21" name="Shape 18"/>
+          <p:cNvSpPr/>
+          <p:nvPr/>
+        </p:nvSpPr>
+        <p:spPr>
+          <a:xfrm>
+            <a:off x="4659735" y="3643908"/>
+            <a:ext cx="2907771" cy="0"/>
+          </a:xfrm>
+          <a:prstGeom prst="line">
+            <a:avLst/>
+          </a:prstGeom>
+          <a:noFill/>
+          <a:ln w="12698">
+            <a:solidFill>
+              <a:srgbClr val="D1D5DB"/>
+            </a:solidFill>
+            <a:prstDash val="solid"/>
+          </a:ln>
+        </p:spPr>
+      </p:sp>
+      <p:sp>
+        <p:nvSpPr>
+          <p:cNvPr id="22" name="Text 19"/>
+          <p:cNvSpPr/>
+          <p:nvPr/>
+        </p:nvSpPr>
+        <p:spPr>
+          <a:xfrm>
+            <a:off x="4659735" y="3819525"/>
+            <a:ext cx="2965927" cy="260747"/>
+          </a:xfrm>
+          <a:prstGeom prst="rect">
+            <a:avLst/>
+          </a:prstGeom>
+          <a:noFill/>
+          <a:ln/>
+        </p:spPr>
+        <p:txBody>
+          <a:bodyPr wrap="square" lIns="0" tIns="0" rIns="0" bIns="0" rtlCol="0" anchor="t"/>
+          <a:lstStyle/>
+          <a:p>
+            <a:pPr algn="l" indent="0" marL="0">
+              <a:lnSpc>
+                <a:spcPts val="2053"/>
+              </a:lnSpc>
+              <a:spcAft>
+                <a:spcPts val="667"/>
+              </a:spcAft>
+              <a:buNone/>
+            </a:pPr>
+            <a:r>
+              <a:rPr lang="en-US" sz="1466" b="1" dirty="0">
+                <a:solidFill>
+                  <a:srgbClr val="6B7280"/>
+                </a:solidFill>
+                <a:latin typeface="Arimo" pitchFamily="34" charset="0"/>
+                <a:ea typeface="Arimo" pitchFamily="34" charset="-122"/>
+                <a:cs typeface="Arimo" pitchFamily="34" charset="-120"/>
+              </a:rPr>
+              <a:t>EXIT</a:t>
+            </a:r>
+            <a:endParaRPr lang="en-US" sz="1466" dirty="0"/>
+          </a:p>
+        </p:txBody>
+      </p:sp>
+      <p:sp>
+        <p:nvSpPr>
+          <p:cNvPr id="23" name="Text 20"/>
+          <p:cNvSpPr/>
+          <p:nvPr/>
+        </p:nvSpPr>
+        <p:spPr>
+          <a:xfrm>
+            <a:off x="4659735" y="4164806"/>
+            <a:ext cx="2965927" cy="960239"/>
+          </a:xfrm>
+          <a:prstGeom prst="rect">
+            <a:avLst/>
+          </a:prstGeom>
+          <a:noFill/>
+          <a:ln/>
+        </p:spPr>
+        <p:txBody>
+          <a:bodyPr wrap="square" lIns="0" tIns="0" rIns="0" bIns="0" rtlCol="0" anchor="t"/>
+          <a:lstStyle/>
+          <a:p>
+            <a:pPr algn="l" indent="0" marL="0">
+              <a:lnSpc>
+                <a:spcPts val="2520"/>
+              </a:lnSpc>
+              <a:buNone/>
+            </a:pPr>
+            <a:r>
+              <a:rPr lang="en-US" sz="1866" dirty="0">
+                <a:solidFill>
+                  <a:srgbClr val="1A1A1A"/>
+                </a:solidFill>
+                <a:latin typeface="Arimo" pitchFamily="34" charset="0"/>
+                <a:ea typeface="Arimo" pitchFamily="34" charset="-122"/>
+                <a:cs typeface="Arimo" pitchFamily="34" charset="-120"/>
+              </a:rPr>
+              <a:t>On-call can answer “is this model healthy” without the ML team.</a:t>
+            </a:r>
+            <a:endParaRPr lang="en-US" sz="1866" dirty="0"/>
+          </a:p>
+        </p:txBody>
+      </p:sp>
+      <p:pic>
+        <p:nvPicPr>
+          <p:cNvPr id="24" name="Image 1" descr="preencoded.png">    </p:cNvPr>
+          <p:cNvPicPr>
+            <a:picLocks noChangeAspect="1"/>
+          </p:cNvPicPr>
+          <p:nvPr/>
+        </p:nvPicPr>
+        <p:blipFill>
+          <a:blip r:embed="rId3">
+            <a:extLst>
+              <a:ext uri="{96DAC541-7B7A-43D3-8B79-37D633B846F1}">
+                <asvg:svgBlip xmlns:asvg="http://schemas.microsoft.com/office/drawing/2016/SVG/main" r:embed="rId4"/>
+              </a:ext>
+            </a:extLst>
+          </a:blip>
+          <a:stretch>
+            <a:fillRect/>
+          </a:stretch>
+        </p:blipFill>
+        <p:spPr>
+          <a:xfrm>
+            <a:off x="7834139" y="3387923"/>
+            <a:ext cx="372374" cy="169267"/>
+          </a:xfrm>
+          <a:prstGeom prst="rect">
+            <a:avLst/>
+          </a:prstGeom>
+        </p:spPr>
+      </p:pic>
+      <p:sp>
+        <p:nvSpPr>
+          <p:cNvPr id="25" name="Text 21"/>
+          <p:cNvSpPr/>
+          <p:nvPr/>
+        </p:nvSpPr>
+        <p:spPr>
+          <a:xfrm>
+            <a:off x="8206513" y="1570434"/>
+            <a:ext cx="3441038" cy="3804245"/>
+          </a:xfrm>
+          <a:prstGeom prst="rect">
+            <a:avLst/>
+          </a:prstGeom>
+          <a:noFill/>
+          <a:ln w="12698">
+            <a:solidFill>
+              <a:srgbClr val="D1D5DB"/>
+            </a:solidFill>
+          </a:ln>
+        </p:spPr>
+        <p:txBody>
+          <a:bodyPr wrap="square" rtlCol="0" anchor="ctr"/>
+          <a:lstStyle/>
+          <a:p>
+            <a:pPr indent="0" marL="0">
+              <a:buNone/>
+            </a:pPr>
+            <a:endParaRPr lang="en-US" dirty="0"/>
+          </a:p>
+        </p:txBody>
+      </p:sp>
+      <p:sp>
+        <p:nvSpPr>
+          <p:cNvPr id="26" name="Text 22"/>
+          <p:cNvSpPr/>
+          <p:nvPr/>
+        </p:nvSpPr>
+        <p:spPr>
+          <a:xfrm>
+            <a:off x="8473147" y="1820069"/>
+            <a:ext cx="2965927" cy="331986"/>
+          </a:xfrm>
+          <a:prstGeom prst="rect">
+            <a:avLst/>
+          </a:prstGeom>
+          <a:noFill/>
+          <a:ln/>
+        </p:spPr>
+        <p:txBody>
+          <a:bodyPr wrap="square" lIns="0" tIns="0" rIns="0" bIns="0" rtlCol="0" anchor="t"/>
+          <a:lstStyle/>
+          <a:p>
+            <a:pPr algn="l" indent="0" marL="0">
+              <a:lnSpc>
+                <a:spcPts val="2613"/>
+              </a:lnSpc>
+              <a:spcAft>
+                <a:spcPts val="1200"/>
+              </a:spcAft>
+              <a:buNone/>
+            </a:pPr>
+            <a:r>
+              <a:rPr lang="en-US" sz="1866" b="1" dirty="0">
+                <a:solidFill>
+                  <a:srgbClr val="6B7280"/>
+                </a:solidFill>
+                <a:latin typeface="Arimo" pitchFamily="34" charset="0"/>
+                <a:ea typeface="Arimo" pitchFamily="34" charset="-122"/>
+                <a:cs typeface="Arimo" pitchFamily="34" charset="-120"/>
+              </a:rPr>
+              <a:t>PHASE 03</a:t>
+            </a:r>
+            <a:endParaRPr lang="en-US" sz="1866" dirty="0"/>
+          </a:p>
+        </p:txBody>
+      </p:sp>
+      <p:sp>
+        <p:nvSpPr>
+          <p:cNvPr id="27" name="Text 23"/>
+          <p:cNvSpPr/>
+          <p:nvPr/>
+        </p:nvSpPr>
+        <p:spPr>
+          <a:xfrm>
+            <a:off x="8473147" y="2304455"/>
+            <a:ext cx="2965927" cy="330200"/>
+          </a:xfrm>
+          <a:prstGeom prst="rect">
+            <a:avLst/>
+          </a:prstGeom>
+          <a:noFill/>
+          <a:ln/>
+        </p:spPr>
+        <p:txBody>
+          <a:bodyPr wrap="square" lIns="0" tIns="0" rIns="0" bIns="0" rtlCol="0" anchor="t"/>
+          <a:lstStyle/>
+          <a:p>
+            <a:pPr algn="l" indent="0" marL="0">
+              <a:lnSpc>
+                <a:spcPts val="2600"/>
+              </a:lnSpc>
+              <a:spcAft>
+                <a:spcPts val="1067"/>
+              </a:spcAft>
+              <a:buNone/>
+            </a:pPr>
+            <a:r>
+              <a:rPr lang="en-US" sz="2000" b="1" dirty="0">
+                <a:solidFill>
+                  <a:srgbClr val="1A1A1A"/>
+                </a:solidFill>
+                <a:latin typeface="Arimo" pitchFamily="34" charset="0"/>
+                <a:ea typeface="Arimo" pitchFamily="34" charset="-122"/>
+                <a:cs typeface="Arimo" pitchFamily="34" charset="-120"/>
+              </a:rPr>
+              <a:t>SELF-SERVE</a:t>
+            </a:r>
+            <a:endParaRPr lang="en-US" sz="2000" dirty="0"/>
+          </a:p>
+        </p:txBody>
+      </p:sp>
+      <p:sp>
+        <p:nvSpPr>
+          <p:cNvPr id="28" name="Text 24"/>
+          <p:cNvSpPr/>
+          <p:nvPr/>
+        </p:nvSpPr>
+        <p:spPr>
+          <a:xfrm>
+            <a:off x="8473147" y="2769989"/>
+            <a:ext cx="2965927" cy="995958"/>
+          </a:xfrm>
+          <a:prstGeom prst="rect">
+            <a:avLst/>
+          </a:prstGeom>
+          <a:noFill/>
+          <a:ln/>
+        </p:spPr>
+        <p:txBody>
+          <a:bodyPr wrap="square" lIns="0" tIns="0" rIns="0" bIns="0" rtlCol="0" anchor="t"/>
+          <a:lstStyle/>
+          <a:p>
+            <a:pPr algn="l" indent="0" marL="0">
+              <a:lnSpc>
+                <a:spcPts val="2613"/>
+              </a:lnSpc>
+              <a:spcAft>
+                <a:spcPts val="1600"/>
+              </a:spcAft>
+              <a:buNone/>
+            </a:pPr>
+            <a:r>
+              <a:rPr lang="en-US" sz="1866" dirty="0">
+                <a:solidFill>
+                  <a:srgbClr val="6B7280"/>
+                </a:solidFill>
+                <a:latin typeface="Arimo" pitchFamily="34" charset="0"/>
+                <a:ea typeface="Arimo" pitchFamily="34" charset="-122"/>
+                <a:cs typeface="Arimo" pitchFamily="34" charset="-120"/>
+              </a:rPr>
+              <a:t>A new team ships a model without the platform team in the loop.</a:t>
+            </a:r>
+            <a:endParaRPr lang="en-US" sz="1866" dirty="0"/>
+          </a:p>
+        </p:txBody>
+      </p:sp>
+      <p:sp>
+        <p:nvSpPr>
+          <p:cNvPr id="29" name="Shape 25"/>
+          <p:cNvSpPr/>
+          <p:nvPr/>
+        </p:nvSpPr>
+        <p:spPr>
+          <a:xfrm>
+            <a:off x="8473147" y="3975497"/>
+            <a:ext cx="2907771" cy="0"/>
+          </a:xfrm>
+          <a:prstGeom prst="line">
+            <a:avLst/>
+          </a:prstGeom>
+          <a:noFill/>
+          <a:ln w="12698">
+            <a:solidFill>
+              <a:srgbClr val="D1D5DB"/>
+            </a:solidFill>
+            <a:prstDash val="solid"/>
+          </a:ln>
+        </p:spPr>
+      </p:sp>
+      <p:sp>
+        <p:nvSpPr>
+          <p:cNvPr id="30" name="Text 26"/>
+          <p:cNvSpPr/>
+          <p:nvPr/>
+        </p:nvSpPr>
+        <p:spPr>
+          <a:xfrm>
+            <a:off x="8473147" y="4151114"/>
+            <a:ext cx="2965927" cy="260747"/>
+          </a:xfrm>
+          <a:prstGeom prst="rect">
+            <a:avLst/>
+          </a:prstGeom>
+          <a:noFill/>
+          <a:ln/>
+        </p:spPr>
+        <p:txBody>
+          <a:bodyPr wrap="square" lIns="0" tIns="0" rIns="0" bIns="0" rtlCol="0" anchor="t"/>
+          <a:lstStyle/>
+          <a:p>
+            <a:pPr algn="l" indent="0" marL="0">
+              <a:lnSpc>
+                <a:spcPts val="2053"/>
+              </a:lnSpc>
+              <a:spcAft>
+                <a:spcPts val="667"/>
+              </a:spcAft>
+              <a:buNone/>
+            </a:pPr>
+            <a:r>
+              <a:rPr lang="en-US" sz="1466" b="1" dirty="0">
+                <a:solidFill>
+                  <a:srgbClr val="6B7280"/>
+                </a:solidFill>
+                <a:latin typeface="Arimo" pitchFamily="34" charset="0"/>
+                <a:ea typeface="Arimo" pitchFamily="34" charset="-122"/>
+                <a:cs typeface="Arimo" pitchFamily="34" charset="-120"/>
+              </a:rPr>
+              <a:t>EXIT</a:t>
+            </a:r>
+            <a:endParaRPr lang="en-US" sz="1466" dirty="0"/>
+          </a:p>
+        </p:txBody>
+      </p:sp>
+      <p:sp>
+        <p:nvSpPr>
+          <p:cNvPr id="31" name="Text 27"/>
+          <p:cNvSpPr/>
+          <p:nvPr/>
+        </p:nvSpPr>
+        <p:spPr>
+          <a:xfrm>
+            <a:off x="8473147" y="4496395"/>
+            <a:ext cx="2965927" cy="640159"/>
+          </a:xfrm>
+          <a:prstGeom prst="rect">
+            <a:avLst/>
+          </a:prstGeom>
+          <a:noFill/>
+          <a:ln/>
+        </p:spPr>
+        <p:txBody>
+          <a:bodyPr wrap="square" lIns="0" tIns="0" rIns="0" bIns="0" rtlCol="0" anchor="t"/>
+          <a:lstStyle/>
+          <a:p>
+            <a:pPr algn="l" indent="0" marL="0">
+              <a:lnSpc>
+                <a:spcPts val="2520"/>
+              </a:lnSpc>
+              <a:buNone/>
+            </a:pPr>
+            <a:r>
+              <a:rPr lang="en-US" sz="1866" dirty="0">
+                <a:solidFill>
+                  <a:srgbClr val="1A1A1A"/>
+                </a:solidFill>
+                <a:latin typeface="Arimo" pitchFamily="34" charset="0"/>
+                <a:ea typeface="Arimo" pitchFamily="34" charset="-122"/>
+                <a:cs typeface="Arimo" pitchFamily="34" charset="-120"/>
+              </a:rPr>
+              <a:t>A team onboards using the documentation alone.</a:t>
+            </a:r>
+            <a:endParaRPr lang="en-US" sz="1866" dirty="0"/>
+          </a:p>
+        </p:txBody>
+      </p:sp>
+      <p:sp>
+        <p:nvSpPr>
+          <p:cNvPr id="32" name="Text 28"/>
+          <p:cNvSpPr/>
+          <p:nvPr/>
+        </p:nvSpPr>
+        <p:spPr>
+          <a:xfrm>
+            <a:off x="541599" y="5577880"/>
+            <a:ext cx="11327869" cy="331986"/>
+          </a:xfrm>
+          <a:prstGeom prst="rect">
+            <a:avLst/>
+          </a:prstGeom>
+          <a:noFill/>
+          <a:ln/>
+        </p:spPr>
+        <p:txBody>
+          <a:bodyPr wrap="square" lIns="0" tIns="0" rIns="0" bIns="0" rtlCol="0" anchor="t"/>
+          <a:lstStyle/>
+          <a:p>
+            <a:pPr algn="l" indent="0" marL="0">
+              <a:lnSpc>
+                <a:spcPts val="2613"/>
+              </a:lnSpc>
+              <a:spcBef>
+                <a:spcPts val="1600"/>
+              </a:spcBef>
+              <a:buNone/>
+            </a:pPr>
+            <a:r>
+              <a:rPr lang="en-US" sz="1866" dirty="0">
+                <a:solidFill>
+                  <a:srgbClr val="6B7280"/>
+                </a:solidFill>
+                <a:latin typeface="Arimo" pitchFamily="34" charset="0"/>
+                <a:ea typeface="Arimo" pitchFamily="34" charset="-122"/>
+                <a:cs typeface="Arimo" pitchFamily="34" charset="-120"/>
+              </a:rPr>
+              <a:t>Phases are gates, not calendar quarters — no dates appear here because none can be sourced.</a:t>
+            </a:r>
+            <a:endParaRPr lang="en-US" sz="1866" dirty="0"/>
+          </a:p>
+        </p:txBody>
+      </p:sp>
+      <p:sp>
+        <p:nvSpPr>
+          <p:cNvPr id="33" name="Text 29"/>
+          <p:cNvSpPr/>
+          <p:nvPr/>
+        </p:nvSpPr>
+        <p:spPr>
+          <a:xfrm>
+            <a:off x="319484" y="6113066"/>
+            <a:ext cx="11327869" cy="236934"/>
+          </a:xfrm>
+          <a:prstGeom prst="rect">
+            <a:avLst/>
+          </a:prstGeom>
+          <a:noFill/>
+          <a:ln/>
+        </p:spPr>
+        <p:txBody>
+          <a:bodyPr wrap="square" lIns="0" tIns="0" rIns="0" bIns="0" rtlCol="0" anchor="t"/>
+          <a:lstStyle/>
+          <a:p>
+            <a:pPr algn="r" indent="0" marL="0">
+              <a:lnSpc>
+                <a:spcPts val="1866"/>
+              </a:lnSpc>
+              <a:buNone/>
+            </a:pPr>
+            <a:r>
+              <a:rPr lang="en-US" sz="1333" dirty="0">
+                <a:solidFill>
+                  <a:srgbClr val="6B7280"/>
+                </a:solidFill>
+                <a:latin typeface="Arimo" pitchFamily="34" charset="0"/>
+                <a:ea typeface="Arimo" pitchFamily="34" charset="-122"/>
+                <a:cs typeface="Arimo" pitchFamily="34" charset="-120"/>
+              </a:rPr>
+              <a:t>MLOPS PLATFORM ROADMAP · SHEET 04/07 · NO EXTERNAL DATA CITED</a:t>
+            </a:r>
+            <a:endParaRPr lang="en-US" sz="1333" dirty="0"/>
+          </a:p>
+        </p:txBody>
+      </p:sp>
     </p:spTree>
   </p:cSld>
   <p:clrMapOvr>
@@ -1584,6 +5239,13 @@
 <file path=ppt/slides/slide5.xml><?xml version="1.0" encoding="utf-8"?>
 <p:sld xmlns:a="http://schemas.openxmlformats.org/drawingml/2006/main" xmlns:r="http://schemas.openxmlformats.org/officeDocument/2006/relationships" xmlns:p="http://schemas.openxmlformats.org/presentationml/2006/main">
   <p:cSld name="Slide 5">
+    <p:bg>
+      <p:bgPr>
+        <a:solidFill>
+          <a:srgbClr val="FFFFFF"/>
+        </a:solidFill>
+      </p:bgPr>
+    </p:bg>
     <p:spTree>
       <p:nvGrpSpPr>
         <p:cNvPr id="1" name=""/>
@@ -1598,30 +5260,1247 @@
           <a:chExt cx="0" cy="0"/>
         </a:xfrm>
       </p:grpSpPr>
-      <p:pic>
-        <p:nvPicPr>
-          <p:cNvPr id="2" name="Image 0" descr="/tmp/slide-1787840566458-r93t5i9p9jd.png">    </p:cNvPr>
-          <p:cNvPicPr>
-            <a:picLocks noChangeAspect="1"/>
-          </p:cNvPicPr>
-          <p:nvPr/>
-        </p:nvPicPr>
-        <p:blipFill>
-          <a:blip r:embed="rId1"/>
-          <a:stretch>
-            <a:fillRect/>
-          </a:stretch>
-        </p:blipFill>
-        <p:spPr>
-          <a:xfrm>
-            <a:off x="0" y="0"/>
-            <a:ext cx="12188952" cy="6858000"/>
-          </a:xfrm>
-          <a:prstGeom prst="rect">
-            <a:avLst/>
-          </a:prstGeom>
-        </p:spPr>
-      </p:pic>
+      <p:sp>
+        <p:nvSpPr>
+          <p:cNvPr id="2" name="Text 0"/>
+          <p:cNvSpPr/>
+          <p:nvPr/>
+        </p:nvSpPr>
+        <p:spPr>
+          <a:xfrm>
+            <a:off x="541599" y="484386"/>
+            <a:ext cx="11327869" cy="260747"/>
+          </a:xfrm>
+          <a:prstGeom prst="rect">
+            <a:avLst/>
+          </a:prstGeom>
+          <a:noFill/>
+          <a:ln/>
+        </p:spPr>
+        <p:txBody>
+          <a:bodyPr wrap="square" lIns="0" tIns="0" rIns="0" bIns="0" rtlCol="0" anchor="t"/>
+          <a:lstStyle/>
+          <a:p>
+            <a:pPr algn="l" indent="0" marL="0">
+              <a:lnSpc>
+                <a:spcPts val="2053"/>
+              </a:lnSpc>
+              <a:spcAft>
+                <a:spcPts val="933"/>
+              </a:spcAft>
+              <a:buNone/>
+            </a:pPr>
+            <a:r>
+              <a:rPr lang="en-US" sz="1466" b="1" dirty="0">
+                <a:solidFill>
+                  <a:srgbClr val="6B7280"/>
+                </a:solidFill>
+                <a:latin typeface="Arimo" pitchFamily="34" charset="0"/>
+                <a:ea typeface="Arimo" pitchFamily="34" charset="-122"/>
+                <a:cs typeface="Arimo" pitchFamily="34" charset="-120"/>
+              </a:rPr>
+              <a:t>POSTURE</a:t>
+            </a:r>
+            <a:endParaRPr lang="en-US" sz="1466" dirty="0"/>
+          </a:p>
+        </p:txBody>
+      </p:sp>
+      <p:sp>
+        <p:nvSpPr>
+          <p:cNvPr id="3" name="Text 1"/>
+          <p:cNvSpPr/>
+          <p:nvPr/>
+        </p:nvSpPr>
+        <p:spPr>
+          <a:xfrm>
+            <a:off x="541599" y="863600"/>
+            <a:ext cx="11327869" cy="423267"/>
+          </a:xfrm>
+          <a:prstGeom prst="rect">
+            <a:avLst/>
+          </a:prstGeom>
+          <a:noFill/>
+          <a:ln/>
+        </p:spPr>
+        <p:txBody>
+          <a:bodyPr wrap="square" lIns="0" tIns="0" rIns="0" bIns="0" rtlCol="0" anchor="t"/>
+          <a:lstStyle/>
+          <a:p>
+            <a:pPr algn="l" indent="0" marL="0">
+              <a:lnSpc>
+                <a:spcPts val="3333"/>
+              </a:lnSpc>
+              <a:buNone/>
+            </a:pPr>
+            <a:r>
+              <a:rPr lang="en-US" sz="2666" b="1" dirty="0">
+                <a:solidFill>
+                  <a:srgbClr val="1A1A1A"/>
+                </a:solidFill>
+                <a:latin typeface="Arimo" pitchFamily="34" charset="0"/>
+                <a:ea typeface="Arimo" pitchFamily="34" charset="-122"/>
+                <a:cs typeface="Arimo" pitchFamily="34" charset="-120"/>
+              </a:rPr>
+              <a:t>Buy the undifferentiated layers; build only your differentiator</a:t>
+            </a:r>
+            <a:endParaRPr lang="en-US" sz="2666" dirty="0"/>
+          </a:p>
+        </p:txBody>
+      </p:sp>
+      <p:sp>
+        <p:nvSpPr>
+          <p:cNvPr id="4" name="Text 2"/>
+          <p:cNvSpPr/>
+          <p:nvPr/>
+        </p:nvSpPr>
+        <p:spPr>
+          <a:xfrm>
+            <a:off x="541599" y="1286867"/>
+            <a:ext cx="11105754" cy="12700"/>
+          </a:xfrm>
+          <a:prstGeom prst="rect">
+            <a:avLst/>
+          </a:prstGeom>
+          <a:solidFill>
+            <a:srgbClr val="D1D5DB"/>
+          </a:solidFill>
+          <a:ln/>
+        </p:spPr>
+        <p:txBody>
+          <a:bodyPr wrap="square" rtlCol="0" anchor="ctr"/>
+          <a:lstStyle/>
+          <a:p>
+            <a:pPr indent="0" marL="0">
+              <a:buNone/>
+            </a:pPr>
+            <a:endParaRPr lang="en-US" dirty="0"/>
+          </a:p>
+        </p:txBody>
+      </p:sp>
+      <p:sp>
+        <p:nvSpPr>
+          <p:cNvPr id="5" name="Text 3"/>
+          <p:cNvSpPr/>
+          <p:nvPr/>
+        </p:nvSpPr>
+        <p:spPr>
+          <a:xfrm>
+            <a:off x="541599" y="1570434"/>
+            <a:ext cx="11105754" cy="4339431"/>
+          </a:xfrm>
+          <a:prstGeom prst="rect">
+            <a:avLst/>
+          </a:prstGeom>
+          <a:noFill/>
+          <a:ln w="12698">
+            <a:solidFill>
+              <a:srgbClr val="D1D5DB"/>
+            </a:solidFill>
+          </a:ln>
+        </p:spPr>
+        <p:txBody>
+          <a:bodyPr wrap="square" rtlCol="0" anchor="ctr"/>
+          <a:lstStyle/>
+          <a:p>
+            <a:pPr indent="0" marL="0">
+              <a:buNone/>
+            </a:pPr>
+            <a:endParaRPr lang="en-US" dirty="0"/>
+          </a:p>
+        </p:txBody>
+      </p:sp>
+      <p:sp>
+        <p:nvSpPr>
+          <p:cNvPr id="6" name="Text 4"/>
+          <p:cNvSpPr/>
+          <p:nvPr/>
+        </p:nvSpPr>
+        <p:spPr>
+          <a:xfrm>
+            <a:off x="554296" y="1583134"/>
+            <a:ext cx="11080360" cy="578247"/>
+          </a:xfrm>
+          <a:prstGeom prst="rect">
+            <a:avLst/>
+          </a:prstGeom>
+          <a:solidFill>
+            <a:srgbClr val="F4F5F7"/>
+          </a:solidFill>
+          <a:ln/>
+        </p:spPr>
+        <p:txBody>
+          <a:bodyPr wrap="square" rtlCol="0" anchor="ctr"/>
+          <a:lstStyle/>
+          <a:p>
+            <a:pPr indent="0" marL="0">
+              <a:buNone/>
+            </a:pPr>
+            <a:endParaRPr lang="en-US" dirty="0"/>
+          </a:p>
+        </p:txBody>
+      </p:sp>
+      <p:sp>
+        <p:nvSpPr>
+          <p:cNvPr id="7" name="Shape 5"/>
+          <p:cNvSpPr/>
+          <p:nvPr/>
+        </p:nvSpPr>
+        <p:spPr>
+          <a:xfrm>
+            <a:off x="554296" y="2155031"/>
+            <a:ext cx="11080360" cy="0"/>
+          </a:xfrm>
+          <a:prstGeom prst="line">
+            <a:avLst/>
+          </a:prstGeom>
+          <a:noFill/>
+          <a:ln w="12698">
+            <a:solidFill>
+              <a:srgbClr val="D1D5DB"/>
+            </a:solidFill>
+            <a:prstDash val="solid"/>
+          </a:ln>
+        </p:spPr>
+      </p:sp>
+      <p:sp>
+        <p:nvSpPr>
+          <p:cNvPr id="8" name="Text 6"/>
+          <p:cNvSpPr/>
+          <p:nvPr/>
+        </p:nvSpPr>
+        <p:spPr>
+          <a:xfrm>
+            <a:off x="791171" y="1735534"/>
+            <a:ext cx="2907244" cy="260747"/>
+          </a:xfrm>
+          <a:prstGeom prst="rect">
+            <a:avLst/>
+          </a:prstGeom>
+          <a:noFill/>
+          <a:ln/>
+        </p:spPr>
+        <p:txBody>
+          <a:bodyPr wrap="square" lIns="0" tIns="0" rIns="0" bIns="0" rtlCol="0" anchor="t"/>
+          <a:lstStyle/>
+          <a:p>
+            <a:pPr algn="l" indent="0" marL="0">
+              <a:lnSpc>
+                <a:spcPts val="2053"/>
+              </a:lnSpc>
+              <a:buNone/>
+            </a:pPr>
+            <a:r>
+              <a:rPr lang="en-US" sz="1466" b="1" dirty="0">
+                <a:solidFill>
+                  <a:srgbClr val="6B7280"/>
+                </a:solidFill>
+                <a:latin typeface="Arimo" pitchFamily="34" charset="0"/>
+                <a:ea typeface="Arimo" pitchFamily="34" charset="-122"/>
+                <a:cs typeface="Arimo" pitchFamily="34" charset="-120"/>
+              </a:rPr>
+              <a:t>CAPABILITY</a:t>
+            </a:r>
+            <a:endParaRPr lang="en-US" sz="1466" dirty="0"/>
+          </a:p>
+        </p:txBody>
+      </p:sp>
+      <p:sp>
+        <p:nvSpPr>
+          <p:cNvPr id="9" name="Text 7"/>
+          <p:cNvSpPr/>
+          <p:nvPr/>
+        </p:nvSpPr>
+        <p:spPr>
+          <a:xfrm>
+            <a:off x="4115160" y="1735534"/>
+            <a:ext cx="3133275" cy="260747"/>
+          </a:xfrm>
+          <a:prstGeom prst="rect">
+            <a:avLst/>
+          </a:prstGeom>
+          <a:noFill/>
+          <a:ln/>
+        </p:spPr>
+        <p:txBody>
+          <a:bodyPr wrap="square" lIns="0" tIns="0" rIns="0" bIns="0" rtlCol="0" anchor="t"/>
+          <a:lstStyle/>
+          <a:p>
+            <a:pPr algn="l" indent="0" marL="0">
+              <a:lnSpc>
+                <a:spcPts val="2053"/>
+              </a:lnSpc>
+              <a:buNone/>
+            </a:pPr>
+            <a:r>
+              <a:rPr lang="en-US" sz="1466" b="1" dirty="0">
+                <a:solidFill>
+                  <a:srgbClr val="6B7280"/>
+                </a:solidFill>
+                <a:latin typeface="Arimo" pitchFamily="34" charset="0"/>
+                <a:ea typeface="Arimo" pitchFamily="34" charset="-122"/>
+                <a:cs typeface="Arimo" pitchFamily="34" charset="-120"/>
+              </a:rPr>
+              <a:t>DEFAULT POSTURE</a:t>
+            </a:r>
+            <a:endParaRPr lang="en-US" sz="1466" dirty="0"/>
+          </a:p>
+        </p:txBody>
+      </p:sp>
+      <p:sp>
+        <p:nvSpPr>
+          <p:cNvPr id="10" name="Text 8"/>
+          <p:cNvSpPr/>
+          <p:nvPr/>
+        </p:nvSpPr>
+        <p:spPr>
+          <a:xfrm>
+            <a:off x="7660748" y="1735534"/>
+            <a:ext cx="3811369" cy="260747"/>
+          </a:xfrm>
+          <a:prstGeom prst="rect">
+            <a:avLst/>
+          </a:prstGeom>
+          <a:noFill/>
+          <a:ln/>
+        </p:spPr>
+        <p:txBody>
+          <a:bodyPr wrap="square" lIns="0" tIns="0" rIns="0" bIns="0" rtlCol="0" anchor="t"/>
+          <a:lstStyle/>
+          <a:p>
+            <a:pPr algn="l" indent="0" marL="0">
+              <a:lnSpc>
+                <a:spcPts val="2053"/>
+              </a:lnSpc>
+              <a:buNone/>
+            </a:pPr>
+            <a:r>
+              <a:rPr lang="en-US" sz="1466" b="1" dirty="0">
+                <a:solidFill>
+                  <a:srgbClr val="6B7280"/>
+                </a:solidFill>
+                <a:latin typeface="Arimo" pitchFamily="34" charset="0"/>
+                <a:ea typeface="Arimo" pitchFamily="34" charset="-122"/>
+                <a:cs typeface="Arimo" pitchFamily="34" charset="-120"/>
+              </a:rPr>
+              <a:t>BUILD ONLY IF</a:t>
+            </a:r>
+            <a:endParaRPr lang="en-US" sz="1466" dirty="0"/>
+          </a:p>
+        </p:txBody>
+      </p:sp>
+      <p:sp>
+        <p:nvSpPr>
+          <p:cNvPr id="11" name="Text 9"/>
+          <p:cNvSpPr/>
+          <p:nvPr/>
+        </p:nvSpPr>
+        <p:spPr>
+          <a:xfrm>
+            <a:off x="791171" y="2288381"/>
+            <a:ext cx="2907244" cy="331986"/>
+          </a:xfrm>
+          <a:prstGeom prst="rect">
+            <a:avLst/>
+          </a:prstGeom>
+          <a:noFill/>
+          <a:ln/>
+        </p:spPr>
+        <p:txBody>
+          <a:bodyPr wrap="square" lIns="0" tIns="0" rIns="0" bIns="0" rtlCol="0" anchor="t"/>
+          <a:lstStyle/>
+          <a:p>
+            <a:pPr algn="l" indent="0" marL="0">
+              <a:lnSpc>
+                <a:spcPts val="2613"/>
+              </a:lnSpc>
+              <a:buNone/>
+            </a:pPr>
+            <a:r>
+              <a:rPr lang="en-US" sz="1866" b="1" dirty="0">
+                <a:solidFill>
+                  <a:srgbClr val="1A1A1A"/>
+                </a:solidFill>
+                <a:latin typeface="Arimo" pitchFamily="34" charset="0"/>
+                <a:ea typeface="Arimo" pitchFamily="34" charset="-122"/>
+                <a:cs typeface="Arimo" pitchFamily="34" charset="-120"/>
+              </a:rPr>
+              <a:t>Data &amp; features</a:t>
+            </a:r>
+            <a:endParaRPr lang="en-US" sz="1866" dirty="0"/>
+          </a:p>
+        </p:txBody>
+      </p:sp>
+      <p:sp>
+        <p:nvSpPr>
+          <p:cNvPr id="12" name="Text 10"/>
+          <p:cNvSpPr/>
+          <p:nvPr/>
+        </p:nvSpPr>
+        <p:spPr>
+          <a:xfrm>
+            <a:off x="4115160" y="2288381"/>
+            <a:ext cx="3133275" cy="331986"/>
+          </a:xfrm>
+          <a:prstGeom prst="rect">
+            <a:avLst/>
+          </a:prstGeom>
+          <a:noFill/>
+          <a:ln/>
+        </p:spPr>
+        <p:txBody>
+          <a:bodyPr wrap="square" lIns="0" tIns="0" rIns="0" bIns="0" rtlCol="0" anchor="t"/>
+          <a:lstStyle/>
+          <a:p>
+            <a:pPr algn="l" indent="0" marL="0">
+              <a:lnSpc>
+                <a:spcPts val="2613"/>
+              </a:lnSpc>
+              <a:buNone/>
+            </a:pPr>
+            <a:r>
+              <a:rPr lang="en-US" sz="1866" dirty="0">
+                <a:solidFill>
+                  <a:srgbClr val="1A1A1A"/>
+                </a:solidFill>
+                <a:latin typeface="Arimo" pitchFamily="34" charset="0"/>
+                <a:ea typeface="Arimo" pitchFamily="34" charset="-122"/>
+                <a:cs typeface="Arimo" pitchFamily="34" charset="-120"/>
+              </a:rPr>
+              <a:t>Buy or adopt</a:t>
+            </a:r>
+            <a:endParaRPr lang="en-US" sz="1866" dirty="0"/>
+          </a:p>
+        </p:txBody>
+      </p:sp>
+      <p:sp>
+        <p:nvSpPr>
+          <p:cNvPr id="13" name="Text 11"/>
+          <p:cNvSpPr/>
+          <p:nvPr/>
+        </p:nvSpPr>
+        <p:spPr>
+          <a:xfrm>
+            <a:off x="7660748" y="2288381"/>
+            <a:ext cx="3811369" cy="331986"/>
+          </a:xfrm>
+          <a:prstGeom prst="rect">
+            <a:avLst/>
+          </a:prstGeom>
+          <a:noFill/>
+          <a:ln/>
+        </p:spPr>
+        <p:txBody>
+          <a:bodyPr wrap="square" lIns="0" tIns="0" rIns="0" bIns="0" rtlCol="0" anchor="t"/>
+          <a:lstStyle/>
+          <a:p>
+            <a:pPr algn="l" indent="0" marL="0">
+              <a:lnSpc>
+                <a:spcPts val="2613"/>
+              </a:lnSpc>
+              <a:buNone/>
+            </a:pPr>
+            <a:r>
+              <a:rPr lang="en-US" sz="1866" dirty="0">
+                <a:solidFill>
+                  <a:srgbClr val="6B7280"/>
+                </a:solidFill>
+                <a:latin typeface="Arimo" pitchFamily="34" charset="0"/>
+                <a:ea typeface="Arimo" pitchFamily="34" charset="-122"/>
+                <a:cs typeface="Arimo" pitchFamily="34" charset="-120"/>
+              </a:rPr>
+              <a:t>Your features are the product</a:t>
+            </a:r>
+            <a:endParaRPr lang="en-US" sz="1866" dirty="0"/>
+          </a:p>
+        </p:txBody>
+      </p:sp>
+      <p:sp>
+        <p:nvSpPr>
+          <p:cNvPr id="14" name="Shape 12"/>
+          <p:cNvSpPr/>
+          <p:nvPr/>
+        </p:nvSpPr>
+        <p:spPr>
+          <a:xfrm>
+            <a:off x="554296" y="2753916"/>
+            <a:ext cx="11080360" cy="0"/>
+          </a:xfrm>
+          <a:prstGeom prst="line">
+            <a:avLst/>
+          </a:prstGeom>
+          <a:noFill/>
+          <a:ln w="12698">
+            <a:solidFill>
+              <a:srgbClr val="D1D5DB"/>
+            </a:solidFill>
+            <a:prstDash val="solid"/>
+          </a:ln>
+        </p:spPr>
+      </p:sp>
+      <p:sp>
+        <p:nvSpPr>
+          <p:cNvPr id="15" name="Text 13"/>
+          <p:cNvSpPr/>
+          <p:nvPr/>
+        </p:nvSpPr>
+        <p:spPr>
+          <a:xfrm>
+            <a:off x="791171" y="2887266"/>
+            <a:ext cx="2907244" cy="331986"/>
+          </a:xfrm>
+          <a:prstGeom prst="rect">
+            <a:avLst/>
+          </a:prstGeom>
+          <a:noFill/>
+          <a:ln/>
+        </p:spPr>
+        <p:txBody>
+          <a:bodyPr wrap="square" lIns="0" tIns="0" rIns="0" bIns="0" rtlCol="0" anchor="t"/>
+          <a:lstStyle/>
+          <a:p>
+            <a:pPr algn="l" indent="0" marL="0">
+              <a:lnSpc>
+                <a:spcPts val="2613"/>
+              </a:lnSpc>
+              <a:buNone/>
+            </a:pPr>
+            <a:r>
+              <a:rPr lang="en-US" sz="1866" b="1" dirty="0">
+                <a:solidFill>
+                  <a:srgbClr val="1A1A1A"/>
+                </a:solidFill>
+                <a:latin typeface="Arimo" pitchFamily="34" charset="0"/>
+                <a:ea typeface="Arimo" pitchFamily="34" charset="-122"/>
+                <a:cs typeface="Arimo" pitchFamily="34" charset="-120"/>
+              </a:rPr>
+              <a:t>Training</a:t>
+            </a:r>
+            <a:endParaRPr lang="en-US" sz="1866" dirty="0"/>
+          </a:p>
+        </p:txBody>
+      </p:sp>
+      <p:sp>
+        <p:nvSpPr>
+          <p:cNvPr id="16" name="Text 14"/>
+          <p:cNvSpPr/>
+          <p:nvPr/>
+        </p:nvSpPr>
+        <p:spPr>
+          <a:xfrm>
+            <a:off x="4115160" y="2887266"/>
+            <a:ext cx="3133275" cy="331986"/>
+          </a:xfrm>
+          <a:prstGeom prst="rect">
+            <a:avLst/>
+          </a:prstGeom>
+          <a:noFill/>
+          <a:ln/>
+        </p:spPr>
+        <p:txBody>
+          <a:bodyPr wrap="square" lIns="0" tIns="0" rIns="0" bIns="0" rtlCol="0" anchor="t"/>
+          <a:lstStyle/>
+          <a:p>
+            <a:pPr algn="l" indent="0" marL="0">
+              <a:lnSpc>
+                <a:spcPts val="2613"/>
+              </a:lnSpc>
+              <a:buNone/>
+            </a:pPr>
+            <a:r>
+              <a:rPr lang="en-US" sz="1866" dirty="0">
+                <a:solidFill>
+                  <a:srgbClr val="1A1A1A"/>
+                </a:solidFill>
+                <a:latin typeface="Arimo" pitchFamily="34" charset="0"/>
+                <a:ea typeface="Arimo" pitchFamily="34" charset="-122"/>
+                <a:cs typeface="Arimo" pitchFamily="34" charset="-120"/>
+              </a:rPr>
+              <a:t>Adopt a standard runner</a:t>
+            </a:r>
+            <a:endParaRPr lang="en-US" sz="1866" dirty="0"/>
+          </a:p>
+        </p:txBody>
+      </p:sp>
+      <p:sp>
+        <p:nvSpPr>
+          <p:cNvPr id="17" name="Text 15"/>
+          <p:cNvSpPr/>
+          <p:nvPr/>
+        </p:nvSpPr>
+        <p:spPr>
+          <a:xfrm>
+            <a:off x="7660748" y="2887266"/>
+            <a:ext cx="3811369" cy="331986"/>
+          </a:xfrm>
+          <a:prstGeom prst="rect">
+            <a:avLst/>
+          </a:prstGeom>
+          <a:noFill/>
+          <a:ln/>
+        </p:spPr>
+        <p:txBody>
+          <a:bodyPr wrap="square" lIns="0" tIns="0" rIns="0" bIns="0" rtlCol="0" anchor="t"/>
+          <a:lstStyle/>
+          <a:p>
+            <a:pPr algn="l" indent="0" marL="0">
+              <a:lnSpc>
+                <a:spcPts val="2613"/>
+              </a:lnSpc>
+              <a:buNone/>
+            </a:pPr>
+            <a:r>
+              <a:rPr lang="en-US" sz="1866" dirty="0">
+                <a:solidFill>
+                  <a:srgbClr val="6B7280"/>
+                </a:solidFill>
+                <a:latin typeface="Arimo" pitchFamily="34" charset="0"/>
+                <a:ea typeface="Arimo" pitchFamily="34" charset="-122"/>
+                <a:cs typeface="Arimo" pitchFamily="34" charset="-120"/>
+              </a:rPr>
+              <a:t>Training itself is your research</a:t>
+            </a:r>
+            <a:endParaRPr lang="en-US" sz="1866" dirty="0"/>
+          </a:p>
+        </p:txBody>
+      </p:sp>
+      <p:sp>
+        <p:nvSpPr>
+          <p:cNvPr id="18" name="Shape 16"/>
+          <p:cNvSpPr/>
+          <p:nvPr/>
+        </p:nvSpPr>
+        <p:spPr>
+          <a:xfrm>
+            <a:off x="554296" y="3352800"/>
+            <a:ext cx="11080360" cy="0"/>
+          </a:xfrm>
+          <a:prstGeom prst="line">
+            <a:avLst/>
+          </a:prstGeom>
+          <a:noFill/>
+          <a:ln w="12698">
+            <a:solidFill>
+              <a:srgbClr val="D1D5DB"/>
+            </a:solidFill>
+            <a:prstDash val="solid"/>
+          </a:ln>
+        </p:spPr>
+      </p:sp>
+      <p:sp>
+        <p:nvSpPr>
+          <p:cNvPr id="19" name="Text 17"/>
+          <p:cNvSpPr/>
+          <p:nvPr/>
+        </p:nvSpPr>
+        <p:spPr>
+          <a:xfrm>
+            <a:off x="791171" y="3486150"/>
+            <a:ext cx="2907244" cy="331986"/>
+          </a:xfrm>
+          <a:prstGeom prst="rect">
+            <a:avLst/>
+          </a:prstGeom>
+          <a:noFill/>
+          <a:ln/>
+        </p:spPr>
+        <p:txBody>
+          <a:bodyPr wrap="square" lIns="0" tIns="0" rIns="0" bIns="0" rtlCol="0" anchor="t"/>
+          <a:lstStyle/>
+          <a:p>
+            <a:pPr algn="l" indent="0" marL="0">
+              <a:lnSpc>
+                <a:spcPts val="2613"/>
+              </a:lnSpc>
+              <a:buNone/>
+            </a:pPr>
+            <a:r>
+              <a:rPr lang="en-US" sz="1866" b="1" dirty="0">
+                <a:solidFill>
+                  <a:srgbClr val="1A1A1A"/>
+                </a:solidFill>
+                <a:latin typeface="Arimo" pitchFamily="34" charset="0"/>
+                <a:ea typeface="Arimo" pitchFamily="34" charset="-122"/>
+                <a:cs typeface="Arimo" pitchFamily="34" charset="-120"/>
+              </a:rPr>
+              <a:t>Registry</a:t>
+            </a:r>
+            <a:endParaRPr lang="en-US" sz="1866" dirty="0"/>
+          </a:p>
+        </p:txBody>
+      </p:sp>
+      <p:sp>
+        <p:nvSpPr>
+          <p:cNvPr id="20" name="Text 18"/>
+          <p:cNvSpPr/>
+          <p:nvPr/>
+        </p:nvSpPr>
+        <p:spPr>
+          <a:xfrm>
+            <a:off x="4115160" y="3486150"/>
+            <a:ext cx="3133275" cy="331986"/>
+          </a:xfrm>
+          <a:prstGeom prst="rect">
+            <a:avLst/>
+          </a:prstGeom>
+          <a:noFill/>
+          <a:ln/>
+        </p:spPr>
+        <p:txBody>
+          <a:bodyPr wrap="square" lIns="0" tIns="0" rIns="0" bIns="0" rtlCol="0" anchor="t"/>
+          <a:lstStyle/>
+          <a:p>
+            <a:pPr algn="l" indent="0" marL="0">
+              <a:lnSpc>
+                <a:spcPts val="2613"/>
+              </a:lnSpc>
+              <a:buNone/>
+            </a:pPr>
+            <a:r>
+              <a:rPr lang="en-US" sz="1866" dirty="0">
+                <a:solidFill>
+                  <a:srgbClr val="1A1A1A"/>
+                </a:solidFill>
+                <a:latin typeface="Arimo" pitchFamily="34" charset="0"/>
+                <a:ea typeface="Arimo" pitchFamily="34" charset="-122"/>
+                <a:cs typeface="Arimo" pitchFamily="34" charset="-120"/>
+              </a:rPr>
+              <a:t>Buy</a:t>
+            </a:r>
+            <a:endParaRPr lang="en-US" sz="1866" dirty="0"/>
+          </a:p>
+        </p:txBody>
+      </p:sp>
+      <p:sp>
+        <p:nvSpPr>
+          <p:cNvPr id="21" name="Text 19"/>
+          <p:cNvSpPr/>
+          <p:nvPr/>
+        </p:nvSpPr>
+        <p:spPr>
+          <a:xfrm>
+            <a:off x="7660748" y="3486150"/>
+            <a:ext cx="3811369" cy="331986"/>
+          </a:xfrm>
+          <a:prstGeom prst="rect">
+            <a:avLst/>
+          </a:prstGeom>
+          <a:noFill/>
+          <a:ln/>
+        </p:spPr>
+        <p:txBody>
+          <a:bodyPr wrap="square" lIns="0" tIns="0" rIns="0" bIns="0" rtlCol="0" anchor="t"/>
+          <a:lstStyle/>
+          <a:p>
+            <a:pPr algn="l" indent="0" marL="0">
+              <a:lnSpc>
+                <a:spcPts val="2613"/>
+              </a:lnSpc>
+              <a:buNone/>
+            </a:pPr>
+            <a:r>
+              <a:rPr lang="en-US" sz="1866" dirty="0">
+                <a:solidFill>
+                  <a:srgbClr val="6B7280"/>
+                </a:solidFill>
+                <a:latin typeface="Arimo" pitchFamily="34" charset="0"/>
+                <a:ea typeface="Arimo" pitchFamily="34" charset="-122"/>
+                <a:cs typeface="Arimo" pitchFamily="34" charset="-120"/>
+              </a:rPr>
+              <a:t>Never</a:t>
+            </a:r>
+            <a:endParaRPr lang="en-US" sz="1866" dirty="0"/>
+          </a:p>
+        </p:txBody>
+      </p:sp>
+      <p:sp>
+        <p:nvSpPr>
+          <p:cNvPr id="22" name="Shape 20"/>
+          <p:cNvSpPr/>
+          <p:nvPr/>
+        </p:nvSpPr>
+        <p:spPr>
+          <a:xfrm>
+            <a:off x="554296" y="3951684"/>
+            <a:ext cx="11080360" cy="0"/>
+          </a:xfrm>
+          <a:prstGeom prst="line">
+            <a:avLst/>
+          </a:prstGeom>
+          <a:noFill/>
+          <a:ln w="12698">
+            <a:solidFill>
+              <a:srgbClr val="D1D5DB"/>
+            </a:solidFill>
+            <a:prstDash val="solid"/>
+          </a:ln>
+        </p:spPr>
+      </p:sp>
+      <p:sp>
+        <p:nvSpPr>
+          <p:cNvPr id="23" name="Text 21"/>
+          <p:cNvSpPr/>
+          <p:nvPr/>
+        </p:nvSpPr>
+        <p:spPr>
+          <a:xfrm>
+            <a:off x="791171" y="4123928"/>
+            <a:ext cx="2907244" cy="331986"/>
+          </a:xfrm>
+          <a:prstGeom prst="rect">
+            <a:avLst/>
+          </a:prstGeom>
+          <a:noFill/>
+          <a:ln/>
+        </p:spPr>
+        <p:txBody>
+          <a:bodyPr wrap="square" lIns="0" tIns="0" rIns="0" bIns="0" rtlCol="0" anchor="t"/>
+          <a:lstStyle/>
+          <a:p>
+            <a:pPr algn="l" indent="0" marL="0">
+              <a:lnSpc>
+                <a:spcPts val="2613"/>
+              </a:lnSpc>
+              <a:buNone/>
+            </a:pPr>
+            <a:r>
+              <a:rPr lang="en-US" sz="1866" b="1" dirty="0">
+                <a:solidFill>
+                  <a:srgbClr val="1A1A1A"/>
+                </a:solidFill>
+                <a:latin typeface="Arimo" pitchFamily="34" charset="0"/>
+                <a:ea typeface="Arimo" pitchFamily="34" charset="-122"/>
+                <a:cs typeface="Arimo" pitchFamily="34" charset="-120"/>
+              </a:rPr>
+              <a:t>Serving</a:t>
+            </a:r>
+            <a:endParaRPr lang="en-US" sz="1866" dirty="0"/>
+          </a:p>
+        </p:txBody>
+      </p:sp>
+      <p:sp>
+        <p:nvSpPr>
+          <p:cNvPr id="24" name="Text 22"/>
+          <p:cNvSpPr/>
+          <p:nvPr/>
+        </p:nvSpPr>
+        <p:spPr>
+          <a:xfrm>
+            <a:off x="4115160" y="4123928"/>
+            <a:ext cx="3133275" cy="331986"/>
+          </a:xfrm>
+          <a:prstGeom prst="rect">
+            <a:avLst/>
+          </a:prstGeom>
+          <a:noFill/>
+          <a:ln/>
+        </p:spPr>
+        <p:txBody>
+          <a:bodyPr wrap="square" lIns="0" tIns="0" rIns="0" bIns="0" rtlCol="0" anchor="t"/>
+          <a:lstStyle/>
+          <a:p>
+            <a:pPr algn="l" indent="0" marL="0">
+              <a:lnSpc>
+                <a:spcPts val="2613"/>
+              </a:lnSpc>
+              <a:buNone/>
+            </a:pPr>
+            <a:r>
+              <a:rPr lang="en-US" sz="1866" dirty="0">
+                <a:solidFill>
+                  <a:srgbClr val="1A1A1A"/>
+                </a:solidFill>
+                <a:latin typeface="Arimo" pitchFamily="34" charset="0"/>
+                <a:ea typeface="Arimo" pitchFamily="34" charset="-122"/>
+                <a:cs typeface="Arimo" pitchFamily="34" charset="-120"/>
+              </a:rPr>
+              <a:t>Buy</a:t>
+            </a:r>
+            <a:endParaRPr lang="en-US" sz="1866" dirty="0"/>
+          </a:p>
+        </p:txBody>
+      </p:sp>
+      <p:sp>
+        <p:nvSpPr>
+          <p:cNvPr id="25" name="Text 23"/>
+          <p:cNvSpPr/>
+          <p:nvPr/>
+        </p:nvSpPr>
+        <p:spPr>
+          <a:xfrm>
+            <a:off x="7660748" y="3958034"/>
+            <a:ext cx="3811369" cy="663972"/>
+          </a:xfrm>
+          <a:prstGeom prst="rect">
+            <a:avLst/>
+          </a:prstGeom>
+          <a:noFill/>
+          <a:ln/>
+        </p:spPr>
+        <p:txBody>
+          <a:bodyPr wrap="square" lIns="0" tIns="0" rIns="0" bIns="0" rtlCol="0" anchor="t"/>
+          <a:lstStyle/>
+          <a:p>
+            <a:pPr algn="l" indent="0" marL="0">
+              <a:lnSpc>
+                <a:spcPts val="2613"/>
+              </a:lnSpc>
+              <a:buNone/>
+            </a:pPr>
+            <a:r>
+              <a:rPr lang="en-US" sz="1866" dirty="0">
+                <a:solidFill>
+                  <a:srgbClr val="6B7280"/>
+                </a:solidFill>
+                <a:latin typeface="Arimo" pitchFamily="34" charset="0"/>
+                <a:ea typeface="Arimo" pitchFamily="34" charset="-122"/>
+                <a:cs typeface="Arimo" pitchFamily="34" charset="-120"/>
+              </a:rPr>
+              <a:t>Latency or hardware is the differentiator</a:t>
+            </a:r>
+            <a:endParaRPr lang="en-US" sz="1866" dirty="0"/>
+          </a:p>
+        </p:txBody>
+      </p:sp>
+      <p:sp>
+        <p:nvSpPr>
+          <p:cNvPr id="26" name="Shape 24"/>
+          <p:cNvSpPr/>
+          <p:nvPr/>
+        </p:nvSpPr>
+        <p:spPr>
+          <a:xfrm>
+            <a:off x="554296" y="4628356"/>
+            <a:ext cx="11080360" cy="0"/>
+          </a:xfrm>
+          <a:prstGeom prst="line">
+            <a:avLst/>
+          </a:prstGeom>
+          <a:noFill/>
+          <a:ln w="12698">
+            <a:solidFill>
+              <a:srgbClr val="D1D5DB"/>
+            </a:solidFill>
+            <a:prstDash val="solid"/>
+          </a:ln>
+        </p:spPr>
+      </p:sp>
+      <p:sp>
+        <p:nvSpPr>
+          <p:cNvPr id="27" name="Text 25"/>
+          <p:cNvSpPr/>
+          <p:nvPr/>
+        </p:nvSpPr>
+        <p:spPr>
+          <a:xfrm>
+            <a:off x="791171" y="4800600"/>
+            <a:ext cx="2907244" cy="331986"/>
+          </a:xfrm>
+          <a:prstGeom prst="rect">
+            <a:avLst/>
+          </a:prstGeom>
+          <a:noFill/>
+          <a:ln/>
+        </p:spPr>
+        <p:txBody>
+          <a:bodyPr wrap="square" lIns="0" tIns="0" rIns="0" bIns="0" rtlCol="0" anchor="t"/>
+          <a:lstStyle/>
+          <a:p>
+            <a:pPr algn="l" indent="0" marL="0">
+              <a:lnSpc>
+                <a:spcPts val="2613"/>
+              </a:lnSpc>
+              <a:buNone/>
+            </a:pPr>
+            <a:r>
+              <a:rPr lang="en-US" sz="1866" b="1" dirty="0">
+                <a:solidFill>
+                  <a:srgbClr val="1A1A1A"/>
+                </a:solidFill>
+                <a:latin typeface="Arimo" pitchFamily="34" charset="0"/>
+                <a:ea typeface="Arimo" pitchFamily="34" charset="-122"/>
+                <a:cs typeface="Arimo" pitchFamily="34" charset="-120"/>
+              </a:rPr>
+              <a:t>Monitoring</a:t>
+            </a:r>
+            <a:endParaRPr lang="en-US" sz="1866" dirty="0"/>
+          </a:p>
+        </p:txBody>
+      </p:sp>
+      <p:sp>
+        <p:nvSpPr>
+          <p:cNvPr id="28" name="Text 26"/>
+          <p:cNvSpPr/>
+          <p:nvPr/>
+        </p:nvSpPr>
+        <p:spPr>
+          <a:xfrm>
+            <a:off x="4115160" y="4800600"/>
+            <a:ext cx="3133275" cy="331986"/>
+          </a:xfrm>
+          <a:prstGeom prst="rect">
+            <a:avLst/>
+          </a:prstGeom>
+          <a:noFill/>
+          <a:ln/>
+        </p:spPr>
+        <p:txBody>
+          <a:bodyPr wrap="square" lIns="0" tIns="0" rIns="0" bIns="0" rtlCol="0" anchor="t"/>
+          <a:lstStyle/>
+          <a:p>
+            <a:pPr algn="l" indent="0" marL="0">
+              <a:lnSpc>
+                <a:spcPts val="2613"/>
+              </a:lnSpc>
+              <a:buNone/>
+            </a:pPr>
+            <a:r>
+              <a:rPr lang="en-US" sz="1866" dirty="0">
+                <a:solidFill>
+                  <a:srgbClr val="1A1A1A"/>
+                </a:solidFill>
+                <a:latin typeface="Arimo" pitchFamily="34" charset="0"/>
+                <a:ea typeface="Arimo" pitchFamily="34" charset="-122"/>
+                <a:cs typeface="Arimo" pitchFamily="34" charset="-120"/>
+              </a:rPr>
+              <a:t>Buy, then extend</a:t>
+            </a:r>
+            <a:endParaRPr lang="en-US" sz="1866" dirty="0"/>
+          </a:p>
+        </p:txBody>
+      </p:sp>
+      <p:sp>
+        <p:nvSpPr>
+          <p:cNvPr id="29" name="Text 27"/>
+          <p:cNvSpPr/>
+          <p:nvPr/>
+        </p:nvSpPr>
+        <p:spPr>
+          <a:xfrm>
+            <a:off x="7660748" y="4634706"/>
+            <a:ext cx="3811369" cy="663972"/>
+          </a:xfrm>
+          <a:prstGeom prst="rect">
+            <a:avLst/>
+          </a:prstGeom>
+          <a:noFill/>
+          <a:ln/>
+        </p:spPr>
+        <p:txBody>
+          <a:bodyPr wrap="square" lIns="0" tIns="0" rIns="0" bIns="0" rtlCol="0" anchor="t"/>
+          <a:lstStyle/>
+          <a:p>
+            <a:pPr algn="l" indent="0" marL="0">
+              <a:lnSpc>
+                <a:spcPts val="2613"/>
+              </a:lnSpc>
+              <a:buNone/>
+            </a:pPr>
+            <a:r>
+              <a:rPr lang="en-US" sz="1866" dirty="0">
+                <a:solidFill>
+                  <a:srgbClr val="6B7280"/>
+                </a:solidFill>
+                <a:latin typeface="Arimo" pitchFamily="34" charset="0"/>
+                <a:ea typeface="Arimo" pitchFamily="34" charset="-122"/>
+                <a:cs typeface="Arimo" pitchFamily="34" charset="-120"/>
+              </a:rPr>
+              <a:t>Your drift definition is domain-specific</a:t>
+            </a:r>
+            <a:endParaRPr lang="en-US" sz="1866" dirty="0"/>
+          </a:p>
+        </p:txBody>
+      </p:sp>
+      <p:sp>
+        <p:nvSpPr>
+          <p:cNvPr id="30" name="Shape 28"/>
+          <p:cNvSpPr/>
+          <p:nvPr/>
+        </p:nvSpPr>
+        <p:spPr>
+          <a:xfrm>
+            <a:off x="554296" y="5305028"/>
+            <a:ext cx="11080360" cy="0"/>
+          </a:xfrm>
+          <a:prstGeom prst="line">
+            <a:avLst/>
+          </a:prstGeom>
+          <a:noFill/>
+          <a:ln w="12698">
+            <a:solidFill>
+              <a:srgbClr val="D1D5DB"/>
+            </a:solidFill>
+            <a:prstDash val="solid"/>
+          </a:ln>
+        </p:spPr>
+      </p:sp>
+      <p:sp>
+        <p:nvSpPr>
+          <p:cNvPr id="31" name="Text 29"/>
+          <p:cNvSpPr/>
+          <p:nvPr/>
+        </p:nvSpPr>
+        <p:spPr>
+          <a:xfrm>
+            <a:off x="791171" y="5438378"/>
+            <a:ext cx="2907244" cy="331986"/>
+          </a:xfrm>
+          <a:prstGeom prst="rect">
+            <a:avLst/>
+          </a:prstGeom>
+          <a:noFill/>
+          <a:ln/>
+        </p:spPr>
+        <p:txBody>
+          <a:bodyPr wrap="square" lIns="0" tIns="0" rIns="0" bIns="0" rtlCol="0" anchor="t"/>
+          <a:lstStyle/>
+          <a:p>
+            <a:pPr algn="l" indent="0" marL="0">
+              <a:lnSpc>
+                <a:spcPts val="2613"/>
+              </a:lnSpc>
+              <a:buNone/>
+            </a:pPr>
+            <a:r>
+              <a:rPr lang="en-US" sz="1866" b="1" dirty="0">
+                <a:solidFill>
+                  <a:srgbClr val="1A1A1A"/>
+                </a:solidFill>
+                <a:latin typeface="Arimo" pitchFamily="34" charset="0"/>
+                <a:ea typeface="Arimo" pitchFamily="34" charset="-122"/>
+                <a:cs typeface="Arimo" pitchFamily="34" charset="-120"/>
+              </a:rPr>
+              <a:t>Governance</a:t>
+            </a:r>
+            <a:endParaRPr lang="en-US" sz="1866" dirty="0"/>
+          </a:p>
+        </p:txBody>
+      </p:sp>
+      <p:sp>
+        <p:nvSpPr>
+          <p:cNvPr id="32" name="Text 30"/>
+          <p:cNvSpPr/>
+          <p:nvPr/>
+        </p:nvSpPr>
+        <p:spPr>
+          <a:xfrm>
+            <a:off x="4115160" y="5438378"/>
+            <a:ext cx="3133275" cy="331986"/>
+          </a:xfrm>
+          <a:prstGeom prst="rect">
+            <a:avLst/>
+          </a:prstGeom>
+          <a:noFill/>
+          <a:ln/>
+        </p:spPr>
+        <p:txBody>
+          <a:bodyPr wrap="square" lIns="0" tIns="0" rIns="0" bIns="0" rtlCol="0" anchor="t"/>
+          <a:lstStyle/>
+          <a:p>
+            <a:pPr algn="l" indent="0" marL="0">
+              <a:lnSpc>
+                <a:spcPts val="2613"/>
+              </a:lnSpc>
+              <a:buNone/>
+            </a:pPr>
+            <a:r>
+              <a:rPr lang="en-US" sz="1866" dirty="0">
+                <a:solidFill>
+                  <a:srgbClr val="1A1A1A"/>
+                </a:solidFill>
+                <a:latin typeface="Arimo" pitchFamily="34" charset="0"/>
+                <a:ea typeface="Arimo" pitchFamily="34" charset="-122"/>
+                <a:cs typeface="Arimo" pitchFamily="34" charset="-120"/>
+              </a:rPr>
+              <a:t>Adopt the company standard</a:t>
+            </a:r>
+            <a:endParaRPr lang="en-US" sz="1866" dirty="0"/>
+          </a:p>
+        </p:txBody>
+      </p:sp>
+      <p:sp>
+        <p:nvSpPr>
+          <p:cNvPr id="33" name="Text 31"/>
+          <p:cNvSpPr/>
+          <p:nvPr/>
+        </p:nvSpPr>
+        <p:spPr>
+          <a:xfrm>
+            <a:off x="7660748" y="5438378"/>
+            <a:ext cx="3811369" cy="331986"/>
+          </a:xfrm>
+          <a:prstGeom prst="rect">
+            <a:avLst/>
+          </a:prstGeom>
+          <a:noFill/>
+          <a:ln/>
+        </p:spPr>
+        <p:txBody>
+          <a:bodyPr wrap="square" lIns="0" tIns="0" rIns="0" bIns="0" rtlCol="0" anchor="t"/>
+          <a:lstStyle/>
+          <a:p>
+            <a:pPr algn="l" indent="0" marL="0">
+              <a:lnSpc>
+                <a:spcPts val="2613"/>
+              </a:lnSpc>
+              <a:buNone/>
+            </a:pPr>
+            <a:r>
+              <a:rPr lang="en-US" sz="1866" dirty="0">
+                <a:solidFill>
+                  <a:srgbClr val="6B7280"/>
+                </a:solidFill>
+                <a:latin typeface="Arimo" pitchFamily="34" charset="0"/>
+                <a:ea typeface="Arimo" pitchFamily="34" charset="-122"/>
+                <a:cs typeface="Arimo" pitchFamily="34" charset="-120"/>
+              </a:rPr>
+              <a:t>Never — inherit it</a:t>
+            </a:r>
+            <a:endParaRPr lang="en-US" sz="1866" dirty="0"/>
+          </a:p>
+        </p:txBody>
+      </p:sp>
+      <p:sp>
+        <p:nvSpPr>
+          <p:cNvPr id="34" name="Text 32"/>
+          <p:cNvSpPr/>
+          <p:nvPr/>
+        </p:nvSpPr>
+        <p:spPr>
+          <a:xfrm>
+            <a:off x="319484" y="6113066"/>
+            <a:ext cx="11327869" cy="236934"/>
+          </a:xfrm>
+          <a:prstGeom prst="rect">
+            <a:avLst/>
+          </a:prstGeom>
+          <a:noFill/>
+          <a:ln/>
+        </p:spPr>
+        <p:txBody>
+          <a:bodyPr wrap="square" lIns="0" tIns="0" rIns="0" bIns="0" rtlCol="0" anchor="t"/>
+          <a:lstStyle/>
+          <a:p>
+            <a:pPr algn="r" indent="0" marL="0">
+              <a:lnSpc>
+                <a:spcPts val="1866"/>
+              </a:lnSpc>
+              <a:buNone/>
+            </a:pPr>
+            <a:r>
+              <a:rPr lang="en-US" sz="1333" dirty="0">
+                <a:solidFill>
+                  <a:srgbClr val="6B7280"/>
+                </a:solidFill>
+                <a:latin typeface="Arimo" pitchFamily="34" charset="0"/>
+                <a:ea typeface="Arimo" pitchFamily="34" charset="-122"/>
+                <a:cs typeface="Arimo" pitchFamily="34" charset="-120"/>
+              </a:rPr>
+              <a:t>MLOPS PLATFORM ROADMAP · SHEET 05/07 · NO EXTERNAL DATA CITED</a:t>
+            </a:r>
+            <a:endParaRPr lang="en-US" sz="1333" dirty="0"/>
+          </a:p>
+        </p:txBody>
+      </p:sp>
     </p:spTree>
   </p:cSld>
   <p:clrMapOvr>
@@ -1633,6 +6512,13 @@
 <file path=ppt/slides/slide6.xml><?xml version="1.0" encoding="utf-8"?>
 <p:sld xmlns:a="http://schemas.openxmlformats.org/drawingml/2006/main" xmlns:r="http://schemas.openxmlformats.org/officeDocument/2006/relationships" xmlns:p="http://schemas.openxmlformats.org/presentationml/2006/main">
   <p:cSld name="Slide 6">
+    <p:bg>
+      <p:bgPr>
+        <a:solidFill>
+          <a:srgbClr val="FFFFFF"/>
+        </a:solidFill>
+      </p:bgPr>
+    </p:bg>
     <p:spTree>
       <p:nvGrpSpPr>
         <p:cNvPr id="1" name=""/>
@@ -1647,30 +6533,821 @@
           <a:chExt cx="0" cy="0"/>
         </a:xfrm>
       </p:grpSpPr>
-      <p:pic>
-        <p:nvPicPr>
-          <p:cNvPr id="2" name="Image 0" descr="/tmp/slide-1787840566744-wjqeybjpowl.png">    </p:cNvPr>
-          <p:cNvPicPr>
-            <a:picLocks noChangeAspect="1"/>
-          </p:cNvPicPr>
-          <p:nvPr/>
-        </p:nvPicPr>
-        <p:blipFill>
-          <a:blip r:embed="rId1"/>
-          <a:stretch>
-            <a:fillRect/>
-          </a:stretch>
-        </p:blipFill>
-        <p:spPr>
-          <a:xfrm>
-            <a:off x="0" y="0"/>
-            <a:ext cx="12188952" cy="6858000"/>
-          </a:xfrm>
-          <a:prstGeom prst="rect">
-            <a:avLst/>
-          </a:prstGeom>
-        </p:spPr>
-      </p:pic>
+      <p:sp>
+        <p:nvSpPr>
+          <p:cNvPr id="2" name="Text 0"/>
+          <p:cNvSpPr/>
+          <p:nvPr/>
+        </p:nvSpPr>
+        <p:spPr>
+          <a:xfrm>
+            <a:off x="541599" y="484386"/>
+            <a:ext cx="11327869" cy="260747"/>
+          </a:xfrm>
+          <a:prstGeom prst="rect">
+            <a:avLst/>
+          </a:prstGeom>
+          <a:noFill/>
+          <a:ln/>
+        </p:spPr>
+        <p:txBody>
+          <a:bodyPr wrap="square" lIns="0" tIns="0" rIns="0" bIns="0" rtlCol="0" anchor="t"/>
+          <a:lstStyle/>
+          <a:p>
+            <a:pPr algn="l" indent="0" marL="0">
+              <a:lnSpc>
+                <a:spcPts val="2053"/>
+              </a:lnSpc>
+              <a:spcAft>
+                <a:spcPts val="933"/>
+              </a:spcAft>
+              <a:buNone/>
+            </a:pPr>
+            <a:r>
+              <a:rPr lang="en-US" sz="1466" b="1" dirty="0">
+                <a:solidFill>
+                  <a:srgbClr val="6B7280"/>
+                </a:solidFill>
+                <a:latin typeface="Arimo" pitchFamily="34" charset="0"/>
+                <a:ea typeface="Arimo" pitchFamily="34" charset="-122"/>
+                <a:cs typeface="Arimo" pitchFamily="34" charset="-120"/>
+              </a:rPr>
+              <a:t>DECISIONS</a:t>
+            </a:r>
+            <a:endParaRPr lang="en-US" sz="1466" dirty="0"/>
+          </a:p>
+        </p:txBody>
+      </p:sp>
+      <p:sp>
+        <p:nvSpPr>
+          <p:cNvPr id="3" name="Text 1"/>
+          <p:cNvSpPr/>
+          <p:nvPr/>
+        </p:nvSpPr>
+        <p:spPr>
+          <a:xfrm>
+            <a:off x="541599" y="863600"/>
+            <a:ext cx="11327869" cy="423267"/>
+          </a:xfrm>
+          <a:prstGeom prst="rect">
+            <a:avLst/>
+          </a:prstGeom>
+          <a:noFill/>
+          <a:ln/>
+        </p:spPr>
+        <p:txBody>
+          <a:bodyPr wrap="square" lIns="0" tIns="0" rIns="0" bIns="0" rtlCol="0" anchor="t"/>
+          <a:lstStyle/>
+          <a:p>
+            <a:pPr algn="l" indent="0" marL="0">
+              <a:lnSpc>
+                <a:spcPts val="3333"/>
+              </a:lnSpc>
+              <a:buNone/>
+            </a:pPr>
+            <a:r>
+              <a:rPr lang="en-US" sz="2666" b="1" dirty="0">
+                <a:solidFill>
+                  <a:srgbClr val="1A1A1A"/>
+                </a:solidFill>
+                <a:latin typeface="Arimo" pitchFamily="34" charset="0"/>
+                <a:ea typeface="Arimo" pitchFamily="34" charset="-122"/>
+                <a:cs typeface="Arimo" pitchFamily="34" charset="-120"/>
+              </a:rPr>
+              <a:t>Decide four things before phase 1, or phase 2 will decide them for you</a:t>
+            </a:r>
+            <a:endParaRPr lang="en-US" sz="2666" dirty="0"/>
+          </a:p>
+        </p:txBody>
+      </p:sp>
+      <p:sp>
+        <p:nvSpPr>
+          <p:cNvPr id="4" name="Text 2"/>
+          <p:cNvSpPr/>
+          <p:nvPr/>
+        </p:nvSpPr>
+        <p:spPr>
+          <a:xfrm>
+            <a:off x="541599" y="1286867"/>
+            <a:ext cx="11105754" cy="12700"/>
+          </a:xfrm>
+          <a:prstGeom prst="rect">
+            <a:avLst/>
+          </a:prstGeom>
+          <a:solidFill>
+            <a:srgbClr val="D1D5DB"/>
+          </a:solidFill>
+          <a:ln/>
+        </p:spPr>
+        <p:txBody>
+          <a:bodyPr wrap="square" rtlCol="0" anchor="ctr"/>
+          <a:lstStyle/>
+          <a:p>
+            <a:pPr indent="0" marL="0">
+              <a:buNone/>
+            </a:pPr>
+            <a:endParaRPr lang="en-US" dirty="0"/>
+          </a:p>
+        </p:txBody>
+      </p:sp>
+      <p:sp>
+        <p:nvSpPr>
+          <p:cNvPr id="5" name="Text 3"/>
+          <p:cNvSpPr/>
+          <p:nvPr/>
+        </p:nvSpPr>
+        <p:spPr>
+          <a:xfrm>
+            <a:off x="541599" y="1570434"/>
+            <a:ext cx="5451302" cy="2094508"/>
+          </a:xfrm>
+          <a:prstGeom prst="rect">
+            <a:avLst/>
+          </a:prstGeom>
+          <a:noFill/>
+          <a:ln w="12698">
+            <a:solidFill>
+              <a:srgbClr val="D1D5DB"/>
+            </a:solidFill>
+          </a:ln>
+        </p:spPr>
+        <p:txBody>
+          <a:bodyPr wrap="square" rtlCol="0" anchor="ctr"/>
+          <a:lstStyle/>
+          <a:p>
+            <a:pPr indent="0" marL="0">
+              <a:buNone/>
+            </a:pPr>
+            <a:endParaRPr lang="en-US" dirty="0"/>
+          </a:p>
+        </p:txBody>
+      </p:sp>
+      <p:sp>
+        <p:nvSpPr>
+          <p:cNvPr id="6" name="Text 4"/>
+          <p:cNvSpPr/>
+          <p:nvPr/>
+        </p:nvSpPr>
+        <p:spPr>
+          <a:xfrm>
+            <a:off x="808232" y="1820069"/>
+            <a:ext cx="5016397" cy="331986"/>
+          </a:xfrm>
+          <a:prstGeom prst="rect">
+            <a:avLst/>
+          </a:prstGeom>
+          <a:noFill/>
+          <a:ln/>
+        </p:spPr>
+        <p:txBody>
+          <a:bodyPr wrap="square" lIns="0" tIns="0" rIns="0" bIns="0" rtlCol="0" anchor="t"/>
+          <a:lstStyle/>
+          <a:p>
+            <a:pPr algn="l" indent="0" marL="0">
+              <a:lnSpc>
+                <a:spcPts val="2613"/>
+              </a:lnSpc>
+              <a:spcAft>
+                <a:spcPts val="1200"/>
+              </a:spcAft>
+              <a:buNone/>
+            </a:pPr>
+            <a:r>
+              <a:rPr lang="en-US" sz="1866" b="1" dirty="0">
+                <a:solidFill>
+                  <a:srgbClr val="6B7280"/>
+                </a:solidFill>
+                <a:latin typeface="Arimo" pitchFamily="34" charset="0"/>
+                <a:ea typeface="Arimo" pitchFamily="34" charset="-122"/>
+                <a:cs typeface="Arimo" pitchFamily="34" charset="-120"/>
+              </a:rPr>
+              <a:t>01</a:t>
+            </a:r>
+            <a:endParaRPr lang="en-US" sz="1866" dirty="0"/>
+          </a:p>
+        </p:txBody>
+      </p:sp>
+      <p:sp>
+        <p:nvSpPr>
+          <p:cNvPr id="7" name="Text 5"/>
+          <p:cNvSpPr/>
+          <p:nvPr/>
+        </p:nvSpPr>
+        <p:spPr>
+          <a:xfrm>
+            <a:off x="808232" y="2304455"/>
+            <a:ext cx="5016397" cy="660400"/>
+          </a:xfrm>
+          <a:prstGeom prst="rect">
+            <a:avLst/>
+          </a:prstGeom>
+          <a:noFill/>
+          <a:ln/>
+        </p:spPr>
+        <p:txBody>
+          <a:bodyPr wrap="square" lIns="0" tIns="0" rIns="0" bIns="0" rtlCol="0" anchor="t"/>
+          <a:lstStyle/>
+          <a:p>
+            <a:pPr algn="l" indent="0" marL="0">
+              <a:lnSpc>
+                <a:spcPts val="2600"/>
+              </a:lnSpc>
+              <a:spcAft>
+                <a:spcPts val="933"/>
+              </a:spcAft>
+              <a:buNone/>
+            </a:pPr>
+            <a:r>
+              <a:rPr lang="en-US" sz="2000" b="1" dirty="0">
+                <a:solidFill>
+                  <a:srgbClr val="1A1A1A"/>
+                </a:solidFill>
+                <a:latin typeface="Arimo" pitchFamily="34" charset="0"/>
+                <a:ea typeface="Arimo" pitchFamily="34" charset="-122"/>
+                <a:cs typeface="Arimo" pitchFamily="34" charset="-120"/>
+              </a:rPr>
+              <a:t>Who owns the boundary with the data platform</a:t>
+            </a:r>
+            <a:endParaRPr lang="en-US" sz="2000" dirty="0"/>
+          </a:p>
+        </p:txBody>
+      </p:sp>
+      <p:sp>
+        <p:nvSpPr>
+          <p:cNvPr id="8" name="Text 6"/>
+          <p:cNvSpPr/>
+          <p:nvPr/>
+        </p:nvSpPr>
+        <p:spPr>
+          <a:xfrm>
+            <a:off x="808232" y="3083322"/>
+            <a:ext cx="5016397" cy="331986"/>
+          </a:xfrm>
+          <a:prstGeom prst="rect">
+            <a:avLst/>
+          </a:prstGeom>
+          <a:noFill/>
+          <a:ln/>
+        </p:spPr>
+        <p:txBody>
+          <a:bodyPr wrap="square" lIns="0" tIns="0" rIns="0" bIns="0" rtlCol="0" anchor="t"/>
+          <a:lstStyle/>
+          <a:p>
+            <a:pPr algn="l" indent="0" marL="0">
+              <a:lnSpc>
+                <a:spcPts val="2613"/>
+              </a:lnSpc>
+              <a:buNone/>
+            </a:pPr>
+            <a:r>
+              <a:rPr lang="en-US" sz="1866" dirty="0">
+                <a:solidFill>
+                  <a:srgbClr val="6B7280"/>
+                </a:solidFill>
+                <a:latin typeface="Arimo" pitchFamily="34" charset="0"/>
+                <a:ea typeface="Arimo" pitchFamily="34" charset="-122"/>
+                <a:cs typeface="Arimo" pitchFamily="34" charset="-120"/>
+              </a:rPr>
+              <a:t>Left open: features get built twice, differently.</a:t>
+            </a:r>
+            <a:endParaRPr lang="en-US" sz="1866" dirty="0"/>
+          </a:p>
+        </p:txBody>
+      </p:sp>
+      <p:sp>
+        <p:nvSpPr>
+          <p:cNvPr id="9" name="Text 7"/>
+          <p:cNvSpPr/>
+          <p:nvPr/>
+        </p:nvSpPr>
+        <p:spPr>
+          <a:xfrm>
+            <a:off x="6196051" y="1570434"/>
+            <a:ext cx="5451302" cy="2094508"/>
+          </a:xfrm>
+          <a:prstGeom prst="rect">
+            <a:avLst/>
+          </a:prstGeom>
+          <a:noFill/>
+          <a:ln w="12698">
+            <a:solidFill>
+              <a:srgbClr val="D1D5DB"/>
+            </a:solidFill>
+          </a:ln>
+        </p:spPr>
+        <p:txBody>
+          <a:bodyPr wrap="square" rtlCol="0" anchor="ctr"/>
+          <a:lstStyle/>
+          <a:p>
+            <a:pPr indent="0" marL="0">
+              <a:buNone/>
+            </a:pPr>
+            <a:endParaRPr lang="en-US" dirty="0"/>
+          </a:p>
+        </p:txBody>
+      </p:sp>
+      <p:sp>
+        <p:nvSpPr>
+          <p:cNvPr id="10" name="Text 8"/>
+          <p:cNvSpPr/>
+          <p:nvPr/>
+        </p:nvSpPr>
+        <p:spPr>
+          <a:xfrm>
+            <a:off x="6462684" y="1820069"/>
+            <a:ext cx="5016397" cy="331986"/>
+          </a:xfrm>
+          <a:prstGeom prst="rect">
+            <a:avLst/>
+          </a:prstGeom>
+          <a:noFill/>
+          <a:ln/>
+        </p:spPr>
+        <p:txBody>
+          <a:bodyPr wrap="square" lIns="0" tIns="0" rIns="0" bIns="0" rtlCol="0" anchor="t"/>
+          <a:lstStyle/>
+          <a:p>
+            <a:pPr algn="l" indent="0" marL="0">
+              <a:lnSpc>
+                <a:spcPts val="2613"/>
+              </a:lnSpc>
+              <a:spcAft>
+                <a:spcPts val="1200"/>
+              </a:spcAft>
+              <a:buNone/>
+            </a:pPr>
+            <a:r>
+              <a:rPr lang="en-US" sz="1866" b="1" dirty="0">
+                <a:solidFill>
+                  <a:srgbClr val="6B7280"/>
+                </a:solidFill>
+                <a:latin typeface="Arimo" pitchFamily="34" charset="0"/>
+                <a:ea typeface="Arimo" pitchFamily="34" charset="-122"/>
+                <a:cs typeface="Arimo" pitchFamily="34" charset="-120"/>
+              </a:rPr>
+              <a:t>02</a:t>
+            </a:r>
+            <a:endParaRPr lang="en-US" sz="1866" dirty="0"/>
+          </a:p>
+        </p:txBody>
+      </p:sp>
+      <p:sp>
+        <p:nvSpPr>
+          <p:cNvPr id="11" name="Text 9"/>
+          <p:cNvSpPr/>
+          <p:nvPr/>
+        </p:nvSpPr>
+        <p:spPr>
+          <a:xfrm>
+            <a:off x="6462684" y="2304455"/>
+            <a:ext cx="5016397" cy="330200"/>
+          </a:xfrm>
+          <a:prstGeom prst="rect">
+            <a:avLst/>
+          </a:prstGeom>
+          <a:noFill/>
+          <a:ln/>
+        </p:spPr>
+        <p:txBody>
+          <a:bodyPr wrap="square" lIns="0" tIns="0" rIns="0" bIns="0" rtlCol="0" anchor="t"/>
+          <a:lstStyle/>
+          <a:p>
+            <a:pPr algn="l" indent="0" marL="0">
+              <a:lnSpc>
+                <a:spcPts val="2600"/>
+              </a:lnSpc>
+              <a:spcAft>
+                <a:spcPts val="933"/>
+              </a:spcAft>
+              <a:buNone/>
+            </a:pPr>
+            <a:r>
+              <a:rPr lang="en-US" sz="2000" b="1" dirty="0">
+                <a:solidFill>
+                  <a:srgbClr val="1A1A1A"/>
+                </a:solidFill>
+                <a:latin typeface="Arimo" pitchFamily="34" charset="0"/>
+                <a:ea typeface="Arimo" pitchFamily="34" charset="-122"/>
+                <a:cs typeface="Arimo" pitchFamily="34" charset="-120"/>
+              </a:rPr>
+              <a:t>What the exit criterion for each phase is</a:t>
+            </a:r>
+            <a:endParaRPr lang="en-US" sz="2000" dirty="0"/>
+          </a:p>
+        </p:txBody>
+      </p:sp>
+      <p:sp>
+        <p:nvSpPr>
+          <p:cNvPr id="12" name="Text 10"/>
+          <p:cNvSpPr/>
+          <p:nvPr/>
+        </p:nvSpPr>
+        <p:spPr>
+          <a:xfrm>
+            <a:off x="6462684" y="2753122"/>
+            <a:ext cx="5016397" cy="331986"/>
+          </a:xfrm>
+          <a:prstGeom prst="rect">
+            <a:avLst/>
+          </a:prstGeom>
+          <a:noFill/>
+          <a:ln/>
+        </p:spPr>
+        <p:txBody>
+          <a:bodyPr wrap="square" lIns="0" tIns="0" rIns="0" bIns="0" rtlCol="0" anchor="t"/>
+          <a:lstStyle/>
+          <a:p>
+            <a:pPr algn="l" indent="0" marL="0">
+              <a:lnSpc>
+                <a:spcPts val="2613"/>
+              </a:lnSpc>
+              <a:buNone/>
+            </a:pPr>
+            <a:r>
+              <a:rPr lang="en-US" sz="1866" dirty="0">
+                <a:solidFill>
+                  <a:srgbClr val="6B7280"/>
+                </a:solidFill>
+                <a:latin typeface="Arimo" pitchFamily="34" charset="0"/>
+                <a:ea typeface="Arimo" pitchFamily="34" charset="-122"/>
+                <a:cs typeface="Arimo" pitchFamily="34" charset="-120"/>
+              </a:rPr>
+              <a:t>Left open: phase 1 never ends.</a:t>
+            </a:r>
+            <a:endParaRPr lang="en-US" sz="1866" dirty="0"/>
+          </a:p>
+        </p:txBody>
+      </p:sp>
+      <p:sp>
+        <p:nvSpPr>
+          <p:cNvPr id="13" name="Text 11"/>
+          <p:cNvSpPr/>
+          <p:nvPr/>
+        </p:nvSpPr>
+        <p:spPr>
+          <a:xfrm>
+            <a:off x="541599" y="3868142"/>
+            <a:ext cx="5451302" cy="2096294"/>
+          </a:xfrm>
+          <a:prstGeom prst="rect">
+            <a:avLst/>
+          </a:prstGeom>
+          <a:noFill/>
+          <a:ln w="12698">
+            <a:solidFill>
+              <a:srgbClr val="D1D5DB"/>
+            </a:solidFill>
+          </a:ln>
+        </p:spPr>
+        <p:txBody>
+          <a:bodyPr wrap="square" rtlCol="0" anchor="ctr"/>
+          <a:lstStyle/>
+          <a:p>
+            <a:pPr indent="0" marL="0">
+              <a:buNone/>
+            </a:pPr>
+            <a:endParaRPr lang="en-US" dirty="0"/>
+          </a:p>
+        </p:txBody>
+      </p:sp>
+      <p:sp>
+        <p:nvSpPr>
+          <p:cNvPr id="14" name="Text 12"/>
+          <p:cNvSpPr/>
+          <p:nvPr/>
+        </p:nvSpPr>
+        <p:spPr>
+          <a:xfrm>
+            <a:off x="808232" y="4117777"/>
+            <a:ext cx="5016397" cy="331986"/>
+          </a:xfrm>
+          <a:prstGeom prst="rect">
+            <a:avLst/>
+          </a:prstGeom>
+          <a:noFill/>
+          <a:ln/>
+        </p:spPr>
+        <p:txBody>
+          <a:bodyPr wrap="square" lIns="0" tIns="0" rIns="0" bIns="0" rtlCol="0" anchor="t"/>
+          <a:lstStyle/>
+          <a:p>
+            <a:pPr algn="l" indent="0" marL="0">
+              <a:lnSpc>
+                <a:spcPts val="2613"/>
+              </a:lnSpc>
+              <a:spcAft>
+                <a:spcPts val="1200"/>
+              </a:spcAft>
+              <a:buNone/>
+            </a:pPr>
+            <a:r>
+              <a:rPr lang="en-US" sz="1866" b="1" dirty="0">
+                <a:solidFill>
+                  <a:srgbClr val="6B7280"/>
+                </a:solidFill>
+                <a:latin typeface="Arimo" pitchFamily="34" charset="0"/>
+                <a:ea typeface="Arimo" pitchFamily="34" charset="-122"/>
+                <a:cs typeface="Arimo" pitchFamily="34" charset="-120"/>
+              </a:rPr>
+              <a:t>03</a:t>
+            </a:r>
+            <a:endParaRPr lang="en-US" sz="1866" dirty="0"/>
+          </a:p>
+        </p:txBody>
+      </p:sp>
+      <p:sp>
+        <p:nvSpPr>
+          <p:cNvPr id="15" name="Text 13"/>
+          <p:cNvSpPr/>
+          <p:nvPr/>
+        </p:nvSpPr>
+        <p:spPr>
+          <a:xfrm>
+            <a:off x="808232" y="4602163"/>
+            <a:ext cx="5016397" cy="330200"/>
+          </a:xfrm>
+          <a:prstGeom prst="rect">
+            <a:avLst/>
+          </a:prstGeom>
+          <a:noFill/>
+          <a:ln/>
+        </p:spPr>
+        <p:txBody>
+          <a:bodyPr wrap="square" lIns="0" tIns="0" rIns="0" bIns="0" rtlCol="0" anchor="t"/>
+          <a:lstStyle/>
+          <a:p>
+            <a:pPr algn="l" indent="0" marL="0">
+              <a:lnSpc>
+                <a:spcPts val="2600"/>
+              </a:lnSpc>
+              <a:spcAft>
+                <a:spcPts val="933"/>
+              </a:spcAft>
+              <a:buNone/>
+            </a:pPr>
+            <a:r>
+              <a:rPr lang="en-US" sz="2000" b="1" dirty="0">
+                <a:solidFill>
+                  <a:srgbClr val="1A1A1A"/>
+                </a:solidFill>
+                <a:latin typeface="Arimo" pitchFamily="34" charset="0"/>
+                <a:ea typeface="Arimo" pitchFamily="34" charset="-122"/>
+                <a:cs typeface="Arimo" pitchFamily="34" charset="-120"/>
+              </a:rPr>
+              <a:t>What you will not build</a:t>
+            </a:r>
+            <a:endParaRPr lang="en-US" sz="2000" dirty="0"/>
+          </a:p>
+        </p:txBody>
+      </p:sp>
+      <p:sp>
+        <p:nvSpPr>
+          <p:cNvPr id="16" name="Text 14"/>
+          <p:cNvSpPr/>
+          <p:nvPr/>
+        </p:nvSpPr>
+        <p:spPr>
+          <a:xfrm>
+            <a:off x="808232" y="5050830"/>
+            <a:ext cx="5016397" cy="663972"/>
+          </a:xfrm>
+          <a:prstGeom prst="rect">
+            <a:avLst/>
+          </a:prstGeom>
+          <a:noFill/>
+          <a:ln/>
+        </p:spPr>
+        <p:txBody>
+          <a:bodyPr wrap="square" lIns="0" tIns="0" rIns="0" bIns="0" rtlCol="0" anchor="t"/>
+          <a:lstStyle/>
+          <a:p>
+            <a:pPr algn="l" indent="0" marL="0">
+              <a:lnSpc>
+                <a:spcPts val="2613"/>
+              </a:lnSpc>
+              <a:buNone/>
+            </a:pPr>
+            <a:r>
+              <a:rPr lang="en-US" sz="1866" dirty="0">
+                <a:solidFill>
+                  <a:srgbClr val="6B7280"/>
+                </a:solidFill>
+                <a:latin typeface="Arimo" pitchFamily="34" charset="0"/>
+                <a:ea typeface="Arimo" pitchFamily="34" charset="-122"/>
+                <a:cs typeface="Arimo" pitchFamily="34" charset="-120"/>
+              </a:rPr>
+              <a:t>Left open: the platform grows a bespoke everything.</a:t>
+            </a:r>
+            <a:endParaRPr lang="en-US" sz="1866" dirty="0"/>
+          </a:p>
+        </p:txBody>
+      </p:sp>
+      <p:sp>
+        <p:nvSpPr>
+          <p:cNvPr id="17" name="Text 15"/>
+          <p:cNvSpPr/>
+          <p:nvPr/>
+        </p:nvSpPr>
+        <p:spPr>
+          <a:xfrm>
+            <a:off x="6196051" y="3868142"/>
+            <a:ext cx="5451302" cy="2096294"/>
+          </a:xfrm>
+          <a:prstGeom prst="rect">
+            <a:avLst/>
+          </a:prstGeom>
+          <a:noFill/>
+          <a:ln w="12698">
+            <a:solidFill>
+              <a:srgbClr val="D1D5DB"/>
+            </a:solidFill>
+          </a:ln>
+        </p:spPr>
+        <p:txBody>
+          <a:bodyPr wrap="square" rtlCol="0" anchor="ctr"/>
+          <a:lstStyle/>
+          <a:p>
+            <a:pPr indent="0" marL="0">
+              <a:buNone/>
+            </a:pPr>
+            <a:endParaRPr lang="en-US" dirty="0"/>
+          </a:p>
+        </p:txBody>
+      </p:sp>
+      <p:sp>
+        <p:nvSpPr>
+          <p:cNvPr id="18" name="Text 16"/>
+          <p:cNvSpPr/>
+          <p:nvPr/>
+        </p:nvSpPr>
+        <p:spPr>
+          <a:xfrm>
+            <a:off x="6462684" y="4117777"/>
+            <a:ext cx="5016397" cy="331986"/>
+          </a:xfrm>
+          <a:prstGeom prst="rect">
+            <a:avLst/>
+          </a:prstGeom>
+          <a:noFill/>
+          <a:ln/>
+        </p:spPr>
+        <p:txBody>
+          <a:bodyPr wrap="square" lIns="0" tIns="0" rIns="0" bIns="0" rtlCol="0" anchor="t"/>
+          <a:lstStyle/>
+          <a:p>
+            <a:pPr algn="l" indent="0" marL="0">
+              <a:lnSpc>
+                <a:spcPts val="2613"/>
+              </a:lnSpc>
+              <a:spcAft>
+                <a:spcPts val="1200"/>
+              </a:spcAft>
+              <a:buNone/>
+            </a:pPr>
+            <a:r>
+              <a:rPr lang="en-US" sz="1866" b="1" dirty="0">
+                <a:solidFill>
+                  <a:srgbClr val="6B7280"/>
+                </a:solidFill>
+                <a:latin typeface="Arimo" pitchFamily="34" charset="0"/>
+                <a:ea typeface="Arimo" pitchFamily="34" charset="-122"/>
+                <a:cs typeface="Arimo" pitchFamily="34" charset="-120"/>
+              </a:rPr>
+              <a:t>04</a:t>
+            </a:r>
+            <a:endParaRPr lang="en-US" sz="1866" dirty="0"/>
+          </a:p>
+        </p:txBody>
+      </p:sp>
+      <p:sp>
+        <p:nvSpPr>
+          <p:cNvPr id="19" name="Text 17"/>
+          <p:cNvSpPr/>
+          <p:nvPr/>
+        </p:nvSpPr>
+        <p:spPr>
+          <a:xfrm>
+            <a:off x="6462684" y="4602163"/>
+            <a:ext cx="5016397" cy="330200"/>
+          </a:xfrm>
+          <a:prstGeom prst="rect">
+            <a:avLst/>
+          </a:prstGeom>
+          <a:noFill/>
+          <a:ln/>
+        </p:spPr>
+        <p:txBody>
+          <a:bodyPr wrap="square" lIns="0" tIns="0" rIns="0" bIns="0" rtlCol="0" anchor="t"/>
+          <a:lstStyle/>
+          <a:p>
+            <a:pPr algn="l" indent="0" marL="0">
+              <a:lnSpc>
+                <a:spcPts val="2600"/>
+              </a:lnSpc>
+              <a:spcAft>
+                <a:spcPts val="933"/>
+              </a:spcAft>
+              <a:buNone/>
+            </a:pPr>
+            <a:r>
+              <a:rPr lang="en-US" sz="2000" b="1" dirty="0">
+                <a:solidFill>
+                  <a:srgbClr val="1A1A1A"/>
+                </a:solidFill>
+                <a:latin typeface="Arimo" pitchFamily="34" charset="0"/>
+                <a:ea typeface="Arimo" pitchFamily="34" charset="-122"/>
+                <a:cs typeface="Arimo" pitchFamily="34" charset="-120"/>
+              </a:rPr>
+              <a:t>Who the first internal customer is</a:t>
+            </a:r>
+            <a:endParaRPr lang="en-US" sz="2000" dirty="0"/>
+          </a:p>
+        </p:txBody>
+      </p:sp>
+      <p:sp>
+        <p:nvSpPr>
+          <p:cNvPr id="20" name="Text 18"/>
+          <p:cNvSpPr/>
+          <p:nvPr/>
+        </p:nvSpPr>
+        <p:spPr>
+          <a:xfrm>
+            <a:off x="6462684" y="5050830"/>
+            <a:ext cx="5016397" cy="331986"/>
+          </a:xfrm>
+          <a:prstGeom prst="rect">
+            <a:avLst/>
+          </a:prstGeom>
+          <a:noFill/>
+          <a:ln/>
+        </p:spPr>
+        <p:txBody>
+          <a:bodyPr wrap="square" lIns="0" tIns="0" rIns="0" bIns="0" rtlCol="0" anchor="t"/>
+          <a:lstStyle/>
+          <a:p>
+            <a:pPr algn="l" indent="0" marL="0">
+              <a:lnSpc>
+                <a:spcPts val="2613"/>
+              </a:lnSpc>
+              <a:buNone/>
+            </a:pPr>
+            <a:r>
+              <a:rPr lang="en-US" sz="1866" dirty="0">
+                <a:solidFill>
+                  <a:srgbClr val="6B7280"/>
+                </a:solidFill>
+                <a:latin typeface="Arimo" pitchFamily="34" charset="0"/>
+                <a:ea typeface="Arimo" pitchFamily="34" charset="-122"/>
+                <a:cs typeface="Arimo" pitchFamily="34" charset="-120"/>
+              </a:rPr>
+              <a:t>Left open: the platform is designed for nobody.</a:t>
+            </a:r>
+            <a:endParaRPr lang="en-US" sz="1866" dirty="0"/>
+          </a:p>
+        </p:txBody>
+      </p:sp>
+      <p:sp>
+        <p:nvSpPr>
+          <p:cNvPr id="21" name="Text 19"/>
+          <p:cNvSpPr/>
+          <p:nvPr/>
+        </p:nvSpPr>
+        <p:spPr>
+          <a:xfrm>
+            <a:off x="319484" y="6113066"/>
+            <a:ext cx="11327869" cy="236934"/>
+          </a:xfrm>
+          <a:prstGeom prst="rect">
+            <a:avLst/>
+          </a:prstGeom>
+          <a:noFill/>
+          <a:ln/>
+        </p:spPr>
+        <p:txBody>
+          <a:bodyPr wrap="square" lIns="0" tIns="0" rIns="0" bIns="0" rtlCol="0" anchor="t"/>
+          <a:lstStyle/>
+          <a:p>
+            <a:pPr algn="r" indent="0" marL="0">
+              <a:lnSpc>
+                <a:spcPts val="1866"/>
+              </a:lnSpc>
+              <a:buNone/>
+            </a:pPr>
+            <a:r>
+              <a:rPr lang="en-US" sz="1333" dirty="0">
+                <a:solidFill>
+                  <a:srgbClr val="6B7280"/>
+                </a:solidFill>
+                <a:latin typeface="Arimo" pitchFamily="34" charset="0"/>
+                <a:ea typeface="Arimo" pitchFamily="34" charset="-122"/>
+                <a:cs typeface="Arimo" pitchFamily="34" charset="-120"/>
+              </a:rPr>
+              <a:t>MLOPS PLATFORM ROADMAP · SHEET 06/07 · NO EXTERNAL DATA CITED</a:t>
+            </a:r>
+            <a:endParaRPr lang="en-US" sz="1333" dirty="0"/>
+          </a:p>
+        </p:txBody>
+      </p:sp>
     </p:spTree>
   </p:cSld>
   <p:clrMapOvr>
@@ -1682,6 +7359,13 @@
 <file path=ppt/slides/slide7.xml><?xml version="1.0" encoding="utf-8"?>
 <p:sld xmlns:a="http://schemas.openxmlformats.org/drawingml/2006/main" xmlns:r="http://schemas.openxmlformats.org/officeDocument/2006/relationships" xmlns:p="http://schemas.openxmlformats.org/presentationml/2006/main">
   <p:cSld name="Slide 7">
+    <p:bg>
+      <p:bgPr>
+        <a:solidFill>
+          <a:srgbClr val="FFFFFF"/>
+        </a:solidFill>
+      </p:bgPr>
+    </p:bg>
     <p:spTree>
       <p:nvGrpSpPr>
         <p:cNvPr id="1" name=""/>
@@ -1696,30 +7380,642 @@
           <a:chExt cx="0" cy="0"/>
         </a:xfrm>
       </p:grpSpPr>
-      <p:pic>
-        <p:nvPicPr>
-          <p:cNvPr id="2" name="Image 0" descr="/tmp/slide-1787840567022-lj0ptgmc55.png">    </p:cNvPr>
-          <p:cNvPicPr>
-            <a:picLocks noChangeAspect="1"/>
-          </p:cNvPicPr>
-          <p:nvPr/>
-        </p:nvPicPr>
-        <p:blipFill>
-          <a:blip r:embed="rId1"/>
-          <a:stretch>
-            <a:fillRect/>
-          </a:stretch>
-        </p:blipFill>
-        <p:spPr>
-          <a:xfrm>
-            <a:off x="0" y="0"/>
-            <a:ext cx="12188952" cy="6858000"/>
-          </a:xfrm>
-          <a:prstGeom prst="rect">
-            <a:avLst/>
-          </a:prstGeom>
-        </p:spPr>
-      </p:pic>
+      <p:sp>
+        <p:nvSpPr>
+          <p:cNvPr id="2" name="Text 0"/>
+          <p:cNvSpPr/>
+          <p:nvPr/>
+        </p:nvSpPr>
+        <p:spPr>
+          <a:xfrm>
+            <a:off x="541599" y="484386"/>
+            <a:ext cx="11327869" cy="260747"/>
+          </a:xfrm>
+          <a:prstGeom prst="rect">
+            <a:avLst/>
+          </a:prstGeom>
+          <a:noFill/>
+          <a:ln/>
+        </p:spPr>
+        <p:txBody>
+          <a:bodyPr wrap="square" lIns="0" tIns="0" rIns="0" bIns="0" rtlCol="0" anchor="t"/>
+          <a:lstStyle/>
+          <a:p>
+            <a:pPr algn="l" indent="0" marL="0">
+              <a:lnSpc>
+                <a:spcPts val="2053"/>
+              </a:lnSpc>
+              <a:spcAft>
+                <a:spcPts val="933"/>
+              </a:spcAft>
+              <a:buNone/>
+            </a:pPr>
+            <a:r>
+              <a:rPr lang="en-US" sz="1466" b="1" dirty="0">
+                <a:solidFill>
+                  <a:srgbClr val="6B7280"/>
+                </a:solidFill>
+                <a:latin typeface="Arimo" pitchFamily="34" charset="0"/>
+                <a:ea typeface="Arimo" pitchFamily="34" charset="-122"/>
+                <a:cs typeface="Arimo" pitchFamily="34" charset="-120"/>
+              </a:rPr>
+              <a:t>DISCUSSION</a:t>
+            </a:r>
+            <a:endParaRPr lang="en-US" sz="1466" dirty="0"/>
+          </a:p>
+        </p:txBody>
+      </p:sp>
+      <p:sp>
+        <p:nvSpPr>
+          <p:cNvPr id="3" name="Text 1"/>
+          <p:cNvSpPr/>
+          <p:nvPr/>
+        </p:nvSpPr>
+        <p:spPr>
+          <a:xfrm>
+            <a:off x="541599" y="863600"/>
+            <a:ext cx="11327869" cy="423267"/>
+          </a:xfrm>
+          <a:prstGeom prst="rect">
+            <a:avLst/>
+          </a:prstGeom>
+          <a:noFill/>
+          <a:ln/>
+        </p:spPr>
+        <p:txBody>
+          <a:bodyPr wrap="square" lIns="0" tIns="0" rIns="0" bIns="0" rtlCol="0" anchor="t"/>
+          <a:lstStyle/>
+          <a:p>
+            <a:pPr algn="l" indent="0" marL="0">
+              <a:lnSpc>
+                <a:spcPts val="3333"/>
+              </a:lnSpc>
+              <a:buNone/>
+            </a:pPr>
+            <a:r>
+              <a:rPr lang="en-US" sz="2666" b="1" dirty="0">
+                <a:solidFill>
+                  <a:srgbClr val="1A1A1A"/>
+                </a:solidFill>
+                <a:latin typeface="Arimo" pitchFamily="34" charset="0"/>
+                <a:ea typeface="Arimo" pitchFamily="34" charset="-122"/>
+                <a:cs typeface="Arimo" pitchFamily="34" charset="-120"/>
+              </a:rPr>
+              <a:t>What we need to agree on before the first phase starts</a:t>
+            </a:r>
+            <a:endParaRPr lang="en-US" sz="2666" dirty="0"/>
+          </a:p>
+        </p:txBody>
+      </p:sp>
+      <p:sp>
+        <p:nvSpPr>
+          <p:cNvPr id="4" name="Text 2"/>
+          <p:cNvSpPr/>
+          <p:nvPr/>
+        </p:nvSpPr>
+        <p:spPr>
+          <a:xfrm>
+            <a:off x="541599" y="1286867"/>
+            <a:ext cx="11105754" cy="12700"/>
+          </a:xfrm>
+          <a:prstGeom prst="rect">
+            <a:avLst/>
+          </a:prstGeom>
+          <a:solidFill>
+            <a:srgbClr val="D1D5DB"/>
+          </a:solidFill>
+          <a:ln/>
+        </p:spPr>
+        <p:txBody>
+          <a:bodyPr wrap="square" rtlCol="0" anchor="ctr"/>
+          <a:lstStyle/>
+          <a:p>
+            <a:pPr indent="0" marL="0">
+              <a:buNone/>
+            </a:pPr>
+            <a:endParaRPr lang="en-US" dirty="0"/>
+          </a:p>
+        </p:txBody>
+      </p:sp>
+      <p:sp>
+        <p:nvSpPr>
+          <p:cNvPr id="5" name="Text 3"/>
+          <p:cNvSpPr/>
+          <p:nvPr/>
+        </p:nvSpPr>
+        <p:spPr>
+          <a:xfrm>
+            <a:off x="541599" y="1570434"/>
+            <a:ext cx="11105754" cy="3791545"/>
+          </a:xfrm>
+          <a:prstGeom prst="rect">
+            <a:avLst/>
+          </a:prstGeom>
+          <a:noFill/>
+          <a:ln/>
+        </p:spPr>
+        <p:txBody>
+          <a:bodyPr wrap="square" lIns="0" tIns="0" rIns="0" bIns="0" rtlCol="0" anchor="t"/>
+          <a:lstStyle/>
+          <a:p>
+            <a:pPr algn="l" marL="342900" indent="-342900">
+              <a:buSzPct val="100000"/>
+              <a:buChar char="•"/>
+            </a:pPr>
+            <a:r>
+              <a:rPr lang="en-US" sz="1600" dirty="0">
+                <a:solidFill>
+                  <a:srgbClr val="6B7280"/>
+                </a:solidFill>
+                <a:latin typeface="Arimo" pitchFamily="34" charset="0"/>
+                <a:ea typeface="Arimo" pitchFamily="34" charset="-122"/>
+                <a:cs typeface="Arimo" pitchFamily="34" charset="-120"/>
+              </a:rPr>
+              <a:t>01</a:t>
+            </a:r>
+            <a:pPr algn="l" indent="0" marL="0">
+              <a:buNone/>
+            </a:pPr>
+            <a:r>
+              <a:rPr lang="en-US" sz="1600" dirty="0">
+                <a:solidFill>
+                  <a:srgbClr val="1A1A1A"/>
+                </a:solidFill>
+                <a:latin typeface="Arimo" pitchFamily="34" charset="0"/>
+                <a:ea typeface="Arimo" pitchFamily="34" charset="-122"/>
+                <a:cs typeface="Arimo" pitchFamily="34" charset="-120"/>
+              </a:rPr>
+              <a:t>Which capability is actually blocking us today?</a:t>
+            </a:r>
+            <a:endParaRPr lang="en-US" sz="1600" dirty="0"/>
+          </a:p>
+          <a:p>
+            <a:pPr algn="l" marL="342900" indent="-342900">
+              <a:buSzPct val="100000"/>
+              <a:buChar char="•"/>
+            </a:pPr>
+            <a:r>
+              <a:rPr lang="en-US" sz="1600" dirty="0">
+                <a:solidFill>
+                  <a:srgbClr val="6B7280"/>
+                </a:solidFill>
+                <a:latin typeface="Arimo" pitchFamily="34" charset="0"/>
+                <a:ea typeface="Arimo" pitchFamily="34" charset="-122"/>
+                <a:cs typeface="Arimo" pitchFamily="34" charset="-120"/>
+              </a:rPr>
+              <a:t>02</a:t>
+            </a:r>
+            <a:pPr algn="l" indent="0" marL="0">
+              <a:buNone/>
+            </a:pPr>
+            <a:r>
+              <a:rPr lang="en-US" sz="1600" dirty="0">
+                <a:solidFill>
+                  <a:srgbClr val="1A1A1A"/>
+                </a:solidFill>
+                <a:latin typeface="Arimo" pitchFamily="34" charset="0"/>
+                <a:ea typeface="Arimo" pitchFamily="34" charset="-122"/>
+                <a:cs typeface="Arimo" pitchFamily="34" charset="-120"/>
+              </a:rPr>
+              <a:t>What is our exit criterion for phase 1, in one sentence?</a:t>
+            </a:r>
+            <a:endParaRPr lang="en-US" sz="1600" dirty="0"/>
+          </a:p>
+          <a:p>
+            <a:pPr algn="l" marL="342900" indent="-342900">
+              <a:buSzPct val="100000"/>
+              <a:buChar char="•"/>
+            </a:pPr>
+            <a:r>
+              <a:rPr lang="en-US" sz="1600" dirty="0">
+                <a:solidFill>
+                  <a:srgbClr val="6B7280"/>
+                </a:solidFill>
+                <a:latin typeface="Arimo" pitchFamily="34" charset="0"/>
+                <a:ea typeface="Arimo" pitchFamily="34" charset="-122"/>
+                <a:cs typeface="Arimo" pitchFamily="34" charset="-120"/>
+              </a:rPr>
+              <a:t>03</a:t>
+            </a:r>
+            <a:pPr algn="l" indent="0" marL="0">
+              <a:buNone/>
+            </a:pPr>
+            <a:r>
+              <a:rPr lang="en-US" sz="1600" dirty="0">
+                <a:solidFill>
+                  <a:srgbClr val="1A1A1A"/>
+                </a:solidFill>
+                <a:latin typeface="Arimo" pitchFamily="34" charset="0"/>
+                <a:ea typeface="Arimo" pitchFamily="34" charset="-122"/>
+                <a:cs typeface="Arimo" pitchFamily="34" charset="-120"/>
+              </a:rPr>
+              <a:t>Which layer are we genuinely differentiated in?</a:t>
+            </a:r>
+            <a:endParaRPr lang="en-US" sz="1600" dirty="0"/>
+          </a:p>
+        </p:txBody>
+      </p:sp>
+      <p:sp>
+        <p:nvSpPr>
+          <p:cNvPr id="6" name="Text 4"/>
+          <p:cNvSpPr/>
+          <p:nvPr/>
+        </p:nvSpPr>
+        <p:spPr>
+          <a:xfrm>
+            <a:off x="541599" y="2447528"/>
+            <a:ext cx="278441" cy="331986"/>
+          </a:xfrm>
+          <a:prstGeom prst="rect">
+            <a:avLst/>
+          </a:prstGeom>
+          <a:noFill/>
+          <a:ln/>
+        </p:spPr>
+        <p:txBody>
+          <a:bodyPr wrap="square" lIns="0" tIns="0" rIns="0" bIns="0" rtlCol="0" anchor="t"/>
+          <a:lstStyle/>
+          <a:p>
+            <a:pPr algn="l" indent="0" marL="0">
+              <a:lnSpc>
+                <a:spcPts val="2613"/>
+              </a:lnSpc>
+              <a:buNone/>
+            </a:pPr>
+            <a:r>
+              <a:rPr lang="en-US" sz="1866" b="1" dirty="0">
+                <a:solidFill>
+                  <a:srgbClr val="6B7280"/>
+                </a:solidFill>
+                <a:latin typeface="Arimo" pitchFamily="34" charset="0"/>
+                <a:ea typeface="Arimo" pitchFamily="34" charset="-122"/>
+                <a:cs typeface="Arimo" pitchFamily="34" charset="-120"/>
+              </a:rPr>
+              <a:t>01</a:t>
+            </a:r>
+            <a:endParaRPr lang="en-US" sz="1866" dirty="0"/>
+          </a:p>
+        </p:txBody>
+      </p:sp>
+      <p:sp>
+        <p:nvSpPr>
+          <p:cNvPr id="7" name="Text 5"/>
+          <p:cNvSpPr/>
+          <p:nvPr/>
+        </p:nvSpPr>
+        <p:spPr>
+          <a:xfrm>
+            <a:off x="1119304" y="2396728"/>
+            <a:ext cx="6009153" cy="388541"/>
+          </a:xfrm>
+          <a:prstGeom prst="rect">
+            <a:avLst/>
+          </a:prstGeom>
+          <a:noFill/>
+          <a:ln/>
+        </p:spPr>
+        <p:txBody>
+          <a:bodyPr wrap="square" lIns="0" tIns="0" rIns="0" bIns="0" rtlCol="0" anchor="t"/>
+          <a:lstStyle/>
+          <a:p>
+            <a:pPr algn="l" indent="0" marL="0">
+              <a:lnSpc>
+                <a:spcPts val="3060"/>
+              </a:lnSpc>
+              <a:buNone/>
+            </a:pPr>
+            <a:r>
+              <a:rPr lang="en-US" sz="2266" dirty="0">
+                <a:solidFill>
+                  <a:srgbClr val="1A1A1A"/>
+                </a:solidFill>
+                <a:latin typeface="Arimo" pitchFamily="34" charset="0"/>
+                <a:ea typeface="Arimo" pitchFamily="34" charset="-122"/>
+                <a:cs typeface="Arimo" pitchFamily="34" charset="-120"/>
+              </a:rPr>
+              <a:t>Which capability is actually blocking us today?</a:t>
+            </a:r>
+            <a:endParaRPr lang="en-US" sz="2266" dirty="0"/>
+          </a:p>
+        </p:txBody>
+      </p:sp>
+      <p:sp>
+        <p:nvSpPr>
+          <p:cNvPr id="8" name="Text 6"/>
+          <p:cNvSpPr/>
+          <p:nvPr/>
+        </p:nvSpPr>
+        <p:spPr>
+          <a:xfrm>
+            <a:off x="541599" y="3322638"/>
+            <a:ext cx="278441" cy="331986"/>
+          </a:xfrm>
+          <a:prstGeom prst="rect">
+            <a:avLst/>
+          </a:prstGeom>
+          <a:noFill/>
+          <a:ln/>
+        </p:spPr>
+        <p:txBody>
+          <a:bodyPr wrap="square" lIns="0" tIns="0" rIns="0" bIns="0" rtlCol="0" anchor="t"/>
+          <a:lstStyle/>
+          <a:p>
+            <a:pPr algn="l" indent="0" marL="0">
+              <a:lnSpc>
+                <a:spcPts val="2613"/>
+              </a:lnSpc>
+              <a:buNone/>
+            </a:pPr>
+            <a:r>
+              <a:rPr lang="en-US" sz="1866" b="1" dirty="0">
+                <a:solidFill>
+                  <a:srgbClr val="6B7280"/>
+                </a:solidFill>
+                <a:latin typeface="Arimo" pitchFamily="34" charset="0"/>
+                <a:ea typeface="Arimo" pitchFamily="34" charset="-122"/>
+                <a:cs typeface="Arimo" pitchFamily="34" charset="-120"/>
+              </a:rPr>
+              <a:t>02</a:t>
+            </a:r>
+            <a:endParaRPr lang="en-US" sz="1866" dirty="0"/>
+          </a:p>
+        </p:txBody>
+      </p:sp>
+      <p:sp>
+        <p:nvSpPr>
+          <p:cNvPr id="9" name="Text 7"/>
+          <p:cNvSpPr/>
+          <p:nvPr/>
+        </p:nvSpPr>
+        <p:spPr>
+          <a:xfrm>
+            <a:off x="1119304" y="3271838"/>
+            <a:ext cx="7148820" cy="388541"/>
+          </a:xfrm>
+          <a:prstGeom prst="rect">
+            <a:avLst/>
+          </a:prstGeom>
+          <a:noFill/>
+          <a:ln/>
+        </p:spPr>
+        <p:txBody>
+          <a:bodyPr wrap="square" lIns="0" tIns="0" rIns="0" bIns="0" rtlCol="0" anchor="t"/>
+          <a:lstStyle/>
+          <a:p>
+            <a:pPr algn="l" indent="0" marL="0">
+              <a:lnSpc>
+                <a:spcPts val="3060"/>
+              </a:lnSpc>
+              <a:buNone/>
+            </a:pPr>
+            <a:r>
+              <a:rPr lang="en-US" sz="2266" dirty="0">
+                <a:solidFill>
+                  <a:srgbClr val="1A1A1A"/>
+                </a:solidFill>
+                <a:latin typeface="Arimo" pitchFamily="34" charset="0"/>
+                <a:ea typeface="Arimo" pitchFamily="34" charset="-122"/>
+                <a:cs typeface="Arimo" pitchFamily="34" charset="-120"/>
+              </a:rPr>
+              <a:t>What is our exit criterion for phase 1, in one sentence?</a:t>
+            </a:r>
+            <a:endParaRPr lang="en-US" sz="2266" dirty="0"/>
+          </a:p>
+        </p:txBody>
+      </p:sp>
+      <p:sp>
+        <p:nvSpPr>
+          <p:cNvPr id="10" name="Text 8"/>
+          <p:cNvSpPr/>
+          <p:nvPr/>
+        </p:nvSpPr>
+        <p:spPr>
+          <a:xfrm>
+            <a:off x="541599" y="4197747"/>
+            <a:ext cx="278441" cy="331986"/>
+          </a:xfrm>
+          <a:prstGeom prst="rect">
+            <a:avLst/>
+          </a:prstGeom>
+          <a:noFill/>
+          <a:ln/>
+        </p:spPr>
+        <p:txBody>
+          <a:bodyPr wrap="square" lIns="0" tIns="0" rIns="0" bIns="0" rtlCol="0" anchor="t"/>
+          <a:lstStyle/>
+          <a:p>
+            <a:pPr algn="l" indent="0" marL="0">
+              <a:lnSpc>
+                <a:spcPts val="2613"/>
+              </a:lnSpc>
+              <a:buNone/>
+            </a:pPr>
+            <a:r>
+              <a:rPr lang="en-US" sz="1866" b="1" dirty="0">
+                <a:solidFill>
+                  <a:srgbClr val="6B7280"/>
+                </a:solidFill>
+                <a:latin typeface="Arimo" pitchFamily="34" charset="0"/>
+                <a:ea typeface="Arimo" pitchFamily="34" charset="-122"/>
+                <a:cs typeface="Arimo" pitchFamily="34" charset="-120"/>
+              </a:rPr>
+              <a:t>03</a:t>
+            </a:r>
+            <a:endParaRPr lang="en-US" sz="1866" dirty="0"/>
+          </a:p>
+        </p:txBody>
+      </p:sp>
+      <p:sp>
+        <p:nvSpPr>
+          <p:cNvPr id="11" name="Text 9"/>
+          <p:cNvSpPr/>
+          <p:nvPr/>
+        </p:nvSpPr>
+        <p:spPr>
+          <a:xfrm>
+            <a:off x="1119304" y="4146947"/>
+            <a:ext cx="6151612" cy="388541"/>
+          </a:xfrm>
+          <a:prstGeom prst="rect">
+            <a:avLst/>
+          </a:prstGeom>
+          <a:noFill/>
+          <a:ln/>
+        </p:spPr>
+        <p:txBody>
+          <a:bodyPr wrap="square" lIns="0" tIns="0" rIns="0" bIns="0" rtlCol="0" anchor="t"/>
+          <a:lstStyle/>
+          <a:p>
+            <a:pPr algn="l" indent="0" marL="0">
+              <a:lnSpc>
+                <a:spcPts val="3060"/>
+              </a:lnSpc>
+              <a:buNone/>
+            </a:pPr>
+            <a:r>
+              <a:rPr lang="en-US" sz="2266" dirty="0">
+                <a:solidFill>
+                  <a:srgbClr val="1A1A1A"/>
+                </a:solidFill>
+                <a:latin typeface="Arimo" pitchFamily="34" charset="0"/>
+                <a:ea typeface="Arimo" pitchFamily="34" charset="-122"/>
+                <a:cs typeface="Arimo" pitchFamily="34" charset="-120"/>
+              </a:rPr>
+              <a:t>Which layer are we genuinely differentiated in?</a:t>
+            </a:r>
+            <a:endParaRPr lang="en-US" sz="2266" dirty="0"/>
+          </a:p>
+        </p:txBody>
+      </p:sp>
+      <p:sp>
+        <p:nvSpPr>
+          <p:cNvPr id="12" name="Shape 10"/>
+          <p:cNvSpPr/>
+          <p:nvPr/>
+        </p:nvSpPr>
+        <p:spPr>
+          <a:xfrm>
+            <a:off x="541599" y="5368330"/>
+            <a:ext cx="11105754" cy="0"/>
+          </a:xfrm>
+          <a:prstGeom prst="line">
+            <a:avLst/>
+          </a:prstGeom>
+          <a:noFill/>
+          <a:ln w="12698">
+            <a:solidFill>
+              <a:srgbClr val="D1D5DB"/>
+            </a:solidFill>
+            <a:prstDash val="solid"/>
+          </a:ln>
+        </p:spPr>
+      </p:sp>
+      <p:sp>
+        <p:nvSpPr>
+          <p:cNvPr id="13" name="Text 11"/>
+          <p:cNvSpPr/>
+          <p:nvPr/>
+        </p:nvSpPr>
+        <p:spPr>
+          <a:xfrm>
+            <a:off x="541599" y="5577880"/>
+            <a:ext cx="1165569" cy="331986"/>
+          </a:xfrm>
+          <a:prstGeom prst="rect">
+            <a:avLst/>
+          </a:prstGeom>
+          <a:noFill/>
+          <a:ln/>
+        </p:spPr>
+        <p:txBody>
+          <a:bodyPr wrap="square" lIns="0" tIns="0" rIns="0" bIns="0" rtlCol="0" anchor="t"/>
+          <a:lstStyle/>
+          <a:p>
+            <a:pPr algn="l" indent="0" marL="0">
+              <a:lnSpc>
+                <a:spcPts val="2613"/>
+              </a:lnSpc>
+              <a:buNone/>
+            </a:pPr>
+            <a:r>
+              <a:rPr lang="en-US" sz="1866" b="1" dirty="0">
+                <a:solidFill>
+                  <a:srgbClr val="1A1A1A"/>
+                </a:solidFill>
+                <a:latin typeface="Arimo" pitchFamily="34" charset="0"/>
+                <a:ea typeface="Arimo" pitchFamily="34" charset="-122"/>
+                <a:cs typeface="Arimo" pitchFamily="34" charset="-120"/>
+              </a:rPr>
+              <a:t>Thank you</a:t>
+            </a:r>
+            <a:endParaRPr lang="en-US" sz="1866" dirty="0"/>
+          </a:p>
+        </p:txBody>
+      </p:sp>
+      <p:sp>
+        <p:nvSpPr>
+          <p:cNvPr id="14" name="Text 12"/>
+          <p:cNvSpPr/>
+          <p:nvPr/>
+        </p:nvSpPr>
+        <p:spPr>
+          <a:xfrm>
+            <a:off x="9542458" y="5628680"/>
+            <a:ext cx="2146993" cy="260747"/>
+          </a:xfrm>
+          <a:prstGeom prst="rect">
+            <a:avLst/>
+          </a:prstGeom>
+          <a:noFill/>
+          <a:ln/>
+        </p:spPr>
+        <p:txBody>
+          <a:bodyPr wrap="square" lIns="0" tIns="0" rIns="0" bIns="0" rtlCol="0" anchor="t"/>
+          <a:lstStyle/>
+          <a:p>
+            <a:pPr algn="l" indent="0" marL="0">
+              <a:lnSpc>
+                <a:spcPts val="2053"/>
+              </a:lnSpc>
+              <a:buNone/>
+            </a:pPr>
+            <a:r>
+              <a:rPr lang="en-US" sz="1466" b="1" dirty="0">
+                <a:solidFill>
+                  <a:srgbClr val="6B7280"/>
+                </a:solidFill>
+                <a:latin typeface="Arimo" pitchFamily="34" charset="0"/>
+                <a:ea typeface="Arimo" pitchFamily="34" charset="-122"/>
+                <a:cs typeface="Arimo" pitchFamily="34" charset="-120"/>
+              </a:rPr>
+              <a:t>PRESENTER · TEAM</a:t>
+            </a:r>
+            <a:endParaRPr lang="en-US" sz="1466" dirty="0"/>
+          </a:p>
+        </p:txBody>
+      </p:sp>
+      <p:sp>
+        <p:nvSpPr>
+          <p:cNvPr id="15" name="Text 13"/>
+          <p:cNvSpPr/>
+          <p:nvPr/>
+        </p:nvSpPr>
+        <p:spPr>
+          <a:xfrm>
+            <a:off x="319484" y="6113066"/>
+            <a:ext cx="11327869" cy="236934"/>
+          </a:xfrm>
+          <a:prstGeom prst="rect">
+            <a:avLst/>
+          </a:prstGeom>
+          <a:noFill/>
+          <a:ln/>
+        </p:spPr>
+        <p:txBody>
+          <a:bodyPr wrap="square" lIns="0" tIns="0" rIns="0" bIns="0" rtlCol="0" anchor="t"/>
+          <a:lstStyle/>
+          <a:p>
+            <a:pPr algn="r" indent="0" marL="0">
+              <a:lnSpc>
+                <a:spcPts val="1866"/>
+              </a:lnSpc>
+              <a:buNone/>
+            </a:pPr>
+            <a:r>
+              <a:rPr lang="en-US" sz="1333" dirty="0">
+                <a:solidFill>
+                  <a:srgbClr val="6B7280"/>
+                </a:solidFill>
+                <a:latin typeface="Arimo" pitchFamily="34" charset="0"/>
+                <a:ea typeface="Arimo" pitchFamily="34" charset="-122"/>
+                <a:cs typeface="Arimo" pitchFamily="34" charset="-120"/>
+              </a:rPr>
+              <a:t>MLOPS PLATFORM ROADMAP · SHEET 07/07 · NO EXTERNAL DATA CITED</a:t>
+            </a:r>
+            <a:endParaRPr lang="en-US" sz="1333" dirty="0"/>
+          </a:p>
+        </p:txBody>
+      </p:sp>
     </p:spTree>
   </p:cSld>
   <p:clrMapOvr>

--- a/decks/mlops-platform/mlops-platform.pptx
+++ b/decks/mlops-platform/mlops-platform.pptx
@@ -1427,7 +1427,7 @@
           <a:ln/>
         </p:spPr>
         <p:txBody>
-          <a:bodyPr wrap="square" lIns="0" tIns="0" rIns="0" bIns="0" rtlCol="0" anchor="t"/>
+          <a:bodyPr wrap="none" lIns="0" tIns="0" rIns="0" bIns="0" rtlCol="0" anchor="t"/>
           <a:lstStyle/>
           <a:p>
             <a:pPr algn="l" indent="0" marL="0">
@@ -1472,7 +1472,7 @@
           <a:ln/>
         </p:spPr>
         <p:txBody>
-          <a:bodyPr wrap="square" lIns="0" tIns="0" rIns="0" bIns="0" rtlCol="0" anchor="t"/>
+          <a:bodyPr wrap="none" lIns="0" tIns="0" rIns="0" bIns="0" rtlCol="0" anchor="t"/>
           <a:lstStyle/>
           <a:p>
             <a:pPr algn="l" indent="0" marL="0">
@@ -1574,7 +1574,9 @@
           <a:ln/>
         </p:spPr>
         <p:txBody>
-          <a:bodyPr wrap="square" lIns="0" tIns="0" rIns="0" bIns="0" rtlCol="0" anchor="t"/>
+          <a:bodyPr wrap="square" lIns="0" tIns="0" rIns="0" bIns="0" rtlCol="0" anchor="t">
+            <a:normAutofit/>
+          </a:bodyPr>
           <a:lstStyle/>
           <a:p>
             <a:pPr algn="l" indent="0" marL="0">
@@ -1640,6 +1642,10 @@
             <a:prstDash val="solid"/>
           </a:ln>
         </p:spPr>
+        <p:txBody>
+          <a:bodyPr/>
+          <a:p/>
+        </p:txBody>
       </p:sp>
       <p:sp>
         <p:nvSpPr>
@@ -1659,7 +1665,7 @@
           <a:ln/>
         </p:spPr>
         <p:txBody>
-          <a:bodyPr wrap="square" lIns="0" tIns="0" rIns="0" bIns="0" rtlCol="0" anchor="t"/>
+          <a:bodyPr wrap="none" lIns="0" tIns="0" rIns="0" bIns="0" rtlCol="0" anchor="t"/>
           <a:lstStyle/>
           <a:p>
             <a:pPr algn="l" indent="0" marL="0">
@@ -1704,7 +1710,7 @@
           <a:ln/>
         </p:spPr>
         <p:txBody>
-          <a:bodyPr wrap="square" lIns="0" tIns="0" rIns="0" bIns="0" rtlCol="0" anchor="t"/>
+          <a:bodyPr wrap="none" lIns="0" tIns="0" rIns="0" bIns="0" rtlCol="0" anchor="t"/>
           <a:lstStyle/>
           <a:p>
             <a:pPr algn="l" indent="0" marL="0">
@@ -1746,7 +1752,7 @@
           <a:ln/>
         </p:spPr>
         <p:txBody>
-          <a:bodyPr wrap="square" lIns="0" tIns="0" rIns="0" bIns="0" rtlCol="0" anchor="t"/>
+          <a:bodyPr wrap="none" lIns="0" tIns="0" rIns="0" bIns="0" rtlCol="0" anchor="t"/>
           <a:lstStyle/>
           <a:p>
             <a:pPr algn="l" indent="0" marL="0">
@@ -1791,7 +1797,7 @@
           <a:ln/>
         </p:spPr>
         <p:txBody>
-          <a:bodyPr wrap="square" lIns="0" tIns="0" rIns="0" bIns="0" rtlCol="0" anchor="t"/>
+          <a:bodyPr wrap="none" lIns="0" tIns="0" rIns="0" bIns="0" rtlCol="0" anchor="t"/>
           <a:lstStyle/>
           <a:p>
             <a:pPr algn="l" indent="0" marL="0">
@@ -1833,7 +1839,7 @@
           <a:ln/>
         </p:spPr>
         <p:txBody>
-          <a:bodyPr wrap="square" lIns="0" tIns="0" rIns="0" bIns="0" rtlCol="0" anchor="t"/>
+          <a:bodyPr wrap="none" lIns="0" tIns="0" rIns="0" bIns="0" rtlCol="0" anchor="t"/>
           <a:lstStyle/>
           <a:p>
             <a:pPr algn="l" indent="0" marL="0">
@@ -1878,7 +1884,7 @@
           <a:ln/>
         </p:spPr>
         <p:txBody>
-          <a:bodyPr wrap="square" lIns="0" tIns="0" rIns="0" bIns="0" rtlCol="0" anchor="t"/>
+          <a:bodyPr wrap="none" lIns="0" tIns="0" rIns="0" bIns="0" rtlCol="0" anchor="t"/>
           <a:lstStyle/>
           <a:p>
             <a:pPr algn="l" indent="0" marL="0">
@@ -1920,7 +1926,7 @@
           <a:ln/>
         </p:spPr>
         <p:txBody>
-          <a:bodyPr wrap="square" lIns="0" tIns="0" rIns="0" bIns="0" rtlCol="0" anchor="t"/>
+          <a:bodyPr wrap="none" lIns="0" tIns="0" rIns="0" bIns="0" rtlCol="0" anchor="t"/>
           <a:lstStyle/>
           <a:p>
             <a:pPr algn="r" indent="0" marL="0">
@@ -1994,7 +2000,7 @@
           <a:ln/>
         </p:spPr>
         <p:txBody>
-          <a:bodyPr wrap="square" lIns="0" tIns="0" rIns="0" bIns="0" rtlCol="0" anchor="t"/>
+          <a:bodyPr wrap="none" lIns="0" tIns="0" rIns="0" bIns="0" rtlCol="0" anchor="t"/>
           <a:lstStyle/>
           <a:p>
             <a:pPr algn="l" indent="0" marL="0">
@@ -2039,7 +2045,7 @@
           <a:ln/>
         </p:spPr>
         <p:txBody>
-          <a:bodyPr wrap="square" lIns="0" tIns="0" rIns="0" bIns="0" rtlCol="0" anchor="t"/>
+          <a:bodyPr wrap="none" lIns="0" tIns="0" rIns="0" bIns="0" rtlCol="0" anchor="t"/>
           <a:lstStyle/>
           <a:p>
             <a:pPr algn="l" indent="0" marL="0">
@@ -2143,7 +2149,7 @@
           <a:ln/>
         </p:spPr>
         <p:txBody>
-          <a:bodyPr wrap="square" lIns="0" tIns="0" rIns="0" bIns="0" rtlCol="0" anchor="t"/>
+          <a:bodyPr wrap="none" lIns="0" tIns="0" rIns="0" bIns="0" rtlCol="0" anchor="t"/>
           <a:lstStyle/>
           <a:p>
             <a:pPr algn="l" indent="0" marL="0">
@@ -2188,7 +2194,9 @@
           <a:ln/>
         </p:spPr>
         <p:txBody>
-          <a:bodyPr wrap="square" lIns="0" tIns="0" rIns="0" bIns="0" rtlCol="0" anchor="t"/>
+          <a:bodyPr wrap="square" lIns="0" tIns="0" rIns="0" bIns="0" rtlCol="0" anchor="t">
+            <a:normAutofit/>
+          </a:bodyPr>
           <a:lstStyle/>
           <a:p>
             <a:pPr algn="l" indent="0" marL="0">
@@ -2233,7 +2241,9 @@
           <a:ln/>
         </p:spPr>
         <p:txBody>
-          <a:bodyPr wrap="square" lIns="0" tIns="0" rIns="0" bIns="0" rtlCol="0" anchor="t"/>
+          <a:bodyPr wrap="square" lIns="0" tIns="0" rIns="0" bIns="0" rtlCol="0" anchor="t">
+            <a:normAutofit/>
+          </a:bodyPr>
           <a:lstStyle/>
           <a:p>
             <a:pPr algn="l" indent="0" marL="0">
@@ -2307,7 +2317,7 @@
           <a:ln/>
         </p:spPr>
         <p:txBody>
-          <a:bodyPr wrap="square" lIns="0" tIns="0" rIns="0" bIns="0" rtlCol="0" anchor="t"/>
+          <a:bodyPr wrap="none" lIns="0" tIns="0" rIns="0" bIns="0" rtlCol="0" anchor="t"/>
           <a:lstStyle/>
           <a:p>
             <a:pPr algn="l" indent="0" marL="0">
@@ -2352,7 +2362,9 @@
           <a:ln/>
         </p:spPr>
         <p:txBody>
-          <a:bodyPr wrap="square" lIns="0" tIns="0" rIns="0" bIns="0" rtlCol="0" anchor="t"/>
+          <a:bodyPr wrap="square" lIns="0" tIns="0" rIns="0" bIns="0" rtlCol="0" anchor="t">
+            <a:normAutofit/>
+          </a:bodyPr>
           <a:lstStyle/>
           <a:p>
             <a:pPr algn="l" indent="0" marL="0">
@@ -2397,7 +2409,9 @@
           <a:ln/>
         </p:spPr>
         <p:txBody>
-          <a:bodyPr wrap="square" lIns="0" tIns="0" rIns="0" bIns="0" rtlCol="0" anchor="t"/>
+          <a:bodyPr wrap="square" lIns="0" tIns="0" rIns="0" bIns="0" rtlCol="0" anchor="t">
+            <a:normAutofit/>
+          </a:bodyPr>
           <a:lstStyle/>
           <a:p>
             <a:pPr algn="l" indent="0" marL="0">
@@ -2471,7 +2485,7 @@
           <a:ln/>
         </p:spPr>
         <p:txBody>
-          <a:bodyPr wrap="square" lIns="0" tIns="0" rIns="0" bIns="0" rtlCol="0" anchor="t"/>
+          <a:bodyPr wrap="none" lIns="0" tIns="0" rIns="0" bIns="0" rtlCol="0" anchor="t"/>
           <a:lstStyle/>
           <a:p>
             <a:pPr algn="l" indent="0" marL="0">
@@ -2516,7 +2530,9 @@
           <a:ln/>
         </p:spPr>
         <p:txBody>
-          <a:bodyPr wrap="square" lIns="0" tIns="0" rIns="0" bIns="0" rtlCol="0" anchor="t"/>
+          <a:bodyPr wrap="square" lIns="0" tIns="0" rIns="0" bIns="0" rtlCol="0" anchor="t">
+            <a:normAutofit/>
+          </a:bodyPr>
           <a:lstStyle/>
           <a:p>
             <a:pPr algn="l" indent="0" marL="0">
@@ -2561,7 +2577,9 @@
           <a:ln/>
         </p:spPr>
         <p:txBody>
-          <a:bodyPr wrap="square" lIns="0" tIns="0" rIns="0" bIns="0" rtlCol="0" anchor="t"/>
+          <a:bodyPr wrap="square" lIns="0" tIns="0" rIns="0" bIns="0" rtlCol="0" anchor="t">
+            <a:normAutofit/>
+          </a:bodyPr>
           <a:lstStyle/>
           <a:p>
             <a:pPr algn="l" indent="0" marL="0">
@@ -2635,7 +2653,7 @@
           <a:ln/>
         </p:spPr>
         <p:txBody>
-          <a:bodyPr wrap="square" lIns="0" tIns="0" rIns="0" bIns="0" rtlCol="0" anchor="t"/>
+          <a:bodyPr wrap="none" lIns="0" tIns="0" rIns="0" bIns="0" rtlCol="0" anchor="t"/>
           <a:lstStyle/>
           <a:p>
             <a:pPr algn="l" indent="0" marL="0">
@@ -2680,7 +2698,9 @@
           <a:ln/>
         </p:spPr>
         <p:txBody>
-          <a:bodyPr wrap="square" lIns="0" tIns="0" rIns="0" bIns="0" rtlCol="0" anchor="t"/>
+          <a:bodyPr wrap="square" lIns="0" tIns="0" rIns="0" bIns="0" rtlCol="0" anchor="t">
+            <a:normAutofit/>
+          </a:bodyPr>
           <a:lstStyle/>
           <a:p>
             <a:pPr algn="l" indent="0" marL="0">
@@ -2725,7 +2745,9 @@
           <a:ln/>
         </p:spPr>
         <p:txBody>
-          <a:bodyPr wrap="square" lIns="0" tIns="0" rIns="0" bIns="0" rtlCol="0" anchor="t"/>
+          <a:bodyPr wrap="square" lIns="0" tIns="0" rIns="0" bIns="0" rtlCol="0" anchor="t">
+            <a:normAutofit/>
+          </a:bodyPr>
           <a:lstStyle/>
           <a:p>
             <a:pPr algn="l" indent="0" marL="0">
@@ -2767,7 +2789,7 @@
           <a:ln/>
         </p:spPr>
         <p:txBody>
-          <a:bodyPr wrap="square" lIns="0" tIns="0" rIns="0" bIns="0" rtlCol="0" anchor="t"/>
+          <a:bodyPr wrap="none" lIns="0" tIns="0" rIns="0" bIns="0" rtlCol="0" anchor="t"/>
           <a:lstStyle/>
           <a:p>
             <a:pPr algn="l" indent="0" marL="0">
@@ -2812,7 +2834,7 @@
           <a:ln/>
         </p:spPr>
         <p:txBody>
-          <a:bodyPr wrap="square" lIns="0" tIns="0" rIns="0" bIns="0" rtlCol="0" anchor="t"/>
+          <a:bodyPr wrap="none" lIns="0" tIns="0" rIns="0" bIns="0" rtlCol="0" anchor="t"/>
           <a:lstStyle/>
           <a:p>
             <a:pPr algn="r" indent="0" marL="0">
@@ -2886,7 +2908,7 @@
           <a:ln/>
         </p:spPr>
         <p:txBody>
-          <a:bodyPr wrap="square" lIns="0" tIns="0" rIns="0" bIns="0" rtlCol="0" anchor="t"/>
+          <a:bodyPr wrap="none" lIns="0" tIns="0" rIns="0" bIns="0" rtlCol="0" anchor="t"/>
           <a:lstStyle/>
           <a:p>
             <a:pPr algn="l" indent="0" marL="0">
@@ -2931,7 +2953,7 @@
           <a:ln/>
         </p:spPr>
         <p:txBody>
-          <a:bodyPr wrap="square" lIns="0" tIns="0" rIns="0" bIns="0" rtlCol="0" anchor="t"/>
+          <a:bodyPr wrap="none" lIns="0" tIns="0" rIns="0" bIns="0" rtlCol="0" anchor="t"/>
           <a:lstStyle/>
           <a:p>
             <a:pPr algn="l" indent="0" marL="0">
@@ -3035,7 +3057,7 @@
           <a:ln/>
         </p:spPr>
         <p:txBody>
-          <a:bodyPr wrap="square" lIns="0" tIns="0" rIns="0" bIns="0" rtlCol="0" anchor="t"/>
+          <a:bodyPr wrap="none" lIns="0" tIns="0" rIns="0" bIns="0" rtlCol="0" anchor="t"/>
           <a:lstStyle/>
           <a:p>
             <a:pPr algn="l" indent="0" marL="0">
@@ -3080,7 +3102,7 @@
           <a:ln/>
         </p:spPr>
         <p:txBody>
-          <a:bodyPr wrap="square" lIns="0" tIns="0" rIns="0" bIns="0" rtlCol="0" anchor="t"/>
+          <a:bodyPr wrap="none" lIns="0" tIns="0" rIns="0" bIns="0" rtlCol="0" anchor="t"/>
           <a:lstStyle/>
           <a:p>
             <a:pPr algn="l" indent="0" marL="0">
@@ -3125,7 +3147,9 @@
           <a:ln/>
         </p:spPr>
         <p:txBody>
-          <a:bodyPr wrap="square" lIns="0" tIns="0" rIns="0" bIns="0" rtlCol="0" anchor="t"/>
+          <a:bodyPr wrap="square" lIns="0" tIns="0" rIns="0" bIns="0" rtlCol="0" anchor="t">
+            <a:normAutofit/>
+          </a:bodyPr>
           <a:lstStyle/>
           <a:p>
             <a:pPr algn="l" indent="0" marL="0">
@@ -3199,7 +3223,7 @@
           <a:ln/>
         </p:spPr>
         <p:txBody>
-          <a:bodyPr wrap="square" lIns="0" tIns="0" rIns="0" bIns="0" rtlCol="0" anchor="t"/>
+          <a:bodyPr wrap="none" lIns="0" tIns="0" rIns="0" bIns="0" rtlCol="0" anchor="t"/>
           <a:lstStyle/>
           <a:p>
             <a:pPr algn="l" indent="0" marL="0">
@@ -3244,7 +3268,7 @@
           <a:ln/>
         </p:spPr>
         <p:txBody>
-          <a:bodyPr wrap="square" lIns="0" tIns="0" rIns="0" bIns="0" rtlCol="0" anchor="t"/>
+          <a:bodyPr wrap="none" lIns="0" tIns="0" rIns="0" bIns="0" rtlCol="0" anchor="t"/>
           <a:lstStyle/>
           <a:p>
             <a:pPr algn="l" indent="0" marL="0">
@@ -3289,7 +3313,9 @@
           <a:ln/>
         </p:spPr>
         <p:txBody>
-          <a:bodyPr wrap="square" lIns="0" tIns="0" rIns="0" bIns="0" rtlCol="0" anchor="t"/>
+          <a:bodyPr wrap="square" lIns="0" tIns="0" rIns="0" bIns="0" rtlCol="0" anchor="t">
+            <a:normAutofit/>
+          </a:bodyPr>
           <a:lstStyle/>
           <a:p>
             <a:pPr algn="l" indent="0" marL="0">
@@ -3363,7 +3389,7 @@
           <a:ln/>
         </p:spPr>
         <p:txBody>
-          <a:bodyPr wrap="square" lIns="0" tIns="0" rIns="0" bIns="0" rtlCol="0" anchor="t"/>
+          <a:bodyPr wrap="none" lIns="0" tIns="0" rIns="0" bIns="0" rtlCol="0" anchor="t"/>
           <a:lstStyle/>
           <a:p>
             <a:pPr algn="l" indent="0" marL="0">
@@ -3408,7 +3434,7 @@
           <a:ln/>
         </p:spPr>
         <p:txBody>
-          <a:bodyPr wrap="square" lIns="0" tIns="0" rIns="0" bIns="0" rtlCol="0" anchor="t"/>
+          <a:bodyPr wrap="none" lIns="0" tIns="0" rIns="0" bIns="0" rtlCol="0" anchor="t"/>
           <a:lstStyle/>
           <a:p>
             <a:pPr algn="l" indent="0" marL="0">
@@ -3453,7 +3479,9 @@
           <a:ln/>
         </p:spPr>
         <p:txBody>
-          <a:bodyPr wrap="square" lIns="0" tIns="0" rIns="0" bIns="0" rtlCol="0" anchor="t"/>
+          <a:bodyPr wrap="square" lIns="0" tIns="0" rIns="0" bIns="0" rtlCol="0" anchor="t">
+            <a:normAutofit/>
+          </a:bodyPr>
           <a:lstStyle/>
           <a:p>
             <a:pPr algn="l" indent="0" marL="0">
@@ -3527,7 +3555,7 @@
           <a:ln/>
         </p:spPr>
         <p:txBody>
-          <a:bodyPr wrap="square" lIns="0" tIns="0" rIns="0" bIns="0" rtlCol="0" anchor="t"/>
+          <a:bodyPr wrap="none" lIns="0" tIns="0" rIns="0" bIns="0" rtlCol="0" anchor="t"/>
           <a:lstStyle/>
           <a:p>
             <a:pPr algn="l" indent="0" marL="0">
@@ -3572,7 +3600,7 @@
           <a:ln/>
         </p:spPr>
         <p:txBody>
-          <a:bodyPr wrap="square" lIns="0" tIns="0" rIns="0" bIns="0" rtlCol="0" anchor="t"/>
+          <a:bodyPr wrap="none" lIns="0" tIns="0" rIns="0" bIns="0" rtlCol="0" anchor="t"/>
           <a:lstStyle/>
           <a:p>
             <a:pPr algn="l" indent="0" marL="0">
@@ -3617,7 +3645,9 @@
           <a:ln/>
         </p:spPr>
         <p:txBody>
-          <a:bodyPr wrap="square" lIns="0" tIns="0" rIns="0" bIns="0" rtlCol="0" anchor="t"/>
+          <a:bodyPr wrap="square" lIns="0" tIns="0" rIns="0" bIns="0" rtlCol="0" anchor="t">
+            <a:normAutofit/>
+          </a:bodyPr>
           <a:lstStyle/>
           <a:p>
             <a:pPr algn="l" indent="0" marL="0">
@@ -3691,7 +3721,7 @@
           <a:ln/>
         </p:spPr>
         <p:txBody>
-          <a:bodyPr wrap="square" lIns="0" tIns="0" rIns="0" bIns="0" rtlCol="0" anchor="t"/>
+          <a:bodyPr wrap="none" lIns="0" tIns="0" rIns="0" bIns="0" rtlCol="0" anchor="t"/>
           <a:lstStyle/>
           <a:p>
             <a:pPr algn="l" indent="0" marL="0">
@@ -3736,7 +3766,7 @@
           <a:ln/>
         </p:spPr>
         <p:txBody>
-          <a:bodyPr wrap="square" lIns="0" tIns="0" rIns="0" bIns="0" rtlCol="0" anchor="t"/>
+          <a:bodyPr wrap="none" lIns="0" tIns="0" rIns="0" bIns="0" rtlCol="0" anchor="t"/>
           <a:lstStyle/>
           <a:p>
             <a:pPr algn="l" indent="0" marL="0">
@@ -3781,7 +3811,9 @@
           <a:ln/>
         </p:spPr>
         <p:txBody>
-          <a:bodyPr wrap="square" lIns="0" tIns="0" rIns="0" bIns="0" rtlCol="0" anchor="t"/>
+          <a:bodyPr wrap="square" lIns="0" tIns="0" rIns="0" bIns="0" rtlCol="0" anchor="t">
+            <a:normAutofit/>
+          </a:bodyPr>
           <a:lstStyle/>
           <a:p>
             <a:pPr algn="l" indent="0" marL="0">
@@ -3855,7 +3887,7 @@
           <a:ln/>
         </p:spPr>
         <p:txBody>
-          <a:bodyPr wrap="square" lIns="0" tIns="0" rIns="0" bIns="0" rtlCol="0" anchor="t"/>
+          <a:bodyPr wrap="none" lIns="0" tIns="0" rIns="0" bIns="0" rtlCol="0" anchor="t"/>
           <a:lstStyle/>
           <a:p>
             <a:pPr algn="l" indent="0" marL="0">
@@ -3900,7 +3932,7 @@
           <a:ln/>
         </p:spPr>
         <p:txBody>
-          <a:bodyPr wrap="square" lIns="0" tIns="0" rIns="0" bIns="0" rtlCol="0" anchor="t"/>
+          <a:bodyPr wrap="none" lIns="0" tIns="0" rIns="0" bIns="0" rtlCol="0" anchor="t"/>
           <a:lstStyle/>
           <a:p>
             <a:pPr algn="l" indent="0" marL="0">
@@ -3945,7 +3977,9 @@
           <a:ln/>
         </p:spPr>
         <p:txBody>
-          <a:bodyPr wrap="square" lIns="0" tIns="0" rIns="0" bIns="0" rtlCol="0" anchor="t"/>
+          <a:bodyPr wrap="square" lIns="0" tIns="0" rIns="0" bIns="0" rtlCol="0" anchor="t">
+            <a:normAutofit/>
+          </a:bodyPr>
           <a:lstStyle/>
           <a:p>
             <a:pPr algn="l" indent="0" marL="0">
@@ -3987,7 +4021,7 @@
           <a:ln/>
         </p:spPr>
         <p:txBody>
-          <a:bodyPr wrap="square" lIns="0" tIns="0" rIns="0" bIns="0" rtlCol="0" anchor="t"/>
+          <a:bodyPr wrap="none" lIns="0" tIns="0" rIns="0" bIns="0" rtlCol="0" anchor="t"/>
           <a:lstStyle/>
           <a:p>
             <a:pPr algn="r" indent="0" marL="0">
@@ -4061,7 +4095,7 @@
           <a:ln/>
         </p:spPr>
         <p:txBody>
-          <a:bodyPr wrap="square" lIns="0" tIns="0" rIns="0" bIns="0" rtlCol="0" anchor="t"/>
+          <a:bodyPr wrap="none" lIns="0" tIns="0" rIns="0" bIns="0" rtlCol="0" anchor="t"/>
           <a:lstStyle/>
           <a:p>
             <a:pPr algn="l" indent="0" marL="0">
@@ -4106,7 +4140,7 @@
           <a:ln/>
         </p:spPr>
         <p:txBody>
-          <a:bodyPr wrap="square" lIns="0" tIns="0" rIns="0" bIns="0" rtlCol="0" anchor="t"/>
+          <a:bodyPr wrap="none" lIns="0" tIns="0" rIns="0" bIns="0" rtlCol="0" anchor="t"/>
           <a:lstStyle/>
           <a:p>
             <a:pPr algn="l" indent="0" marL="0">
@@ -4210,7 +4244,7 @@
           <a:ln/>
         </p:spPr>
         <p:txBody>
-          <a:bodyPr wrap="square" lIns="0" tIns="0" rIns="0" bIns="0" rtlCol="0" anchor="t"/>
+          <a:bodyPr wrap="none" lIns="0" tIns="0" rIns="0" bIns="0" rtlCol="0" anchor="t"/>
           <a:lstStyle/>
           <a:p>
             <a:pPr algn="l" indent="0" marL="0">
@@ -4255,7 +4289,7 @@
           <a:ln/>
         </p:spPr>
         <p:txBody>
-          <a:bodyPr wrap="square" lIns="0" tIns="0" rIns="0" bIns="0" rtlCol="0" anchor="t"/>
+          <a:bodyPr wrap="none" lIns="0" tIns="0" rIns="0" bIns="0" rtlCol="0" anchor="t"/>
           <a:lstStyle/>
           <a:p>
             <a:pPr algn="l" indent="0" marL="0">
@@ -4300,7 +4334,9 @@
           <a:ln/>
         </p:spPr>
         <p:txBody>
-          <a:bodyPr wrap="square" lIns="0" tIns="0" rIns="0" bIns="0" rtlCol="0" anchor="t"/>
+          <a:bodyPr wrap="square" lIns="0" tIns="0" rIns="0" bIns="0" rtlCol="0" anchor="t">
+            <a:normAutofit/>
+          </a:bodyPr>
           <a:lstStyle/>
           <a:p>
             <a:pPr algn="l" indent="0" marL="0">
@@ -4349,6 +4385,10 @@
             <a:prstDash val="solid"/>
           </a:ln>
         </p:spPr>
+        <p:txBody>
+          <a:bodyPr/>
+          <a:p/>
+        </p:txBody>
       </p:sp>
       <p:sp>
         <p:nvSpPr>
@@ -4368,7 +4408,7 @@
           <a:ln/>
         </p:spPr>
         <p:txBody>
-          <a:bodyPr wrap="square" lIns="0" tIns="0" rIns="0" bIns="0" rtlCol="0" anchor="t"/>
+          <a:bodyPr wrap="none" lIns="0" tIns="0" rIns="0" bIns="0" rtlCol="0" anchor="t"/>
           <a:lstStyle/>
           <a:p>
             <a:pPr algn="l" indent="0" marL="0">
@@ -4413,7 +4453,9 @@
           <a:ln/>
         </p:spPr>
         <p:txBody>
-          <a:bodyPr wrap="square" lIns="0" tIns="0" rIns="0" bIns="0" rtlCol="0" anchor="t"/>
+          <a:bodyPr wrap="square" lIns="0" tIns="0" rIns="0" bIns="0" rtlCol="0" anchor="t">
+            <a:normAutofit/>
+          </a:bodyPr>
           <a:lstStyle/>
           <a:p>
             <a:pPr algn="l" indent="0" marL="0">
@@ -4519,6 +4561,10 @@
             <a:prstDash val="solid"/>
           </a:ln>
         </p:spPr>
+        <p:txBody>
+          <a:bodyPr/>
+          <a:p/>
+        </p:txBody>
       </p:sp>
       <p:sp>
         <p:nvSpPr>
@@ -4542,6 +4588,10 @@
             <a:prstDash val="solid"/>
           </a:ln>
         </p:spPr>
+        <p:txBody>
+          <a:bodyPr/>
+          <a:p/>
+        </p:txBody>
       </p:sp>
       <p:sp>
         <p:nvSpPr>
@@ -4565,6 +4615,10 @@
             <a:prstDash val="solid"/>
           </a:ln>
         </p:spPr>
+        <p:txBody>
+          <a:bodyPr/>
+          <a:p/>
+        </p:txBody>
       </p:sp>
       <p:sp>
         <p:nvSpPr>
@@ -4588,6 +4642,10 @@
             <a:prstDash val="solid"/>
           </a:ln>
         </p:spPr>
+        <p:txBody>
+          <a:bodyPr/>
+          <a:p/>
+        </p:txBody>
       </p:sp>
       <p:sp>
         <p:nvSpPr>
@@ -4607,7 +4665,7 @@
           <a:ln/>
         </p:spPr>
         <p:txBody>
-          <a:bodyPr wrap="square" lIns="0" tIns="0" rIns="0" bIns="0" rtlCol="0" anchor="t"/>
+          <a:bodyPr wrap="none" lIns="0" tIns="0" rIns="0" bIns="0" rtlCol="0" anchor="t"/>
           <a:lstStyle/>
           <a:p>
             <a:pPr algn="l" indent="0" marL="0">
@@ -4652,7 +4710,7 @@
           <a:ln/>
         </p:spPr>
         <p:txBody>
-          <a:bodyPr wrap="square" lIns="0" tIns="0" rIns="0" bIns="0" rtlCol="0" anchor="t"/>
+          <a:bodyPr wrap="none" lIns="0" tIns="0" rIns="0" bIns="0" rtlCol="0" anchor="t"/>
           <a:lstStyle/>
           <a:p>
             <a:pPr algn="l" indent="0" marL="0">
@@ -4697,7 +4755,9 @@
           <a:ln/>
         </p:spPr>
         <p:txBody>
-          <a:bodyPr wrap="square" lIns="0" tIns="0" rIns="0" bIns="0" rtlCol="0" anchor="t"/>
+          <a:bodyPr wrap="square" lIns="0" tIns="0" rIns="0" bIns="0" rtlCol="0" anchor="t">
+            <a:normAutofit/>
+          </a:bodyPr>
           <a:lstStyle/>
           <a:p>
             <a:pPr algn="l" indent="0" marL="0">
@@ -4746,6 +4806,10 @@
             <a:prstDash val="solid"/>
           </a:ln>
         </p:spPr>
+        <p:txBody>
+          <a:bodyPr/>
+          <a:p/>
+        </p:txBody>
       </p:sp>
       <p:sp>
         <p:nvSpPr>
@@ -4765,7 +4829,7 @@
           <a:ln/>
         </p:spPr>
         <p:txBody>
-          <a:bodyPr wrap="square" lIns="0" tIns="0" rIns="0" bIns="0" rtlCol="0" anchor="t"/>
+          <a:bodyPr wrap="none" lIns="0" tIns="0" rIns="0" bIns="0" rtlCol="0" anchor="t"/>
           <a:lstStyle/>
           <a:p>
             <a:pPr algn="l" indent="0" marL="0">
@@ -4810,7 +4874,9 @@
           <a:ln/>
         </p:spPr>
         <p:txBody>
-          <a:bodyPr wrap="square" lIns="0" tIns="0" rIns="0" bIns="0" rtlCol="0" anchor="t"/>
+          <a:bodyPr wrap="square" lIns="0" tIns="0" rIns="0" bIns="0" rtlCol="0" anchor="t">
+            <a:normAutofit/>
+          </a:bodyPr>
           <a:lstStyle/>
           <a:p>
             <a:pPr algn="l" indent="0" marL="0">
@@ -4914,7 +4980,7 @@
           <a:ln/>
         </p:spPr>
         <p:txBody>
-          <a:bodyPr wrap="square" lIns="0" tIns="0" rIns="0" bIns="0" rtlCol="0" anchor="t"/>
+          <a:bodyPr wrap="none" lIns="0" tIns="0" rIns="0" bIns="0" rtlCol="0" anchor="t"/>
           <a:lstStyle/>
           <a:p>
             <a:pPr algn="l" indent="0" marL="0">
@@ -4959,7 +5025,7 @@
           <a:ln/>
         </p:spPr>
         <p:txBody>
-          <a:bodyPr wrap="square" lIns="0" tIns="0" rIns="0" bIns="0" rtlCol="0" anchor="t"/>
+          <a:bodyPr wrap="none" lIns="0" tIns="0" rIns="0" bIns="0" rtlCol="0" anchor="t"/>
           <a:lstStyle/>
           <a:p>
             <a:pPr algn="l" indent="0" marL="0">
@@ -5004,7 +5070,9 @@
           <a:ln/>
         </p:spPr>
         <p:txBody>
-          <a:bodyPr wrap="square" lIns="0" tIns="0" rIns="0" bIns="0" rtlCol="0" anchor="t"/>
+          <a:bodyPr wrap="square" lIns="0" tIns="0" rIns="0" bIns="0" rtlCol="0" anchor="t">
+            <a:normAutofit/>
+          </a:bodyPr>
           <a:lstStyle/>
           <a:p>
             <a:pPr algn="l" indent="0" marL="0">
@@ -5053,6 +5121,10 @@
             <a:prstDash val="solid"/>
           </a:ln>
         </p:spPr>
+        <p:txBody>
+          <a:bodyPr/>
+          <a:p/>
+        </p:txBody>
       </p:sp>
       <p:sp>
         <p:nvSpPr>
@@ -5072,7 +5144,7 @@
           <a:ln/>
         </p:spPr>
         <p:txBody>
-          <a:bodyPr wrap="square" lIns="0" tIns="0" rIns="0" bIns="0" rtlCol="0" anchor="t"/>
+          <a:bodyPr wrap="none" lIns="0" tIns="0" rIns="0" bIns="0" rtlCol="0" anchor="t"/>
           <a:lstStyle/>
           <a:p>
             <a:pPr algn="l" indent="0" marL="0">
@@ -5117,7 +5189,9 @@
           <a:ln/>
         </p:spPr>
         <p:txBody>
-          <a:bodyPr wrap="square" lIns="0" tIns="0" rIns="0" bIns="0" rtlCol="0" anchor="t"/>
+          <a:bodyPr wrap="square" lIns="0" tIns="0" rIns="0" bIns="0" rtlCol="0" anchor="t">
+            <a:normAutofit/>
+          </a:bodyPr>
           <a:lstStyle/>
           <a:p>
             <a:pPr algn="l" indent="0" marL="0">
@@ -5159,7 +5233,7 @@
           <a:ln/>
         </p:spPr>
         <p:txBody>
-          <a:bodyPr wrap="square" lIns="0" tIns="0" rIns="0" bIns="0" rtlCol="0" anchor="t"/>
+          <a:bodyPr wrap="none" lIns="0" tIns="0" rIns="0" bIns="0" rtlCol="0" anchor="t"/>
           <a:lstStyle/>
           <a:p>
             <a:pPr algn="l" indent="0" marL="0">
@@ -5204,7 +5278,7 @@
           <a:ln/>
         </p:spPr>
         <p:txBody>
-          <a:bodyPr wrap="square" lIns="0" tIns="0" rIns="0" bIns="0" rtlCol="0" anchor="t"/>
+          <a:bodyPr wrap="none" lIns="0" tIns="0" rIns="0" bIns="0" rtlCol="0" anchor="t"/>
           <a:lstStyle/>
           <a:p>
             <a:pPr algn="r" indent="0" marL="0">
@@ -5278,7 +5352,7 @@
           <a:ln/>
         </p:spPr>
         <p:txBody>
-          <a:bodyPr wrap="square" lIns="0" tIns="0" rIns="0" bIns="0" rtlCol="0" anchor="t"/>
+          <a:bodyPr wrap="none" lIns="0" tIns="0" rIns="0" bIns="0" rtlCol="0" anchor="t"/>
           <a:lstStyle/>
           <a:p>
             <a:pPr algn="l" indent="0" marL="0">
@@ -5323,7 +5397,7 @@
           <a:ln/>
         </p:spPr>
         <p:txBody>
-          <a:bodyPr wrap="square" lIns="0" tIns="0" rIns="0" bIns="0" rtlCol="0" anchor="t"/>
+          <a:bodyPr wrap="none" lIns="0" tIns="0" rIns="0" bIns="0" rtlCol="0" anchor="t"/>
           <a:lstStyle/>
           <a:p>
             <a:pPr algn="l" indent="0" marL="0">
@@ -5461,6 +5535,10 @@
             <a:prstDash val="solid"/>
           </a:ln>
         </p:spPr>
+        <p:txBody>
+          <a:bodyPr/>
+          <a:p/>
+        </p:txBody>
       </p:sp>
       <p:sp>
         <p:nvSpPr>
@@ -5480,7 +5558,7 @@
           <a:ln/>
         </p:spPr>
         <p:txBody>
-          <a:bodyPr wrap="square" lIns="0" tIns="0" rIns="0" bIns="0" rtlCol="0" anchor="t"/>
+          <a:bodyPr wrap="none" lIns="0" tIns="0" rIns="0" bIns="0" rtlCol="0" anchor="t"/>
           <a:lstStyle/>
           <a:p>
             <a:pPr algn="l" indent="0" marL="0">
@@ -5522,7 +5600,7 @@
           <a:ln/>
         </p:spPr>
         <p:txBody>
-          <a:bodyPr wrap="square" lIns="0" tIns="0" rIns="0" bIns="0" rtlCol="0" anchor="t"/>
+          <a:bodyPr wrap="none" lIns="0" tIns="0" rIns="0" bIns="0" rtlCol="0" anchor="t"/>
           <a:lstStyle/>
           <a:p>
             <a:pPr algn="l" indent="0" marL="0">
@@ -5564,7 +5642,7 @@
           <a:ln/>
         </p:spPr>
         <p:txBody>
-          <a:bodyPr wrap="square" lIns="0" tIns="0" rIns="0" bIns="0" rtlCol="0" anchor="t"/>
+          <a:bodyPr wrap="none" lIns="0" tIns="0" rIns="0" bIns="0" rtlCol="0" anchor="t"/>
           <a:lstStyle/>
           <a:p>
             <a:pPr algn="l" indent="0" marL="0">
@@ -5606,7 +5684,7 @@
           <a:ln/>
         </p:spPr>
         <p:txBody>
-          <a:bodyPr wrap="square" lIns="0" tIns="0" rIns="0" bIns="0" rtlCol="0" anchor="t"/>
+          <a:bodyPr wrap="none" lIns="0" tIns="0" rIns="0" bIns="0" rtlCol="0" anchor="t"/>
           <a:lstStyle/>
           <a:p>
             <a:pPr algn="l" indent="0" marL="0">
@@ -5648,7 +5726,7 @@
           <a:ln/>
         </p:spPr>
         <p:txBody>
-          <a:bodyPr wrap="square" lIns="0" tIns="0" rIns="0" bIns="0" rtlCol="0" anchor="t"/>
+          <a:bodyPr wrap="none" lIns="0" tIns="0" rIns="0" bIns="0" rtlCol="0" anchor="t"/>
           <a:lstStyle/>
           <a:p>
             <a:pPr algn="l" indent="0" marL="0">
@@ -5690,7 +5768,7 @@
           <a:ln/>
         </p:spPr>
         <p:txBody>
-          <a:bodyPr wrap="square" lIns="0" tIns="0" rIns="0" bIns="0" rtlCol="0" anchor="t"/>
+          <a:bodyPr wrap="none" lIns="0" tIns="0" rIns="0" bIns="0" rtlCol="0" anchor="t"/>
           <a:lstStyle/>
           <a:p>
             <a:pPr algn="l" indent="0" marL="0">
@@ -5736,6 +5814,10 @@
             <a:prstDash val="solid"/>
           </a:ln>
         </p:spPr>
+        <p:txBody>
+          <a:bodyPr/>
+          <a:p/>
+        </p:txBody>
       </p:sp>
       <p:sp>
         <p:nvSpPr>
@@ -5755,7 +5837,7 @@
           <a:ln/>
         </p:spPr>
         <p:txBody>
-          <a:bodyPr wrap="square" lIns="0" tIns="0" rIns="0" bIns="0" rtlCol="0" anchor="t"/>
+          <a:bodyPr wrap="none" lIns="0" tIns="0" rIns="0" bIns="0" rtlCol="0" anchor="t"/>
           <a:lstStyle/>
           <a:p>
             <a:pPr algn="l" indent="0" marL="0">
@@ -5797,7 +5879,7 @@
           <a:ln/>
         </p:spPr>
         <p:txBody>
-          <a:bodyPr wrap="square" lIns="0" tIns="0" rIns="0" bIns="0" rtlCol="0" anchor="t"/>
+          <a:bodyPr wrap="none" lIns="0" tIns="0" rIns="0" bIns="0" rtlCol="0" anchor="t"/>
           <a:lstStyle/>
           <a:p>
             <a:pPr algn="l" indent="0" marL="0">
@@ -5839,7 +5921,7 @@
           <a:ln/>
         </p:spPr>
         <p:txBody>
-          <a:bodyPr wrap="square" lIns="0" tIns="0" rIns="0" bIns="0" rtlCol="0" anchor="t"/>
+          <a:bodyPr wrap="none" lIns="0" tIns="0" rIns="0" bIns="0" rtlCol="0" anchor="t"/>
           <a:lstStyle/>
           <a:p>
             <a:pPr algn="l" indent="0" marL="0">
@@ -5885,6 +5967,10 @@
             <a:prstDash val="solid"/>
           </a:ln>
         </p:spPr>
+        <p:txBody>
+          <a:bodyPr/>
+          <a:p/>
+        </p:txBody>
       </p:sp>
       <p:sp>
         <p:nvSpPr>
@@ -5904,7 +5990,7 @@
           <a:ln/>
         </p:spPr>
         <p:txBody>
-          <a:bodyPr wrap="square" lIns="0" tIns="0" rIns="0" bIns="0" rtlCol="0" anchor="t"/>
+          <a:bodyPr wrap="none" lIns="0" tIns="0" rIns="0" bIns="0" rtlCol="0" anchor="t"/>
           <a:lstStyle/>
           <a:p>
             <a:pPr algn="l" indent="0" marL="0">
@@ -5946,7 +6032,7 @@
           <a:ln/>
         </p:spPr>
         <p:txBody>
-          <a:bodyPr wrap="square" lIns="0" tIns="0" rIns="0" bIns="0" rtlCol="0" anchor="t"/>
+          <a:bodyPr wrap="none" lIns="0" tIns="0" rIns="0" bIns="0" rtlCol="0" anchor="t"/>
           <a:lstStyle/>
           <a:p>
             <a:pPr algn="l" indent="0" marL="0">
@@ -5988,7 +6074,7 @@
           <a:ln/>
         </p:spPr>
         <p:txBody>
-          <a:bodyPr wrap="square" lIns="0" tIns="0" rIns="0" bIns="0" rtlCol="0" anchor="t"/>
+          <a:bodyPr wrap="none" lIns="0" tIns="0" rIns="0" bIns="0" rtlCol="0" anchor="t"/>
           <a:lstStyle/>
           <a:p>
             <a:pPr algn="l" indent="0" marL="0">
@@ -6034,6 +6120,10 @@
             <a:prstDash val="solid"/>
           </a:ln>
         </p:spPr>
+        <p:txBody>
+          <a:bodyPr/>
+          <a:p/>
+        </p:txBody>
       </p:sp>
       <p:sp>
         <p:nvSpPr>
@@ -6053,7 +6143,7 @@
           <a:ln/>
         </p:spPr>
         <p:txBody>
-          <a:bodyPr wrap="square" lIns="0" tIns="0" rIns="0" bIns="0" rtlCol="0" anchor="t"/>
+          <a:bodyPr wrap="none" lIns="0" tIns="0" rIns="0" bIns="0" rtlCol="0" anchor="t"/>
           <a:lstStyle/>
           <a:p>
             <a:pPr algn="l" indent="0" marL="0">
@@ -6095,7 +6185,7 @@
           <a:ln/>
         </p:spPr>
         <p:txBody>
-          <a:bodyPr wrap="square" lIns="0" tIns="0" rIns="0" bIns="0" rtlCol="0" anchor="t"/>
+          <a:bodyPr wrap="none" lIns="0" tIns="0" rIns="0" bIns="0" rtlCol="0" anchor="t"/>
           <a:lstStyle/>
           <a:p>
             <a:pPr algn="l" indent="0" marL="0">
@@ -6137,7 +6227,9 @@
           <a:ln/>
         </p:spPr>
         <p:txBody>
-          <a:bodyPr wrap="square" lIns="0" tIns="0" rIns="0" bIns="0" rtlCol="0" anchor="t"/>
+          <a:bodyPr wrap="square" lIns="0" tIns="0" rIns="0" bIns="0" rtlCol="0" anchor="t">
+            <a:normAutofit/>
+          </a:bodyPr>
           <a:lstStyle/>
           <a:p>
             <a:pPr algn="l" indent="0" marL="0">
@@ -6183,6 +6275,10 @@
             <a:prstDash val="solid"/>
           </a:ln>
         </p:spPr>
+        <p:txBody>
+          <a:bodyPr/>
+          <a:p/>
+        </p:txBody>
       </p:sp>
       <p:sp>
         <p:nvSpPr>
@@ -6202,7 +6298,7 @@
           <a:ln/>
         </p:spPr>
         <p:txBody>
-          <a:bodyPr wrap="square" lIns="0" tIns="0" rIns="0" bIns="0" rtlCol="0" anchor="t"/>
+          <a:bodyPr wrap="none" lIns="0" tIns="0" rIns="0" bIns="0" rtlCol="0" anchor="t"/>
           <a:lstStyle/>
           <a:p>
             <a:pPr algn="l" indent="0" marL="0">
@@ -6244,7 +6340,7 @@
           <a:ln/>
         </p:spPr>
         <p:txBody>
-          <a:bodyPr wrap="square" lIns="0" tIns="0" rIns="0" bIns="0" rtlCol="0" anchor="t"/>
+          <a:bodyPr wrap="none" lIns="0" tIns="0" rIns="0" bIns="0" rtlCol="0" anchor="t"/>
           <a:lstStyle/>
           <a:p>
             <a:pPr algn="l" indent="0" marL="0">
@@ -6286,7 +6382,9 @@
           <a:ln/>
         </p:spPr>
         <p:txBody>
-          <a:bodyPr wrap="square" lIns="0" tIns="0" rIns="0" bIns="0" rtlCol="0" anchor="t"/>
+          <a:bodyPr wrap="square" lIns="0" tIns="0" rIns="0" bIns="0" rtlCol="0" anchor="t">
+            <a:normAutofit/>
+          </a:bodyPr>
           <a:lstStyle/>
           <a:p>
             <a:pPr algn="l" indent="0" marL="0">
@@ -6332,6 +6430,10 @@
             <a:prstDash val="solid"/>
           </a:ln>
         </p:spPr>
+        <p:txBody>
+          <a:bodyPr/>
+          <a:p/>
+        </p:txBody>
       </p:sp>
       <p:sp>
         <p:nvSpPr>
@@ -6351,7 +6453,7 @@
           <a:ln/>
         </p:spPr>
         <p:txBody>
-          <a:bodyPr wrap="square" lIns="0" tIns="0" rIns="0" bIns="0" rtlCol="0" anchor="t"/>
+          <a:bodyPr wrap="none" lIns="0" tIns="0" rIns="0" bIns="0" rtlCol="0" anchor="t"/>
           <a:lstStyle/>
           <a:p>
             <a:pPr algn="l" indent="0" marL="0">
@@ -6393,7 +6495,7 @@
           <a:ln/>
         </p:spPr>
         <p:txBody>
-          <a:bodyPr wrap="square" lIns="0" tIns="0" rIns="0" bIns="0" rtlCol="0" anchor="t"/>
+          <a:bodyPr wrap="none" lIns="0" tIns="0" rIns="0" bIns="0" rtlCol="0" anchor="t"/>
           <a:lstStyle/>
           <a:p>
             <a:pPr algn="l" indent="0" marL="0">
@@ -6435,7 +6537,7 @@
           <a:ln/>
         </p:spPr>
         <p:txBody>
-          <a:bodyPr wrap="square" lIns="0" tIns="0" rIns="0" bIns="0" rtlCol="0" anchor="t"/>
+          <a:bodyPr wrap="none" lIns="0" tIns="0" rIns="0" bIns="0" rtlCol="0" anchor="t"/>
           <a:lstStyle/>
           <a:p>
             <a:pPr algn="l" indent="0" marL="0">
@@ -6477,7 +6579,7 @@
           <a:ln/>
         </p:spPr>
         <p:txBody>
-          <a:bodyPr wrap="square" lIns="0" tIns="0" rIns="0" bIns="0" rtlCol="0" anchor="t"/>
+          <a:bodyPr wrap="none" lIns="0" tIns="0" rIns="0" bIns="0" rtlCol="0" anchor="t"/>
           <a:lstStyle/>
           <a:p>
             <a:pPr algn="r" indent="0" marL="0">
@@ -6551,7 +6653,7 @@
           <a:ln/>
         </p:spPr>
         <p:txBody>
-          <a:bodyPr wrap="square" lIns="0" tIns="0" rIns="0" bIns="0" rtlCol="0" anchor="t"/>
+          <a:bodyPr wrap="none" lIns="0" tIns="0" rIns="0" bIns="0" rtlCol="0" anchor="t"/>
           <a:lstStyle/>
           <a:p>
             <a:pPr algn="l" indent="0" marL="0">
@@ -6596,7 +6698,7 @@
           <a:ln/>
         </p:spPr>
         <p:txBody>
-          <a:bodyPr wrap="square" lIns="0" tIns="0" rIns="0" bIns="0" rtlCol="0" anchor="t"/>
+          <a:bodyPr wrap="none" lIns="0" tIns="0" rIns="0" bIns="0" rtlCol="0" anchor="t"/>
           <a:lstStyle/>
           <a:p>
             <a:pPr algn="l" indent="0" marL="0">
@@ -6700,7 +6802,7 @@
           <a:ln/>
         </p:spPr>
         <p:txBody>
-          <a:bodyPr wrap="square" lIns="0" tIns="0" rIns="0" bIns="0" rtlCol="0" anchor="t"/>
+          <a:bodyPr wrap="none" lIns="0" tIns="0" rIns="0" bIns="0" rtlCol="0" anchor="t"/>
           <a:lstStyle/>
           <a:p>
             <a:pPr algn="l" indent="0" marL="0">
@@ -6745,7 +6847,9 @@
           <a:ln/>
         </p:spPr>
         <p:txBody>
-          <a:bodyPr wrap="square" lIns="0" tIns="0" rIns="0" bIns="0" rtlCol="0" anchor="t"/>
+          <a:bodyPr wrap="square" lIns="0" tIns="0" rIns="0" bIns="0" rtlCol="0" anchor="t">
+            <a:normAutofit/>
+          </a:bodyPr>
           <a:lstStyle/>
           <a:p>
             <a:pPr algn="l" indent="0" marL="0">
@@ -6790,7 +6894,7 @@
           <a:ln/>
         </p:spPr>
         <p:txBody>
-          <a:bodyPr wrap="square" lIns="0" tIns="0" rIns="0" bIns="0" rtlCol="0" anchor="t"/>
+          <a:bodyPr wrap="none" lIns="0" tIns="0" rIns="0" bIns="0" rtlCol="0" anchor="t"/>
           <a:lstStyle/>
           <a:p>
             <a:pPr algn="l" indent="0" marL="0">
@@ -6864,7 +6968,7 @@
           <a:ln/>
         </p:spPr>
         <p:txBody>
-          <a:bodyPr wrap="square" lIns="0" tIns="0" rIns="0" bIns="0" rtlCol="0" anchor="t"/>
+          <a:bodyPr wrap="none" lIns="0" tIns="0" rIns="0" bIns="0" rtlCol="0" anchor="t"/>
           <a:lstStyle/>
           <a:p>
             <a:pPr algn="l" indent="0" marL="0">
@@ -6909,7 +7013,7 @@
           <a:ln/>
         </p:spPr>
         <p:txBody>
-          <a:bodyPr wrap="square" lIns="0" tIns="0" rIns="0" bIns="0" rtlCol="0" anchor="t"/>
+          <a:bodyPr wrap="none" lIns="0" tIns="0" rIns="0" bIns="0" rtlCol="0" anchor="t"/>
           <a:lstStyle/>
           <a:p>
             <a:pPr algn="l" indent="0" marL="0">
@@ -6954,7 +7058,7 @@
           <a:ln/>
         </p:spPr>
         <p:txBody>
-          <a:bodyPr wrap="square" lIns="0" tIns="0" rIns="0" bIns="0" rtlCol="0" anchor="t"/>
+          <a:bodyPr wrap="none" lIns="0" tIns="0" rIns="0" bIns="0" rtlCol="0" anchor="t"/>
           <a:lstStyle/>
           <a:p>
             <a:pPr algn="l" indent="0" marL="0">
@@ -7028,7 +7132,7 @@
           <a:ln/>
         </p:spPr>
         <p:txBody>
-          <a:bodyPr wrap="square" lIns="0" tIns="0" rIns="0" bIns="0" rtlCol="0" anchor="t"/>
+          <a:bodyPr wrap="none" lIns="0" tIns="0" rIns="0" bIns="0" rtlCol="0" anchor="t"/>
           <a:lstStyle/>
           <a:p>
             <a:pPr algn="l" indent="0" marL="0">
@@ -7073,7 +7177,7 @@
           <a:ln/>
         </p:spPr>
         <p:txBody>
-          <a:bodyPr wrap="square" lIns="0" tIns="0" rIns="0" bIns="0" rtlCol="0" anchor="t"/>
+          <a:bodyPr wrap="none" lIns="0" tIns="0" rIns="0" bIns="0" rtlCol="0" anchor="t"/>
           <a:lstStyle/>
           <a:p>
             <a:pPr algn="l" indent="0" marL="0">
@@ -7118,7 +7222,9 @@
           <a:ln/>
         </p:spPr>
         <p:txBody>
-          <a:bodyPr wrap="square" lIns="0" tIns="0" rIns="0" bIns="0" rtlCol="0" anchor="t"/>
+          <a:bodyPr wrap="square" lIns="0" tIns="0" rIns="0" bIns="0" rtlCol="0" anchor="t">
+            <a:normAutofit/>
+          </a:bodyPr>
           <a:lstStyle/>
           <a:p>
             <a:pPr algn="l" indent="0" marL="0">
@@ -7192,7 +7298,7 @@
           <a:ln/>
         </p:spPr>
         <p:txBody>
-          <a:bodyPr wrap="square" lIns="0" tIns="0" rIns="0" bIns="0" rtlCol="0" anchor="t"/>
+          <a:bodyPr wrap="none" lIns="0" tIns="0" rIns="0" bIns="0" rtlCol="0" anchor="t"/>
           <a:lstStyle/>
           <a:p>
             <a:pPr algn="l" indent="0" marL="0">
@@ -7237,7 +7343,7 @@
           <a:ln/>
         </p:spPr>
         <p:txBody>
-          <a:bodyPr wrap="square" lIns="0" tIns="0" rIns="0" bIns="0" rtlCol="0" anchor="t"/>
+          <a:bodyPr wrap="none" lIns="0" tIns="0" rIns="0" bIns="0" rtlCol="0" anchor="t"/>
           <a:lstStyle/>
           <a:p>
             <a:pPr algn="l" indent="0" marL="0">
@@ -7282,7 +7388,7 @@
           <a:ln/>
         </p:spPr>
         <p:txBody>
-          <a:bodyPr wrap="square" lIns="0" tIns="0" rIns="0" bIns="0" rtlCol="0" anchor="t"/>
+          <a:bodyPr wrap="none" lIns="0" tIns="0" rIns="0" bIns="0" rtlCol="0" anchor="t"/>
           <a:lstStyle/>
           <a:p>
             <a:pPr algn="l" indent="0" marL="0">
@@ -7324,7 +7430,7 @@
           <a:ln/>
         </p:spPr>
         <p:txBody>
-          <a:bodyPr wrap="square" lIns="0" tIns="0" rIns="0" bIns="0" rtlCol="0" anchor="t"/>
+          <a:bodyPr wrap="none" lIns="0" tIns="0" rIns="0" bIns="0" rtlCol="0" anchor="t"/>
           <a:lstStyle/>
           <a:p>
             <a:pPr algn="r" indent="0" marL="0">
@@ -7398,7 +7504,7 @@
           <a:ln/>
         </p:spPr>
         <p:txBody>
-          <a:bodyPr wrap="square" lIns="0" tIns="0" rIns="0" bIns="0" rtlCol="0" anchor="t"/>
+          <a:bodyPr wrap="none" lIns="0" tIns="0" rIns="0" bIns="0" rtlCol="0" anchor="t"/>
           <a:lstStyle/>
           <a:p>
             <a:pPr algn="l" indent="0" marL="0">
@@ -7443,7 +7549,7 @@
           <a:ln/>
         </p:spPr>
         <p:txBody>
-          <a:bodyPr wrap="square" lIns="0" tIns="0" rIns="0" bIns="0" rtlCol="0" anchor="t"/>
+          <a:bodyPr wrap="none" lIns="0" tIns="0" rIns="0" bIns="0" rtlCol="0" anchor="t"/>
           <a:lstStyle/>
           <a:p>
             <a:pPr algn="l" indent="0" marL="0">
@@ -7505,124 +7611,6 @@
         </p:nvSpPr>
         <p:spPr>
           <a:xfrm>
-            <a:off x="541599" y="1570434"/>
-            <a:ext cx="11105754" cy="3791545"/>
-          </a:xfrm>
-          <a:prstGeom prst="rect">
-            <a:avLst/>
-          </a:prstGeom>
-          <a:noFill/>
-          <a:ln/>
-        </p:spPr>
-        <p:txBody>
-          <a:bodyPr wrap="square" lIns="0" tIns="0" rIns="0" bIns="0" rtlCol="0" anchor="t"/>
-          <a:lstStyle/>
-          <a:p>
-            <a:pPr algn="l" marL="342900" indent="-342900">
-              <a:buSzPct val="100000"/>
-              <a:buChar char="•"/>
-            </a:pPr>
-            <a:r>
-              <a:rPr lang="en-US" sz="1600" dirty="0">
-                <a:solidFill>
-                  <a:srgbClr val="6B7280"/>
-                </a:solidFill>
-                <a:latin typeface="Arimo" pitchFamily="34" charset="0"/>
-                <a:ea typeface="Arimo" pitchFamily="34" charset="-122"/>
-                <a:cs typeface="Arimo" pitchFamily="34" charset="-120"/>
-              </a:rPr>
-              <a:t>01</a:t>
-            </a:r>
-            <a:pPr algn="l" indent="0" marL="0">
-              <a:buNone/>
-            </a:pPr>
-            <a:r>
-              <a:rPr lang="en-US" sz="1600" dirty="0">
-                <a:solidFill>
-                  <a:srgbClr val="1A1A1A"/>
-                </a:solidFill>
-                <a:latin typeface="Arimo" pitchFamily="34" charset="0"/>
-                <a:ea typeface="Arimo" pitchFamily="34" charset="-122"/>
-                <a:cs typeface="Arimo" pitchFamily="34" charset="-120"/>
-              </a:rPr>
-              <a:t>Which capability is actually blocking us today?</a:t>
-            </a:r>
-            <a:endParaRPr lang="en-US" sz="1600" dirty="0"/>
-          </a:p>
-          <a:p>
-            <a:pPr algn="l" marL="342900" indent="-342900">
-              <a:buSzPct val="100000"/>
-              <a:buChar char="•"/>
-            </a:pPr>
-            <a:r>
-              <a:rPr lang="en-US" sz="1600" dirty="0">
-                <a:solidFill>
-                  <a:srgbClr val="6B7280"/>
-                </a:solidFill>
-                <a:latin typeface="Arimo" pitchFamily="34" charset="0"/>
-                <a:ea typeface="Arimo" pitchFamily="34" charset="-122"/>
-                <a:cs typeface="Arimo" pitchFamily="34" charset="-120"/>
-              </a:rPr>
-              <a:t>02</a:t>
-            </a:r>
-            <a:pPr algn="l" indent="0" marL="0">
-              <a:buNone/>
-            </a:pPr>
-            <a:r>
-              <a:rPr lang="en-US" sz="1600" dirty="0">
-                <a:solidFill>
-                  <a:srgbClr val="1A1A1A"/>
-                </a:solidFill>
-                <a:latin typeface="Arimo" pitchFamily="34" charset="0"/>
-                <a:ea typeface="Arimo" pitchFamily="34" charset="-122"/>
-                <a:cs typeface="Arimo" pitchFamily="34" charset="-120"/>
-              </a:rPr>
-              <a:t>What is our exit criterion for phase 1, in one sentence?</a:t>
-            </a:r>
-            <a:endParaRPr lang="en-US" sz="1600" dirty="0"/>
-          </a:p>
-          <a:p>
-            <a:pPr algn="l" marL="342900" indent="-342900">
-              <a:buSzPct val="100000"/>
-              <a:buChar char="•"/>
-            </a:pPr>
-            <a:r>
-              <a:rPr lang="en-US" sz="1600" dirty="0">
-                <a:solidFill>
-                  <a:srgbClr val="6B7280"/>
-                </a:solidFill>
-                <a:latin typeface="Arimo" pitchFamily="34" charset="0"/>
-                <a:ea typeface="Arimo" pitchFamily="34" charset="-122"/>
-                <a:cs typeface="Arimo" pitchFamily="34" charset="-120"/>
-              </a:rPr>
-              <a:t>03</a:t>
-            </a:r>
-            <a:pPr algn="l" indent="0" marL="0">
-              <a:buNone/>
-            </a:pPr>
-            <a:r>
-              <a:rPr lang="en-US" sz="1600" dirty="0">
-                <a:solidFill>
-                  <a:srgbClr val="1A1A1A"/>
-                </a:solidFill>
-                <a:latin typeface="Arimo" pitchFamily="34" charset="0"/>
-                <a:ea typeface="Arimo" pitchFamily="34" charset="-122"/>
-                <a:cs typeface="Arimo" pitchFamily="34" charset="-120"/>
-              </a:rPr>
-              <a:t>Which layer are we genuinely differentiated in?</a:t>
-            </a:r>
-            <a:endParaRPr lang="en-US" sz="1600" dirty="0"/>
-          </a:p>
-        </p:txBody>
-      </p:sp>
-      <p:sp>
-        <p:nvSpPr>
-          <p:cNvPr id="6" name="Text 4"/>
-          <p:cNvSpPr/>
-          <p:nvPr/>
-        </p:nvSpPr>
-        <p:spPr>
-          <a:xfrm>
             <a:off x="541599" y="2447528"/>
             <a:ext cx="278441" cy="331986"/>
           </a:xfrm>
@@ -7633,7 +7621,7 @@
           <a:ln/>
         </p:spPr>
         <p:txBody>
-          <a:bodyPr wrap="square" lIns="0" tIns="0" rIns="0" bIns="0" rtlCol="0" anchor="t"/>
+          <a:bodyPr wrap="none" lIns="0" tIns="0" rIns="0" bIns="0" rtlCol="0" anchor="t"/>
           <a:lstStyle/>
           <a:p>
             <a:pPr algn="l" indent="0" marL="0">
@@ -7659,7 +7647,7 @@
       </p:sp>
       <p:sp>
         <p:nvSpPr>
-          <p:cNvPr id="7" name="Text 5"/>
+          <p:cNvPr id="6" name="Text 4"/>
           <p:cNvSpPr/>
           <p:nvPr/>
         </p:nvSpPr>
@@ -7675,7 +7663,7 @@
           <a:ln/>
         </p:spPr>
         <p:txBody>
-          <a:bodyPr wrap="square" lIns="0" tIns="0" rIns="0" bIns="0" rtlCol="0" anchor="t"/>
+          <a:bodyPr wrap="none" lIns="0" tIns="0" rIns="0" bIns="0" rtlCol="0" anchor="t"/>
           <a:lstStyle/>
           <a:p>
             <a:pPr algn="l" indent="0" marL="0">
@@ -7701,181 +7689,13 @@
       </p:sp>
       <p:sp>
         <p:nvSpPr>
-          <p:cNvPr id="8" name="Text 6"/>
-          <p:cNvSpPr/>
-          <p:nvPr/>
-        </p:nvSpPr>
-        <p:spPr>
-          <a:xfrm>
-            <a:off x="541599" y="3322638"/>
-            <a:ext cx="278441" cy="331986"/>
-          </a:xfrm>
-          <a:prstGeom prst="rect">
-            <a:avLst/>
-          </a:prstGeom>
-          <a:noFill/>
-          <a:ln/>
-        </p:spPr>
-        <p:txBody>
-          <a:bodyPr wrap="square" lIns="0" tIns="0" rIns="0" bIns="0" rtlCol="0" anchor="t"/>
-          <a:lstStyle/>
-          <a:p>
-            <a:pPr algn="l" indent="0" marL="0">
-              <a:lnSpc>
-                <a:spcPts val="2613"/>
-              </a:lnSpc>
-              <a:buNone/>
-            </a:pPr>
-            <a:r>
-              <a:rPr lang="en-US" sz="1866" b="1" dirty="0">
-                <a:solidFill>
-                  <a:srgbClr val="6B7280"/>
-                </a:solidFill>
-                <a:latin typeface="Arimo" pitchFamily="34" charset="0"/>
-                <a:ea typeface="Arimo" pitchFamily="34" charset="-122"/>
-                <a:cs typeface="Arimo" pitchFamily="34" charset="-120"/>
-              </a:rPr>
-              <a:t>02</a:t>
-            </a:r>
-            <a:endParaRPr lang="en-US" sz="1866" dirty="0"/>
-          </a:p>
-        </p:txBody>
-      </p:sp>
-      <p:sp>
-        <p:nvSpPr>
-          <p:cNvPr id="9" name="Text 7"/>
-          <p:cNvSpPr/>
-          <p:nvPr/>
-        </p:nvSpPr>
-        <p:spPr>
-          <a:xfrm>
-            <a:off x="1119304" y="3271838"/>
-            <a:ext cx="7148820" cy="388541"/>
-          </a:xfrm>
-          <a:prstGeom prst="rect">
-            <a:avLst/>
-          </a:prstGeom>
-          <a:noFill/>
-          <a:ln/>
-        </p:spPr>
-        <p:txBody>
-          <a:bodyPr wrap="square" lIns="0" tIns="0" rIns="0" bIns="0" rtlCol="0" anchor="t"/>
-          <a:lstStyle/>
-          <a:p>
-            <a:pPr algn="l" indent="0" marL="0">
-              <a:lnSpc>
-                <a:spcPts val="3060"/>
-              </a:lnSpc>
-              <a:buNone/>
-            </a:pPr>
-            <a:r>
-              <a:rPr lang="en-US" sz="2266" dirty="0">
-                <a:solidFill>
-                  <a:srgbClr val="1A1A1A"/>
-                </a:solidFill>
-                <a:latin typeface="Arimo" pitchFamily="34" charset="0"/>
-                <a:ea typeface="Arimo" pitchFamily="34" charset="-122"/>
-                <a:cs typeface="Arimo" pitchFamily="34" charset="-120"/>
-              </a:rPr>
-              <a:t>What is our exit criterion for phase 1, in one sentence?</a:t>
-            </a:r>
-            <a:endParaRPr lang="en-US" sz="2266" dirty="0"/>
-          </a:p>
-        </p:txBody>
-      </p:sp>
-      <p:sp>
-        <p:nvSpPr>
-          <p:cNvPr id="10" name="Text 8"/>
-          <p:cNvSpPr/>
-          <p:nvPr/>
-        </p:nvSpPr>
-        <p:spPr>
-          <a:xfrm>
-            <a:off x="541599" y="4197747"/>
-            <a:ext cx="278441" cy="331986"/>
-          </a:xfrm>
-          <a:prstGeom prst="rect">
-            <a:avLst/>
-          </a:prstGeom>
-          <a:noFill/>
-          <a:ln/>
-        </p:spPr>
-        <p:txBody>
-          <a:bodyPr wrap="square" lIns="0" tIns="0" rIns="0" bIns="0" rtlCol="0" anchor="t"/>
-          <a:lstStyle/>
-          <a:p>
-            <a:pPr algn="l" indent="0" marL="0">
-              <a:lnSpc>
-                <a:spcPts val="2613"/>
-              </a:lnSpc>
-              <a:buNone/>
-            </a:pPr>
-            <a:r>
-              <a:rPr lang="en-US" sz="1866" b="1" dirty="0">
-                <a:solidFill>
-                  <a:srgbClr val="6B7280"/>
-                </a:solidFill>
-                <a:latin typeface="Arimo" pitchFamily="34" charset="0"/>
-                <a:ea typeface="Arimo" pitchFamily="34" charset="-122"/>
-                <a:cs typeface="Arimo" pitchFamily="34" charset="-120"/>
-              </a:rPr>
-              <a:t>03</a:t>
-            </a:r>
-            <a:endParaRPr lang="en-US" sz="1866" dirty="0"/>
-          </a:p>
-        </p:txBody>
-      </p:sp>
-      <p:sp>
-        <p:nvSpPr>
-          <p:cNvPr id="11" name="Text 9"/>
-          <p:cNvSpPr/>
-          <p:nvPr/>
-        </p:nvSpPr>
-        <p:spPr>
-          <a:xfrm>
-            <a:off x="1119304" y="4146947"/>
-            <a:ext cx="6151612" cy="388541"/>
-          </a:xfrm>
-          <a:prstGeom prst="rect">
-            <a:avLst/>
-          </a:prstGeom>
-          <a:noFill/>
-          <a:ln/>
-        </p:spPr>
-        <p:txBody>
-          <a:bodyPr wrap="square" lIns="0" tIns="0" rIns="0" bIns="0" rtlCol="0" anchor="t"/>
-          <a:lstStyle/>
-          <a:p>
-            <a:pPr algn="l" indent="0" marL="0">
-              <a:lnSpc>
-                <a:spcPts val="3060"/>
-              </a:lnSpc>
-              <a:buNone/>
-            </a:pPr>
-            <a:r>
-              <a:rPr lang="en-US" sz="2266" dirty="0">
-                <a:solidFill>
-                  <a:srgbClr val="1A1A1A"/>
-                </a:solidFill>
-                <a:latin typeface="Arimo" pitchFamily="34" charset="0"/>
-                <a:ea typeface="Arimo" pitchFamily="34" charset="-122"/>
-                <a:cs typeface="Arimo" pitchFamily="34" charset="-120"/>
-              </a:rPr>
-              <a:t>Which layer are we genuinely differentiated in?</a:t>
-            </a:r>
-            <a:endParaRPr lang="en-US" sz="2266" dirty="0"/>
-          </a:p>
-        </p:txBody>
-      </p:sp>
-      <p:sp>
-        <p:nvSpPr>
-          <p:cNvPr id="12" name="Shape 10"/>
-          <p:cNvSpPr/>
-          <p:nvPr/>
-        </p:nvSpPr>
-        <p:spPr>
-          <a:xfrm>
-            <a:off x="541599" y="5368330"/>
+          <p:cNvPr id="7" name="Shape 5"/>
+          <p:cNvSpPr/>
+          <p:nvPr/>
+        </p:nvSpPr>
+        <p:spPr>
+          <a:xfrm>
+            <a:off x="541599" y="3028553"/>
             <a:ext cx="11105754" cy="0"/>
           </a:xfrm>
           <a:prstGeom prst="line">
@@ -7889,10 +7709,236 @@
             <a:prstDash val="solid"/>
           </a:ln>
         </p:spPr>
-      </p:sp>
-      <p:sp>
-        <p:nvSpPr>
-          <p:cNvPr id="13" name="Text 11"/>
+        <p:txBody>
+          <a:bodyPr/>
+          <a:p/>
+        </p:txBody>
+      </p:sp>
+      <p:sp>
+        <p:nvSpPr>
+          <p:cNvPr id="8" name="Text 6"/>
+          <p:cNvSpPr/>
+          <p:nvPr/>
+        </p:nvSpPr>
+        <p:spPr>
+          <a:xfrm>
+            <a:off x="541599" y="3322638"/>
+            <a:ext cx="278441" cy="331986"/>
+          </a:xfrm>
+          <a:prstGeom prst="rect">
+            <a:avLst/>
+          </a:prstGeom>
+          <a:noFill/>
+          <a:ln/>
+        </p:spPr>
+        <p:txBody>
+          <a:bodyPr wrap="none" lIns="0" tIns="0" rIns="0" bIns="0" rtlCol="0" anchor="t"/>
+          <a:lstStyle/>
+          <a:p>
+            <a:pPr algn="l" indent="0" marL="0">
+              <a:lnSpc>
+                <a:spcPts val="2613"/>
+              </a:lnSpc>
+              <a:buNone/>
+            </a:pPr>
+            <a:r>
+              <a:rPr lang="en-US" sz="1866" b="1" dirty="0">
+                <a:solidFill>
+                  <a:srgbClr val="6B7280"/>
+                </a:solidFill>
+                <a:latin typeface="Arimo" pitchFamily="34" charset="0"/>
+                <a:ea typeface="Arimo" pitchFamily="34" charset="-122"/>
+                <a:cs typeface="Arimo" pitchFamily="34" charset="-120"/>
+              </a:rPr>
+              <a:t>02</a:t>
+            </a:r>
+            <a:endParaRPr lang="en-US" sz="1866" dirty="0"/>
+          </a:p>
+        </p:txBody>
+      </p:sp>
+      <p:sp>
+        <p:nvSpPr>
+          <p:cNvPr id="9" name="Text 7"/>
+          <p:cNvSpPr/>
+          <p:nvPr/>
+        </p:nvSpPr>
+        <p:spPr>
+          <a:xfrm>
+            <a:off x="1119304" y="3271838"/>
+            <a:ext cx="7148820" cy="388541"/>
+          </a:xfrm>
+          <a:prstGeom prst="rect">
+            <a:avLst/>
+          </a:prstGeom>
+          <a:noFill/>
+          <a:ln/>
+        </p:spPr>
+        <p:txBody>
+          <a:bodyPr wrap="none" lIns="0" tIns="0" rIns="0" bIns="0" rtlCol="0" anchor="t"/>
+          <a:lstStyle/>
+          <a:p>
+            <a:pPr algn="l" indent="0" marL="0">
+              <a:lnSpc>
+                <a:spcPts val="3060"/>
+              </a:lnSpc>
+              <a:buNone/>
+            </a:pPr>
+            <a:r>
+              <a:rPr lang="en-US" sz="2266" dirty="0">
+                <a:solidFill>
+                  <a:srgbClr val="1A1A1A"/>
+                </a:solidFill>
+                <a:latin typeface="Arimo" pitchFamily="34" charset="0"/>
+                <a:ea typeface="Arimo" pitchFamily="34" charset="-122"/>
+                <a:cs typeface="Arimo" pitchFamily="34" charset="-120"/>
+              </a:rPr>
+              <a:t>What is our exit criterion for phase 1, in one sentence?</a:t>
+            </a:r>
+            <a:endParaRPr lang="en-US" sz="2266" dirty="0"/>
+          </a:p>
+        </p:txBody>
+      </p:sp>
+      <p:sp>
+        <p:nvSpPr>
+          <p:cNvPr id="10" name="Shape 8"/>
+          <p:cNvSpPr/>
+          <p:nvPr/>
+        </p:nvSpPr>
+        <p:spPr>
+          <a:xfrm>
+            <a:off x="541599" y="3903663"/>
+            <a:ext cx="11105754" cy="0"/>
+          </a:xfrm>
+          <a:prstGeom prst="line">
+            <a:avLst/>
+          </a:prstGeom>
+          <a:noFill/>
+          <a:ln w="12698">
+            <a:solidFill>
+              <a:srgbClr val="D1D5DB"/>
+            </a:solidFill>
+            <a:prstDash val="solid"/>
+          </a:ln>
+        </p:spPr>
+        <p:txBody>
+          <a:bodyPr/>
+          <a:p/>
+        </p:txBody>
+      </p:sp>
+      <p:sp>
+        <p:nvSpPr>
+          <p:cNvPr id="11" name="Text 9"/>
+          <p:cNvSpPr/>
+          <p:nvPr/>
+        </p:nvSpPr>
+        <p:spPr>
+          <a:xfrm>
+            <a:off x="541599" y="4197747"/>
+            <a:ext cx="278441" cy="331986"/>
+          </a:xfrm>
+          <a:prstGeom prst="rect">
+            <a:avLst/>
+          </a:prstGeom>
+          <a:noFill/>
+          <a:ln/>
+        </p:spPr>
+        <p:txBody>
+          <a:bodyPr wrap="none" lIns="0" tIns="0" rIns="0" bIns="0" rtlCol="0" anchor="t"/>
+          <a:lstStyle/>
+          <a:p>
+            <a:pPr algn="l" indent="0" marL="0">
+              <a:lnSpc>
+                <a:spcPts val="2613"/>
+              </a:lnSpc>
+              <a:buNone/>
+            </a:pPr>
+            <a:r>
+              <a:rPr lang="en-US" sz="1866" b="1" dirty="0">
+                <a:solidFill>
+                  <a:srgbClr val="6B7280"/>
+                </a:solidFill>
+                <a:latin typeface="Arimo" pitchFamily="34" charset="0"/>
+                <a:ea typeface="Arimo" pitchFamily="34" charset="-122"/>
+                <a:cs typeface="Arimo" pitchFamily="34" charset="-120"/>
+              </a:rPr>
+              <a:t>03</a:t>
+            </a:r>
+            <a:endParaRPr lang="en-US" sz="1866" dirty="0"/>
+          </a:p>
+        </p:txBody>
+      </p:sp>
+      <p:sp>
+        <p:nvSpPr>
+          <p:cNvPr id="12" name="Text 10"/>
+          <p:cNvSpPr/>
+          <p:nvPr/>
+        </p:nvSpPr>
+        <p:spPr>
+          <a:xfrm>
+            <a:off x="1119304" y="4146947"/>
+            <a:ext cx="6151612" cy="388541"/>
+          </a:xfrm>
+          <a:prstGeom prst="rect">
+            <a:avLst/>
+          </a:prstGeom>
+          <a:noFill/>
+          <a:ln/>
+        </p:spPr>
+        <p:txBody>
+          <a:bodyPr wrap="none" lIns="0" tIns="0" rIns="0" bIns="0" rtlCol="0" anchor="t"/>
+          <a:lstStyle/>
+          <a:p>
+            <a:pPr algn="l" indent="0" marL="0">
+              <a:lnSpc>
+                <a:spcPts val="3060"/>
+              </a:lnSpc>
+              <a:buNone/>
+            </a:pPr>
+            <a:r>
+              <a:rPr lang="en-US" sz="2266" dirty="0">
+                <a:solidFill>
+                  <a:srgbClr val="1A1A1A"/>
+                </a:solidFill>
+                <a:latin typeface="Arimo" pitchFamily="34" charset="0"/>
+                <a:ea typeface="Arimo" pitchFamily="34" charset="-122"/>
+                <a:cs typeface="Arimo" pitchFamily="34" charset="-120"/>
+              </a:rPr>
+              <a:t>Which layer are we genuinely differentiated in?</a:t>
+            </a:r>
+            <a:endParaRPr lang="en-US" sz="2266" dirty="0"/>
+          </a:p>
+        </p:txBody>
+      </p:sp>
+      <p:sp>
+        <p:nvSpPr>
+          <p:cNvPr id="13" name="Shape 11"/>
+          <p:cNvSpPr/>
+          <p:nvPr/>
+        </p:nvSpPr>
+        <p:spPr>
+          <a:xfrm>
+            <a:off x="541599" y="5368330"/>
+            <a:ext cx="11105754" cy="0"/>
+          </a:xfrm>
+          <a:prstGeom prst="line">
+            <a:avLst/>
+          </a:prstGeom>
+          <a:noFill/>
+          <a:ln w="12698">
+            <a:solidFill>
+              <a:srgbClr val="D1D5DB"/>
+            </a:solidFill>
+            <a:prstDash val="solid"/>
+          </a:ln>
+        </p:spPr>
+        <p:txBody>
+          <a:bodyPr/>
+          <a:p/>
+        </p:txBody>
+      </p:sp>
+      <p:sp>
+        <p:nvSpPr>
+          <p:cNvPr id="14" name="Text 12"/>
           <p:cNvSpPr/>
           <p:nvPr/>
         </p:nvSpPr>
@@ -7908,7 +7954,7 @@
           <a:ln/>
         </p:spPr>
         <p:txBody>
-          <a:bodyPr wrap="square" lIns="0" tIns="0" rIns="0" bIns="0" rtlCol="0" anchor="t"/>
+          <a:bodyPr wrap="none" lIns="0" tIns="0" rIns="0" bIns="0" rtlCol="0" anchor="t"/>
           <a:lstStyle/>
           <a:p>
             <a:pPr algn="l" indent="0" marL="0">
@@ -7934,7 +7980,7 @@
       </p:sp>
       <p:sp>
         <p:nvSpPr>
-          <p:cNvPr id="14" name="Text 12"/>
+          <p:cNvPr id="15" name="Text 13"/>
           <p:cNvSpPr/>
           <p:nvPr/>
         </p:nvSpPr>
@@ -7950,7 +7996,7 @@
           <a:ln/>
         </p:spPr>
         <p:txBody>
-          <a:bodyPr wrap="square" lIns="0" tIns="0" rIns="0" bIns="0" rtlCol="0" anchor="t"/>
+          <a:bodyPr wrap="none" lIns="0" tIns="0" rIns="0" bIns="0" rtlCol="0" anchor="t"/>
           <a:lstStyle/>
           <a:p>
             <a:pPr algn="l" indent="0" marL="0">
@@ -7976,7 +8022,7 @@
       </p:sp>
       <p:sp>
         <p:nvSpPr>
-          <p:cNvPr id="15" name="Text 13"/>
+          <p:cNvPr id="16" name="Text 14"/>
           <p:cNvSpPr/>
           <p:nvPr/>
         </p:nvSpPr>
@@ -7992,7 +8038,7 @@
           <a:ln/>
         </p:spPr>
         <p:txBody>
-          <a:bodyPr wrap="square" lIns="0" tIns="0" rIns="0" bIns="0" rtlCol="0" anchor="t"/>
+          <a:bodyPr wrap="none" lIns="0" tIns="0" rIns="0" bIns="0" rtlCol="0" anchor="t"/>
           <a:lstStyle/>
           <a:p>
             <a:pPr algn="r" indent="0" marL="0">

--- a/decks/mlops-platform/mlops-platform.pptx
+++ b/decks/mlops-platform/mlops-platform.pptx
@@ -1574,9 +1574,7 @@
           <a:ln/>
         </p:spPr>
         <p:txBody>
-          <a:bodyPr wrap="square" lIns="0" tIns="0" rIns="0" bIns="0" rtlCol="0" anchor="t">
-            <a:normAutofit/>
-          </a:bodyPr>
+          <a:bodyPr wrap="none" lIns="0" tIns="0" rIns="0" bIns="0" rtlCol="0" anchor="t"/>
           <a:lstStyle/>
           <a:p>
             <a:pPr algn="l" indent="0" marL="0">
@@ -5233,7 +5231,9 @@
           <a:ln/>
         </p:spPr>
         <p:txBody>
-          <a:bodyPr wrap="none" lIns="0" tIns="0" rIns="0" bIns="0" rtlCol="0" anchor="t"/>
+          <a:bodyPr wrap="square" lIns="0" tIns="0" rIns="0" bIns="0" rtlCol="0" anchor="t">
+            <a:normAutofit/>
+          </a:bodyPr>
           <a:lstStyle/>
           <a:p>
             <a:pPr algn="l" indent="0" marL="0">
@@ -6698,7 +6698,9 @@
           <a:ln/>
         </p:spPr>
         <p:txBody>
-          <a:bodyPr wrap="none" lIns="0" tIns="0" rIns="0" bIns="0" rtlCol="0" anchor="t"/>
+          <a:bodyPr wrap="square" lIns="0" tIns="0" rIns="0" bIns="0" rtlCol="0" anchor="t">
+            <a:normAutofit/>
+          </a:bodyPr>
           <a:lstStyle/>
           <a:p>
             <a:pPr algn="l" indent="0" marL="0">
@@ -7388,7 +7390,9 @@
           <a:ln/>
         </p:spPr>
         <p:txBody>
-          <a:bodyPr wrap="none" lIns="0" tIns="0" rIns="0" bIns="0" rtlCol="0" anchor="t"/>
+          <a:bodyPr wrap="square" lIns="0" tIns="0" rIns="0" bIns="0" rtlCol="0" anchor="t">
+            <a:normAutofit/>
+          </a:bodyPr>
           <a:lstStyle/>
           <a:p>
             <a:pPr algn="l" indent="0" marL="0">
